--- a/第三週(09-24)/第三週_第2節_簡報.pptx
+++ b/第三週(09-24)/第三週_第2節_簡報.pptx
@@ -3896,7 +3896,29 @@
                 <a:ea typeface="Arial Unicode MS"/>
                 <a:cs typeface="Arial Unicode MS"/>
               </a:rPr>
-              <a:t>現在三角形出來了：直的那一邊是高度 h，橫的那一邊是我們要的距離 d，夾角是 α。國中學過的 tan：tan α 等於對邊除以鄰邊，也就是 h 除以 d。反過來，</a:t>
+              <a:t>現在三角形出來了：直的那一邊是高度 h，橫的那一邊是我們要的距離 d，夾角是 α。
+</a:t>
+            </a:r>
+          </a:p>
+          <a:p>
+            <a:pPr algn="l">
+              <a:lnSpc>
+                <a:spcPct val="115000"/>
+              </a:lnSpc>
+              <a:spcAft>
+                <a:spcPts val="500"/>
+              </a:spcAft>
+            </a:pPr>
+            <a:r>
+              <a:rPr sz="1000" lang="zh-TW" dirty="0">
+                <a:solidFill>
+                  <a:srgbClr val="000000"/>
+                </a:solidFill>
+                <a:latin typeface="Arial Unicode MS"/>
+                <a:ea typeface="Arial Unicode MS"/>
+                <a:cs typeface="Arial Unicode MS"/>
+              </a:rPr>
+              <a:t>這裡會用到 </a:t>
             </a:r>
             <a:r>
               <a:rPr sz="1000" b="1" lang="zh-TW" dirty="0">
@@ -3907,7 +3929,7 @@
                 <a:ea typeface="Arial Unicode MS"/>
                 <a:cs typeface="Arial Unicode MS"/>
               </a:rPr>
-              <a:t>d 等於 h 除以 tan α</a:t>
+              <a:t>tan</a:t>
             </a:r>
             <a:r>
               <a:rPr sz="1000" lang="zh-TW" dirty="0">
@@ -3918,7 +3940,150 @@
                 <a:ea typeface="Arial Unicode MS"/>
                 <a:cs typeface="Arial Unicode MS"/>
               </a:rPr>
+              <a:t>。有些同學可能忘記了，我用一句話說明：</a:t>
+            </a:r>
+            <a:r>
+              <a:rPr sz="1000" b="1" lang="zh-TW" dirty="0">
+                <a:solidFill>
+                  <a:srgbClr val="000000"/>
+                </a:solidFill>
+                <a:latin typeface="Arial Unicode MS"/>
+                <a:ea typeface="Arial Unicode MS"/>
+                <a:cs typeface="Arial Unicode MS"/>
+              </a:rPr>
+              <a:t>tan 就是一張「角度對應到邊長比例」的對照表</a:t>
+            </a:r>
+            <a:r>
+              <a:rPr sz="1000" lang="zh-TW" dirty="0">
+                <a:solidFill>
+                  <a:srgbClr val="000000"/>
+                </a:solidFill>
+                <a:latin typeface="Arial Unicode MS"/>
+                <a:ea typeface="Arial Unicode MS"/>
+                <a:cs typeface="Arial Unicode MS"/>
+              </a:rPr>
+              <a:t>。給它一個角度，它回給你「直的邊」除以「橫的邊」是多少。所以 tan α ＝ h ÷ d。
+</a:t>
+            </a:r>
+          </a:p>
+          <a:p>
+            <a:pPr algn="l">
+              <a:lnSpc>
+                <a:spcPct val="115000"/>
+              </a:lnSpc>
+              <a:spcAft>
+                <a:spcPts val="500"/>
+              </a:spcAft>
+            </a:pPr>
+            <a:r>
+              <a:rPr sz="1000" lang="zh-TW" dirty="0">
+                <a:solidFill>
+                  <a:srgbClr val="000000"/>
+                </a:solidFill>
+                <a:latin typeface="Arial Unicode MS"/>
+                <a:ea typeface="Arial Unicode MS"/>
+                <a:cs typeface="Arial Unicode MS"/>
+              </a:rPr>
+              <a:t>反過來，</a:t>
+            </a:r>
+            <a:r>
+              <a:rPr sz="1000" b="1" lang="zh-TW" dirty="0">
+                <a:solidFill>
+                  <a:srgbClr val="000000"/>
+                </a:solidFill>
+                <a:latin typeface="Arial Unicode MS"/>
+                <a:ea typeface="Arial Unicode MS"/>
+                <a:cs typeface="Arial Unicode MS"/>
+              </a:rPr>
+              <a:t>d ＝ h ÷ tan α</a:t>
+            </a:r>
+            <a:r>
+              <a:rPr sz="1000" lang="zh-TW" dirty="0">
+                <a:solidFill>
+                  <a:srgbClr val="000000"/>
+                </a:solidFill>
+                <a:latin typeface="Arial Unicode MS"/>
+                <a:ea typeface="Arial Unicode MS"/>
+                <a:cs typeface="Arial Unicode MS"/>
+              </a:rPr>
               <a:t>。這就是右邊第一條式子。
+</a:t>
+            </a:r>
+          </a:p>
+          <a:p>
+            <a:pPr algn="l">
+              <a:lnSpc>
+                <a:spcPct val="115000"/>
+              </a:lnSpc>
+              <a:spcAft>
+                <a:spcPts val="500"/>
+              </a:spcAft>
+            </a:pPr>
+            <a:r>
+              <a:rPr sz="1000" lang="zh-TW" dirty="0">
+                <a:solidFill>
+                  <a:srgbClr val="000000"/>
+                </a:solidFill>
+                <a:latin typeface="Arial Unicode MS"/>
+                <a:ea typeface="Arial Unicode MS"/>
+                <a:cs typeface="Arial Unicode MS"/>
+              </a:rPr>
+              <a:t>（計算機操作，請在台上示範一次：手機的計算機把螢幕轉成橫的就會出現 tan。</a:t>
+            </a:r>
+            <a:r>
+              <a:rPr sz="1000" b="1" lang="zh-TW" dirty="0">
+                <a:solidFill>
+                  <a:srgbClr val="000000"/>
+                </a:solidFill>
+                <a:latin typeface="Arial Unicode MS"/>
+                <a:ea typeface="Arial Unicode MS"/>
+                <a:cs typeface="Arial Unicode MS"/>
+              </a:rPr>
+              <a:t>按之前務必確認是「DEG」（度）模式，不是 RAD</a:t>
+            </a:r>
+            <a:r>
+              <a:rPr sz="1000" lang="zh-TW" dirty="0">
+                <a:solidFill>
+                  <a:srgbClr val="000000"/>
+                </a:solidFill>
+                <a:latin typeface="Arial Unicode MS"/>
+                <a:ea typeface="Arial Unicode MS"/>
+                <a:cs typeface="Arial Unicode MS"/>
+              </a:rPr>
+              <a:t>——這是最常出錯的地方，同一個數字按錯模式，答案會差很多。按法是先輸入角度再按 tan。）
+</a:t>
+            </a:r>
+          </a:p>
+          <a:p>
+            <a:pPr algn="l">
+              <a:lnSpc>
+                <a:spcPct val="115000"/>
+              </a:lnSpc>
+              <a:spcAft>
+                <a:spcPts val="500"/>
+              </a:spcAft>
+            </a:pPr>
+            <a:r>
+              <a:rPr sz="1000" b="1" lang="zh-TW" dirty="0">
+                <a:solidFill>
+                  <a:srgbClr val="000000"/>
+                </a:solidFill>
+                <a:latin typeface="Arial Unicode MS"/>
+                <a:ea typeface="Arial Unicode MS"/>
+                <a:cs typeface="Arial Unicode MS"/>
+              </a:rPr>
+              <a:t>同學不需要自己會按 tan。</a:t>
+            </a:r>
+            <a:r>
+              <a:rPr sz="1000" lang="zh-TW" dirty="0">
+                <a:solidFill>
+                  <a:srgbClr val="000000"/>
+                </a:solidFill>
+                <a:latin typeface="Arial Unicode MS"/>
+                <a:ea typeface="Arial Unicode MS"/>
+                <a:cs typeface="Arial Unicode MS"/>
+              </a:rPr>
+              <a:t>今天的學習單和考試都不會要你們算三角函數——我要你們懂的是這個「角度愈小、距離愈遠」的關係，不是計算技巧。
 </a:t>
             </a:r>
           </a:p>

--- a/第三週(09-24)/第三週_第2節_簡報.pptx
+++ b/第三週(09-24)/第三週_第2節_簡報.pptx
@@ -1124,7 +1124,7 @@
                 <a:ea typeface="Arial Unicode MS"/>
                 <a:cs typeface="Arial Unicode MS"/>
               </a:rPr>
-              <a:t>所以答案是：那顆最貴、點最多、大家最信任的光達，在你腳邊那一圈是瞎的。補上那一圈的，是車上最便宜的超音波——一顆幾百塊。
+              <a:t>所以答案是：那顆最貴、點最多、大家最信任的光達，在你腳邊那一圈完全看不到。補上那一圈的，是車上最便宜的超音波——一顆幾百塊。
 </a:t>
             </a:r>
           </a:p>
@@ -2675,7 +2675,7 @@
                 <a:ea typeface="Arial Unicode MS"/>
                 <a:cs typeface="Arial Unicode MS"/>
               </a:rPr>
-              <a:t>同一顆光達、同一個小孩、同樣的距離，只因為光達裝高了一公尺，就從看得到變成完全看不到。這是真實世界發生過的事故型態——車子起步輾過蹲在車頭前的小孩，駕駛和感測器都沒看到。
+              <a:t>同一顆光達、同一個小孩、同樣的距離，只因為光達裝高了一公尺，就從看得到變成完全看不到。這是真實世界發生過的事故型態——車子起步的時候撞到蹲在車頭前的小孩，駕駛和感測器都沒有看到他。
 </a:t>
             </a:r>
           </a:p>
@@ -5491,7 +5491,7 @@
                 <a:ea typeface="Arial Unicode MS"/>
                 <a:cs typeface="Arial Unicode MS"/>
               </a:rPr>
-              <a:t> 誤差從零點三三掉到零點一六，剛好砍一半。合理——像素加倍，每一格代表的角度就減半，數得更細。
+              <a:t> 誤差從零點三三掉到零點一六，剛好少了一半。合理——像素加倍，每一格代表的角度就減半，數得更細。
 </a:t>
             </a:r>
           </a:p>
@@ -6701,7 +6701,7 @@
                 <a:ea typeface="Arial Unicode MS"/>
                 <a:cs typeface="Arial Unicode MS"/>
               </a:rPr>
-              <a:t>六十四條線之間的縫，在遠處被撐開了</a:t>
+              <a:t>六十四條線之間的縫，在遠處變寬了</a:t>
             </a:r>
             <a:r>
               <a:rPr sz="1000" lang="zh-TW" dirty="0">
@@ -8111,7 +8111,7 @@
                 <a:ea typeface="Arial" pitchFamily="34" charset="-122"/>
                 <a:cs typeface="Arial" pitchFamily="34" charset="-120"/>
               </a:rPr>
-              <a:t>Càng xa, hỏng càng nhanh</a:t>
+              <a:t>Càng xa thì đo càng không chính xác</a:t>
             </a:r>
             <a:endParaRPr lang="en-US" sz="3400" dirty="0"/>
           </a:p>
@@ -8131,7 +8131,7 @@
                 <a:ea typeface="微軟正黑體" pitchFamily="34" charset="-122"/>
                 <a:cs typeface="微軟正黑體" pitchFamily="34" charset="-120"/>
               </a:rPr>
-              <a:t>愈遠，壞得愈快</a:t>
+              <a:t>距離愈遠，量得愈不準</a:t>
             </a:r>
             <a:endParaRPr lang="en-US" sz="3400" dirty="0"/>
           </a:p>
@@ -29492,7 +29492,7 @@
                 <a:ea typeface="微軟正黑體" pitchFamily="34" charset="-122"/>
                 <a:cs typeface="微軟正黑體" pitchFamily="34" charset="-120"/>
               </a:rPr>
-              <a:t>「線束」＝垂直疊了幾支雷射。64 線分佈在 27° 內，相鄰兩線差 0.43°——這道縫在 10 公尺寬 7.5 公分，到 40 公尺就被撐開成 30 公分。</a:t>
+              <a:t>「線束」＝垂直疊了幾支雷射。64 線分佈在 27° 內，相鄰兩線差 0.43°——這道縫在 10 公尺寬 7.5 公分，到了 40 公尺就變成 30 公分。</a:t>
             </a:r>
             <a:endParaRPr lang="en-US" sz="1150" dirty="0"/>
           </a:p>
@@ -31616,7 +31616,7 @@
                 <a:ea typeface="微軟正黑體" pitchFamily="34" charset="-122"/>
                 <a:cs typeface="微軟正黑體" pitchFamily="34" charset="-120"/>
               </a:rPr>
-              <a:t>請看 80 公尺那一欄：16 線 0 點，128 線 5 點。錢買到的就是遠處那幾個點。</a:t>
+              <a:t>請看 80 公尺那一欄：16 線 0 點，128 線 5 點。多花的那些錢，買到的就是遠處那幾個點。</a:t>
             </a:r>
             <a:endParaRPr lang="en-US" sz="1200" dirty="0"/>
           </a:p>

--- a/第三週(09-24)/第三週_第2節_簡報.pptx
+++ b/第三週(09-24)/第三週_第2節_簡報.pptx
@@ -9813,8 +9813,8 @@
         </p:nvSpPr>
         <p:spPr>
           <a:xfrm>
-            <a:off x="2427183" y="1822216"/>
-            <a:ext cx="83393" cy="83393"/>
+            <a:off x="2434133" y="1808317"/>
+            <a:ext cx="69494" cy="69494"/>
           </a:xfrm>
           <a:prstGeom prst="ellipse">
             <a:avLst/>
@@ -9833,12 +9833,12 @@
         </p:nvSpPr>
         <p:spPr>
           <a:xfrm>
-            <a:off x="2413284" y="1916034"/>
+            <a:off x="2413284" y="1884761"/>
             <a:ext cx="111191" cy="125090"/>
           </a:xfrm>
           <a:prstGeom prst="roundRect">
             <a:avLst>
-              <a:gd name="adj" fmla="val 246711"/>
+              <a:gd name="adj" fmla="val 230263"/>
             </a:avLst>
           </a:prstGeom>
           <a:solidFill>
@@ -9854,9 +9854,9 @@
           <p:nvPr/>
         </p:nvSpPr>
         <p:spPr>
-          <a:xfrm rot="480000">
-            <a:off x="2420234" y="2037649"/>
-            <a:ext cx="31272" cy="90343"/>
+          <a:xfrm rot="960000">
+            <a:off x="2394174" y="1895185"/>
+            <a:ext cx="27798" cy="90343"/>
           </a:xfrm>
           <a:prstGeom prst="rect">
             <a:avLst/>
@@ -9874,9 +9874,9 @@
           <p:nvPr/>
         </p:nvSpPr>
         <p:spPr>
-          <a:xfrm rot="-480000">
-            <a:off x="2486254" y="2037649"/>
-            <a:ext cx="31272" cy="90343"/>
+          <a:xfrm rot="-960000">
+            <a:off x="2515789" y="1895185"/>
+            <a:ext cx="27798" cy="90343"/>
           </a:xfrm>
           <a:prstGeom prst="rect">
             <a:avLst/>
@@ -9890,6 +9890,46 @@
       <p:sp>
         <p:nvSpPr>
           <p:cNvPr id="32" name="Shape 30"/>
+          <p:cNvSpPr/>
+          <p:nvPr/>
+        </p:nvSpPr>
+        <p:spPr>
+          <a:xfrm rot="300000">
+            <a:off x="2432395" y="1992478"/>
+            <a:ext cx="31272" cy="125090"/>
+          </a:xfrm>
+          <a:prstGeom prst="rect">
+            <a:avLst/>
+          </a:prstGeom>
+          <a:solidFill>
+            <a:srgbClr val="007F72"/>
+          </a:solidFill>
+          <a:ln/>
+        </p:spPr>
+      </p:sp>
+      <p:sp>
+        <p:nvSpPr>
+          <p:cNvPr id="33" name="Shape 31"/>
+          <p:cNvSpPr/>
+          <p:nvPr/>
+        </p:nvSpPr>
+        <p:spPr>
+          <a:xfrm rot="-300000">
+            <a:off x="2474092" y="1992478"/>
+            <a:ext cx="31272" cy="125090"/>
+          </a:xfrm>
+          <a:prstGeom prst="rect">
+            <a:avLst/>
+          </a:prstGeom>
+          <a:solidFill>
+            <a:srgbClr val="007F72"/>
+          </a:solidFill>
+          <a:ln/>
+        </p:spPr>
+      </p:sp>
+      <p:sp>
+        <p:nvSpPr>
+          <p:cNvPr id="34" name="Shape 32"/>
           <p:cNvSpPr/>
           <p:nvPr/>
         </p:nvSpPr>
@@ -9911,7 +9951,7 @@
       </p:sp>
       <p:sp>
         <p:nvSpPr>
-          <p:cNvPr id="33" name="Shape 31"/>
+          <p:cNvPr id="35" name="Shape 33"/>
           <p:cNvSpPr/>
           <p:nvPr/>
         </p:nvSpPr>
@@ -9933,7 +9973,7 @@
       </p:sp>
       <p:sp>
         <p:nvSpPr>
-          <p:cNvPr id="34" name="Shape 32"/>
+          <p:cNvPr id="36" name="Shape 34"/>
           <p:cNvSpPr/>
           <p:nvPr/>
         </p:nvSpPr>
@@ -9953,7 +9993,7 @@
       </p:sp>
       <p:sp>
         <p:nvSpPr>
-          <p:cNvPr id="35" name="Shape 33"/>
+          <p:cNvPr id="37" name="Shape 35"/>
           <p:cNvSpPr/>
           <p:nvPr/>
         </p:nvSpPr>
@@ -9973,7 +10013,7 @@
       </p:sp>
       <p:sp>
         <p:nvSpPr>
-          <p:cNvPr id="36" name="Shape 34"/>
+          <p:cNvPr id="38" name="Shape 36"/>
           <p:cNvSpPr/>
           <p:nvPr/>
         </p:nvSpPr>
@@ -9993,7 +10033,7 @@
       </p:sp>
       <p:sp>
         <p:nvSpPr>
-          <p:cNvPr id="37" name="Shape 35"/>
+          <p:cNvPr id="39" name="Shape 37"/>
           <p:cNvSpPr/>
           <p:nvPr/>
         </p:nvSpPr>
@@ -10013,7 +10053,7 @@
       </p:sp>
       <p:sp>
         <p:nvSpPr>
-          <p:cNvPr id="38" name="Shape 36"/>
+          <p:cNvPr id="40" name="Shape 38"/>
           <p:cNvSpPr/>
           <p:nvPr/>
         </p:nvSpPr>
@@ -10033,7 +10073,7 @@
       </p:sp>
       <p:sp>
         <p:nvSpPr>
-          <p:cNvPr id="39" name="Text 37"/>
+          <p:cNvPr id="41" name="Text 39"/>
           <p:cNvSpPr txBox="1"/>
           <p:nvPr/>
         </p:nvSpPr>
@@ -10074,7 +10114,7 @@
       </p:sp>
       <p:sp>
         <p:nvSpPr>
-          <p:cNvPr id="40" name="Text 38"/>
+          <p:cNvPr id="42" name="Text 40"/>
           <p:cNvSpPr txBox="1"/>
           <p:nvPr/>
         </p:nvSpPr>
@@ -10136,7 +10176,7 @@
       </p:sp>
       <p:sp>
         <p:nvSpPr>
-          <p:cNvPr id="41" name="Shape 39"/>
+          <p:cNvPr id="43" name="Shape 41"/>
           <p:cNvSpPr/>
           <p:nvPr/>
         </p:nvSpPr>
@@ -10163,7 +10203,7 @@
       </p:sp>
       <p:sp>
         <p:nvSpPr>
-          <p:cNvPr id="42" name="Text 40"/>
+          <p:cNvPr id="44" name="Text 42"/>
           <p:cNvSpPr txBox="1"/>
           <p:nvPr/>
         </p:nvSpPr>
@@ -10225,7 +10265,7 @@
       </p:sp>
       <p:sp>
         <p:nvSpPr>
-          <p:cNvPr id="43" name="Shape 41"/>
+          <p:cNvPr id="45" name="Shape 43"/>
           <p:cNvSpPr/>
           <p:nvPr/>
         </p:nvSpPr>
@@ -10248,7 +10288,7 @@
       </p:sp>
       <p:sp>
         <p:nvSpPr>
-          <p:cNvPr id="44" name="Shape 42"/>
+          <p:cNvPr id="46" name="Shape 44"/>
           <p:cNvSpPr/>
           <p:nvPr/>
         </p:nvSpPr>
@@ -10271,7 +10311,7 @@
       </p:sp>
       <p:sp>
         <p:nvSpPr>
-          <p:cNvPr id="45" name="Shape 43"/>
+          <p:cNvPr id="47" name="Shape 45"/>
           <p:cNvSpPr/>
           <p:nvPr/>
         </p:nvSpPr>
@@ -10294,7 +10334,7 @@
       </p:sp>
       <p:sp>
         <p:nvSpPr>
-          <p:cNvPr id="46" name="Shape 44"/>
+          <p:cNvPr id="48" name="Shape 46"/>
           <p:cNvSpPr/>
           <p:nvPr/>
         </p:nvSpPr>
@@ -10317,7 +10357,7 @@
       </p:sp>
       <p:sp>
         <p:nvSpPr>
-          <p:cNvPr id="47" name="Shape 45"/>
+          <p:cNvPr id="49" name="Shape 47"/>
           <p:cNvSpPr/>
           <p:nvPr/>
         </p:nvSpPr>
@@ -10340,7 +10380,7 @@
       </p:sp>
       <p:sp>
         <p:nvSpPr>
-          <p:cNvPr id="48" name="Shape 46"/>
+          <p:cNvPr id="50" name="Shape 48"/>
           <p:cNvSpPr/>
           <p:nvPr/>
         </p:nvSpPr>
@@ -10363,7 +10403,7 @@
       </p:sp>
       <p:sp>
         <p:nvSpPr>
-          <p:cNvPr id="49" name="Shape 47"/>
+          <p:cNvPr id="51" name="Shape 49"/>
           <p:cNvSpPr/>
           <p:nvPr/>
         </p:nvSpPr>
@@ -10386,7 +10426,7 @@
       </p:sp>
       <p:sp>
         <p:nvSpPr>
-          <p:cNvPr id="50" name="Shape 48"/>
+          <p:cNvPr id="52" name="Shape 50"/>
           <p:cNvSpPr/>
           <p:nvPr/>
         </p:nvSpPr>
@@ -10409,7 +10449,7 @@
       </p:sp>
       <p:sp>
         <p:nvSpPr>
-          <p:cNvPr id="51" name="Shape 49"/>
+          <p:cNvPr id="53" name="Shape 51"/>
           <p:cNvSpPr/>
           <p:nvPr/>
         </p:nvSpPr>
@@ -10432,7 +10472,7 @@
       </p:sp>
       <p:sp>
         <p:nvSpPr>
-          <p:cNvPr id="52" name="Shape 50"/>
+          <p:cNvPr id="54" name="Shape 52"/>
           <p:cNvSpPr/>
           <p:nvPr/>
         </p:nvSpPr>
@@ -10455,7 +10495,7 @@
       </p:sp>
       <p:sp>
         <p:nvSpPr>
-          <p:cNvPr id="53" name="Shape 51"/>
+          <p:cNvPr id="55" name="Shape 53"/>
           <p:cNvSpPr/>
           <p:nvPr/>
         </p:nvSpPr>
@@ -10478,7 +10518,7 @@
       </p:sp>
       <p:sp>
         <p:nvSpPr>
-          <p:cNvPr id="54" name="Shape 52"/>
+          <p:cNvPr id="56" name="Shape 54"/>
           <p:cNvSpPr/>
           <p:nvPr/>
         </p:nvSpPr>
@@ -10501,7 +10541,7 @@
       </p:sp>
       <p:sp>
         <p:nvSpPr>
-          <p:cNvPr id="55" name="Shape 53"/>
+          <p:cNvPr id="57" name="Shape 55"/>
           <p:cNvSpPr/>
           <p:nvPr/>
         </p:nvSpPr>
@@ -10524,7 +10564,7 @@
       </p:sp>
       <p:sp>
         <p:nvSpPr>
-          <p:cNvPr id="56" name="Shape 54"/>
+          <p:cNvPr id="58" name="Shape 56"/>
           <p:cNvSpPr/>
           <p:nvPr/>
         </p:nvSpPr>
@@ -10547,7 +10587,7 @@
       </p:sp>
       <p:sp>
         <p:nvSpPr>
-          <p:cNvPr id="57" name="Shape 55"/>
+          <p:cNvPr id="59" name="Shape 57"/>
           <p:cNvSpPr/>
           <p:nvPr/>
         </p:nvSpPr>
@@ -10570,7 +10610,7 @@
       </p:sp>
       <p:sp>
         <p:nvSpPr>
-          <p:cNvPr id="58" name="Shape 56"/>
+          <p:cNvPr id="60" name="Shape 58"/>
           <p:cNvSpPr/>
           <p:nvPr/>
         </p:nvSpPr>
@@ -10593,7 +10633,7 @@
       </p:sp>
       <p:sp>
         <p:nvSpPr>
-          <p:cNvPr id="59" name="Shape 57"/>
+          <p:cNvPr id="61" name="Shape 59"/>
           <p:cNvSpPr/>
           <p:nvPr/>
         </p:nvSpPr>
@@ -10616,7 +10656,7 @@
       </p:sp>
       <p:sp>
         <p:nvSpPr>
-          <p:cNvPr id="60" name="Shape 58"/>
+          <p:cNvPr id="62" name="Shape 60"/>
           <p:cNvSpPr/>
           <p:nvPr/>
         </p:nvSpPr>
@@ -10638,7 +10678,7 @@
       </p:sp>
       <p:sp>
         <p:nvSpPr>
-          <p:cNvPr id="61" name="Shape 59"/>
+          <p:cNvPr id="63" name="Shape 61"/>
           <p:cNvSpPr/>
           <p:nvPr/>
         </p:nvSpPr>
@@ -10660,7 +10700,7 @@
       </p:sp>
       <p:sp>
         <p:nvSpPr>
-          <p:cNvPr id="62" name="Shape 60"/>
+          <p:cNvPr id="64" name="Shape 62"/>
           <p:cNvSpPr/>
           <p:nvPr/>
         </p:nvSpPr>
@@ -10680,7 +10720,7 @@
       </p:sp>
       <p:sp>
         <p:nvSpPr>
-          <p:cNvPr id="63" name="Shape 61"/>
+          <p:cNvPr id="65" name="Shape 63"/>
           <p:cNvSpPr/>
           <p:nvPr/>
         </p:nvSpPr>
@@ -10700,7 +10740,7 @@
       </p:sp>
       <p:sp>
         <p:nvSpPr>
-          <p:cNvPr id="64" name="Shape 62"/>
+          <p:cNvPr id="66" name="Shape 64"/>
           <p:cNvSpPr/>
           <p:nvPr/>
         </p:nvSpPr>
@@ -10720,7 +10760,7 @@
       </p:sp>
       <p:sp>
         <p:nvSpPr>
-          <p:cNvPr id="65" name="Shape 63"/>
+          <p:cNvPr id="67" name="Shape 65"/>
           <p:cNvSpPr/>
           <p:nvPr/>
         </p:nvSpPr>
@@ -10740,7 +10780,7 @@
       </p:sp>
       <p:sp>
         <p:nvSpPr>
-          <p:cNvPr id="66" name="Text 64"/>
+          <p:cNvPr id="68" name="Text 66"/>
           <p:cNvSpPr txBox="1"/>
           <p:nvPr/>
         </p:nvSpPr>
@@ -10779,14 +10819,14 @@
       </p:sp>
       <p:sp>
         <p:nvSpPr>
-          <p:cNvPr id="67" name="Shape 65"/>
-          <p:cNvSpPr/>
-          <p:nvPr/>
-        </p:nvSpPr>
-        <p:spPr>
-          <a:xfrm>
-            <a:off x="6633423" y="1822216"/>
-            <a:ext cx="83393" cy="83393"/>
+          <p:cNvPr id="69" name="Shape 67"/>
+          <p:cNvSpPr/>
+          <p:nvPr/>
+        </p:nvSpPr>
+        <p:spPr>
+          <a:xfrm>
+            <a:off x="6640373" y="1808317"/>
+            <a:ext cx="69494" cy="69494"/>
           </a:xfrm>
           <a:prstGeom prst="ellipse">
             <a:avLst/>
@@ -10799,18 +10839,18 @@
       </p:sp>
       <p:sp>
         <p:nvSpPr>
-          <p:cNvPr id="68" name="Shape 66"/>
-          <p:cNvSpPr/>
-          <p:nvPr/>
-        </p:nvSpPr>
-        <p:spPr>
-          <a:xfrm>
-            <a:off x="6619524" y="1916034"/>
+          <p:cNvPr id="70" name="Shape 68"/>
+          <p:cNvSpPr/>
+          <p:nvPr/>
+        </p:nvSpPr>
+        <p:spPr>
+          <a:xfrm>
+            <a:off x="6619524" y="1884761"/>
             <a:ext cx="111191" cy="125090"/>
           </a:xfrm>
           <a:prstGeom prst="roundRect">
             <a:avLst>
-              <a:gd name="adj" fmla="val 246711"/>
+              <a:gd name="adj" fmla="val 230263"/>
             </a:avLst>
           </a:prstGeom>
           <a:solidFill>
@@ -10821,14 +10861,14 @@
       </p:sp>
       <p:sp>
         <p:nvSpPr>
-          <p:cNvPr id="69" name="Shape 67"/>
-          <p:cNvSpPr/>
-          <p:nvPr/>
-        </p:nvSpPr>
-        <p:spPr>
-          <a:xfrm rot="480000">
-            <a:off x="6626474" y="2037649"/>
-            <a:ext cx="31272" cy="90343"/>
+          <p:cNvPr id="71" name="Shape 69"/>
+          <p:cNvSpPr/>
+          <p:nvPr/>
+        </p:nvSpPr>
+        <p:spPr>
+          <a:xfrm rot="960000">
+            <a:off x="6600414" y="1895185"/>
+            <a:ext cx="27798" cy="90343"/>
           </a:xfrm>
           <a:prstGeom prst="rect">
             <a:avLst/>
@@ -10841,14 +10881,14 @@
       </p:sp>
       <p:sp>
         <p:nvSpPr>
-          <p:cNvPr id="70" name="Shape 68"/>
-          <p:cNvSpPr/>
-          <p:nvPr/>
-        </p:nvSpPr>
-        <p:spPr>
-          <a:xfrm rot="-480000">
-            <a:off x="6692494" y="2037649"/>
-            <a:ext cx="31272" cy="90343"/>
+          <p:cNvPr id="72" name="Shape 70"/>
+          <p:cNvSpPr/>
+          <p:nvPr/>
+        </p:nvSpPr>
+        <p:spPr>
+          <a:xfrm rot="-960000">
+            <a:off x="6722029" y="1895185"/>
+            <a:ext cx="27798" cy="90343"/>
           </a:xfrm>
           <a:prstGeom prst="rect">
             <a:avLst/>
@@ -10861,7 +10901,47 @@
       </p:sp>
       <p:sp>
         <p:nvSpPr>
-          <p:cNvPr id="71" name="Shape 69"/>
+          <p:cNvPr id="73" name="Shape 71"/>
+          <p:cNvSpPr/>
+          <p:nvPr/>
+        </p:nvSpPr>
+        <p:spPr>
+          <a:xfrm rot="300000">
+            <a:off x="6638635" y="1992478"/>
+            <a:ext cx="31272" cy="125090"/>
+          </a:xfrm>
+          <a:prstGeom prst="rect">
+            <a:avLst/>
+          </a:prstGeom>
+          <a:solidFill>
+            <a:srgbClr val="007F72"/>
+          </a:solidFill>
+          <a:ln/>
+        </p:spPr>
+      </p:sp>
+      <p:sp>
+        <p:nvSpPr>
+          <p:cNvPr id="74" name="Shape 72"/>
+          <p:cNvSpPr/>
+          <p:nvPr/>
+        </p:nvSpPr>
+        <p:spPr>
+          <a:xfrm rot="-300000">
+            <a:off x="6680332" y="1992478"/>
+            <a:ext cx="31272" cy="125090"/>
+          </a:xfrm>
+          <a:prstGeom prst="rect">
+            <a:avLst/>
+          </a:prstGeom>
+          <a:solidFill>
+            <a:srgbClr val="007F72"/>
+          </a:solidFill>
+          <a:ln/>
+        </p:spPr>
+      </p:sp>
+      <p:sp>
+        <p:nvSpPr>
+          <p:cNvPr id="75" name="Shape 73"/>
           <p:cNvSpPr/>
           <p:nvPr/>
         </p:nvSpPr>
@@ -10883,7 +10963,7 @@
       </p:sp>
       <p:sp>
         <p:nvSpPr>
-          <p:cNvPr id="72" name="Shape 70"/>
+          <p:cNvPr id="76" name="Shape 74"/>
           <p:cNvSpPr/>
           <p:nvPr/>
         </p:nvSpPr>
@@ -10905,7 +10985,7 @@
       </p:sp>
       <p:sp>
         <p:nvSpPr>
-          <p:cNvPr id="73" name="Shape 71"/>
+          <p:cNvPr id="77" name="Shape 75"/>
           <p:cNvSpPr/>
           <p:nvPr/>
         </p:nvSpPr>
@@ -10925,7 +11005,7 @@
       </p:sp>
       <p:sp>
         <p:nvSpPr>
-          <p:cNvPr id="74" name="Shape 72"/>
+          <p:cNvPr id="78" name="Shape 76"/>
           <p:cNvSpPr/>
           <p:nvPr/>
         </p:nvSpPr>
@@ -10945,7 +11025,7 @@
       </p:sp>
       <p:sp>
         <p:nvSpPr>
-          <p:cNvPr id="75" name="Shape 73"/>
+          <p:cNvPr id="79" name="Shape 77"/>
           <p:cNvSpPr/>
           <p:nvPr/>
         </p:nvSpPr>
@@ -10965,7 +11045,7 @@
       </p:sp>
       <p:sp>
         <p:nvSpPr>
-          <p:cNvPr id="76" name="Shape 74"/>
+          <p:cNvPr id="80" name="Shape 78"/>
           <p:cNvSpPr/>
           <p:nvPr/>
         </p:nvSpPr>
@@ -10985,7 +11065,7 @@
       </p:sp>
       <p:sp>
         <p:nvSpPr>
-          <p:cNvPr id="77" name="Text 75"/>
+          <p:cNvPr id="81" name="Text 79"/>
           <p:cNvSpPr txBox="1"/>
           <p:nvPr/>
         </p:nvSpPr>
@@ -11024,7 +11104,7 @@
       </p:sp>
       <p:sp>
         <p:nvSpPr>
-          <p:cNvPr id="78" name="Shape 76"/>
+          <p:cNvPr id="82" name="Shape 80"/>
           <p:cNvSpPr/>
           <p:nvPr/>
         </p:nvSpPr>
@@ -11044,7 +11124,7 @@
       </p:sp>
       <p:sp>
         <p:nvSpPr>
-          <p:cNvPr id="79" name="Text 77"/>
+          <p:cNvPr id="83" name="Text 81"/>
           <p:cNvSpPr txBox="1"/>
           <p:nvPr/>
         </p:nvSpPr>
@@ -11085,7 +11165,7 @@
       </p:sp>
       <p:sp>
         <p:nvSpPr>
-          <p:cNvPr id="80" name="Text 78"/>
+          <p:cNvPr id="84" name="Text 82"/>
           <p:cNvSpPr txBox="1"/>
           <p:nvPr/>
         </p:nvSpPr>
@@ -11147,7 +11227,7 @@
       </p:sp>
       <p:sp>
         <p:nvSpPr>
-          <p:cNvPr id="81" name="Shape 79"/>
+          <p:cNvPr id="85" name="Shape 83"/>
           <p:cNvSpPr/>
           <p:nvPr/>
         </p:nvSpPr>
@@ -11174,7 +11254,7 @@
       </p:sp>
       <p:sp>
         <p:nvSpPr>
-          <p:cNvPr id="82" name="Text 80"/>
+          <p:cNvPr id="86" name="Text 84"/>
           <p:cNvSpPr txBox="1"/>
           <p:nvPr/>
         </p:nvSpPr>
@@ -11236,7 +11316,7 @@
       </p:sp>
       <p:pic>
         <p:nvPicPr>
-          <p:cNvPr id="84" name="Image 0" descr="/Users/tsengchenghsun/Class/carClass/Claude outputs/第三週(9-24)/src/logo.png">    </p:cNvPr>
+          <p:cNvPr id="88" name="Image 0" descr="/Users/tsengchenghsun/Class/carClass/Claude outputs/第三週(9-24)/src/logo.png">    </p:cNvPr>
           <p:cNvPicPr>
             <a:picLocks noChangeAspect="1"/>
           </p:cNvPicPr>
@@ -11260,7 +11340,7 @@
       </p:pic>
       <p:sp>
         <p:nvSpPr>
-          <p:cNvPr id="85" name="Text 81"/>
+          <p:cNvPr id="89" name="Text 85"/>
           <p:cNvSpPr txBox="1"/>
           <p:nvPr/>
         </p:nvSpPr>
@@ -11299,7 +11379,7 @@
       </p:sp>
       <p:sp>
         <p:nvSpPr>
-          <p:cNvPr id="86" name="Text 82"/>
+          <p:cNvPr id="90" name="Text 86"/>
           <p:cNvSpPr txBox="1"/>
           <p:nvPr/>
         </p:nvSpPr>
@@ -13950,8 +14030,8 @@
         </p:nvSpPr>
         <p:spPr>
           <a:xfrm>
-            <a:off x="3478378" y="2288743"/>
-            <a:ext cx="120701" cy="120701"/>
+            <a:off x="3488436" y="2268626"/>
+            <a:ext cx="100584" cy="100584"/>
           </a:xfrm>
           <a:prstGeom prst="ellipse">
             <a:avLst/>
@@ -13970,12 +14050,12 @@
         </p:nvSpPr>
         <p:spPr>
           <a:xfrm>
-            <a:off x="3458261" y="2424532"/>
+            <a:off x="3458261" y="2379269"/>
             <a:ext cx="160934" cy="181051"/>
           </a:xfrm>
           <a:prstGeom prst="roundRect">
             <a:avLst>
-              <a:gd name="adj" fmla="val 170455"/>
+              <a:gd name="adj" fmla="val 159091"/>
             </a:avLst>
           </a:prstGeom>
           <a:solidFill>
@@ -13991,9 +14071,9 @@
           <p:nvPr/>
         </p:nvSpPr>
         <p:spPr>
-          <a:xfrm rot="480000">
-            <a:off x="3468319" y="2600554"/>
-            <a:ext cx="45263" cy="130759"/>
+          <a:xfrm rot="960000">
+            <a:off x="3430600" y="2394356"/>
+            <a:ext cx="40234" cy="130759"/>
           </a:xfrm>
           <a:prstGeom prst="rect">
             <a:avLst/>
@@ -14011,9 +14091,9 @@
           <p:nvPr/>
         </p:nvSpPr>
         <p:spPr>
-          <a:xfrm rot="-480000">
-            <a:off x="3563874" y="2600554"/>
-            <a:ext cx="45263" cy="130759"/>
+          <a:xfrm rot="-960000">
+            <a:off x="3606622" y="2394356"/>
+            <a:ext cx="40234" cy="130759"/>
           </a:xfrm>
           <a:prstGeom prst="rect">
             <a:avLst/>
@@ -14026,7 +14106,47 @@
       </p:sp>
       <p:sp>
         <p:nvSpPr>
-          <p:cNvPr id="21" name="Text 19"/>
+          <p:cNvPr id="21" name="Shape 19"/>
+          <p:cNvSpPr/>
+          <p:nvPr/>
+        </p:nvSpPr>
+        <p:spPr>
+          <a:xfrm rot="300000">
+            <a:off x="3485921" y="2535174"/>
+            <a:ext cx="45263" cy="181051"/>
+          </a:xfrm>
+          <a:prstGeom prst="rect">
+            <a:avLst/>
+          </a:prstGeom>
+          <a:solidFill>
+            <a:srgbClr val="007F72"/>
+          </a:solidFill>
+          <a:ln/>
+        </p:spPr>
+      </p:sp>
+      <p:sp>
+        <p:nvSpPr>
+          <p:cNvPr id="22" name="Shape 20"/>
+          <p:cNvSpPr/>
+          <p:nvPr/>
+        </p:nvSpPr>
+        <p:spPr>
+          <a:xfrm rot="-300000">
+            <a:off x="3546272" y="2535174"/>
+            <a:ext cx="45263" cy="181051"/>
+          </a:xfrm>
+          <a:prstGeom prst="rect">
+            <a:avLst/>
+          </a:prstGeom>
+          <a:solidFill>
+            <a:srgbClr val="007F72"/>
+          </a:solidFill>
+          <a:ln/>
+        </p:spPr>
+      </p:sp>
+      <p:sp>
+        <p:nvSpPr>
+          <p:cNvPr id="23" name="Text 21"/>
           <p:cNvSpPr txBox="1"/>
           <p:nvPr/>
         </p:nvSpPr>
@@ -14088,7 +14208,7 @@
       </p:sp>
       <p:sp>
         <p:nvSpPr>
-          <p:cNvPr id="22" name="Text 20"/>
+          <p:cNvPr id="24" name="Text 22"/>
           <p:cNvSpPr txBox="1"/>
           <p:nvPr/>
         </p:nvSpPr>
@@ -14150,7 +14270,7 @@
       </p:sp>
       <p:sp>
         <p:nvSpPr>
-          <p:cNvPr id="23" name="Shape 21"/>
+          <p:cNvPr id="25" name="Shape 23"/>
           <p:cNvSpPr/>
           <p:nvPr/>
         </p:nvSpPr>
@@ -14177,7 +14297,7 @@
       </p:sp>
       <p:sp>
         <p:nvSpPr>
-          <p:cNvPr id="24" name="Text 22"/>
+          <p:cNvPr id="26" name="Text 24"/>
           <p:cNvSpPr txBox="1"/>
           <p:nvPr/>
         </p:nvSpPr>
@@ -14239,7 +14359,7 @@
       </p:sp>
       <p:sp>
         <p:nvSpPr>
-          <p:cNvPr id="25" name="Shape 23"/>
+          <p:cNvPr id="27" name="Shape 25"/>
           <p:cNvSpPr/>
           <p:nvPr/>
         </p:nvSpPr>
@@ -14262,7 +14382,7 @@
       </p:sp>
       <p:sp>
         <p:nvSpPr>
-          <p:cNvPr id="26" name="Shape 24"/>
+          <p:cNvPr id="28" name="Shape 26"/>
           <p:cNvSpPr/>
           <p:nvPr/>
         </p:nvSpPr>
@@ -14284,7 +14404,7 @@
       </p:sp>
       <p:sp>
         <p:nvSpPr>
-          <p:cNvPr id="27" name="Shape 25"/>
+          <p:cNvPr id="29" name="Shape 27"/>
           <p:cNvSpPr/>
           <p:nvPr/>
         </p:nvSpPr>
@@ -14306,7 +14426,7 @@
       </p:sp>
       <p:sp>
         <p:nvSpPr>
-          <p:cNvPr id="28" name="Shape 26"/>
+          <p:cNvPr id="30" name="Shape 28"/>
           <p:cNvSpPr/>
           <p:nvPr/>
         </p:nvSpPr>
@@ -14329,7 +14449,7 @@
       </p:sp>
       <p:sp>
         <p:nvSpPr>
-          <p:cNvPr id="29" name="Shape 27"/>
+          <p:cNvPr id="31" name="Shape 29"/>
           <p:cNvSpPr/>
           <p:nvPr/>
         </p:nvSpPr>
@@ -14356,7 +14476,7 @@
       </p:sp>
       <p:sp>
         <p:nvSpPr>
-          <p:cNvPr id="30" name="Shape 28"/>
+          <p:cNvPr id="32" name="Shape 30"/>
           <p:cNvSpPr/>
           <p:nvPr/>
         </p:nvSpPr>
@@ -14383,7 +14503,7 @@
       </p:sp>
       <p:sp>
         <p:nvSpPr>
-          <p:cNvPr id="31" name="Shape 29"/>
+          <p:cNvPr id="33" name="Shape 31"/>
           <p:cNvSpPr/>
           <p:nvPr/>
         </p:nvSpPr>
@@ -14403,7 +14523,7 @@
       </p:sp>
       <p:sp>
         <p:nvSpPr>
-          <p:cNvPr id="32" name="Shape 30"/>
+          <p:cNvPr id="34" name="Shape 32"/>
           <p:cNvSpPr/>
           <p:nvPr/>
         </p:nvSpPr>
@@ -14423,7 +14543,7 @@
       </p:sp>
       <p:sp>
         <p:nvSpPr>
-          <p:cNvPr id="33" name="Shape 31"/>
+          <p:cNvPr id="35" name="Shape 33"/>
           <p:cNvSpPr/>
           <p:nvPr/>
         </p:nvSpPr>
@@ -14446,7 +14566,7 @@
       </p:sp>
       <p:sp>
         <p:nvSpPr>
-          <p:cNvPr id="34" name="Shape 32"/>
+          <p:cNvPr id="36" name="Shape 34"/>
           <p:cNvSpPr/>
           <p:nvPr/>
         </p:nvSpPr>
@@ -14468,7 +14588,7 @@
       </p:sp>
       <p:sp>
         <p:nvSpPr>
-          <p:cNvPr id="35" name="Text 33"/>
+          <p:cNvPr id="37" name="Text 35"/>
           <p:cNvSpPr txBox="1"/>
           <p:nvPr/>
         </p:nvSpPr>
@@ -14507,7 +14627,7 @@
       </p:sp>
       <p:sp>
         <p:nvSpPr>
-          <p:cNvPr id="36" name="Text 34"/>
+          <p:cNvPr id="38" name="Text 36"/>
           <p:cNvSpPr txBox="1"/>
           <p:nvPr/>
         </p:nvSpPr>
@@ -14548,38 +14668,38 @@
       </p:sp>
       <p:sp>
         <p:nvSpPr>
-          <p:cNvPr id="37" name="Shape 35"/>
-          <p:cNvSpPr/>
-          <p:nvPr/>
-        </p:nvSpPr>
-        <p:spPr>
-          <a:xfrm>
-            <a:off x="7684618" y="2288743"/>
-            <a:ext cx="120701" cy="120701"/>
-          </a:xfrm>
-          <a:prstGeom prst="ellipse">
-            <a:avLst/>
-          </a:prstGeom>
-          <a:solidFill>
-            <a:srgbClr val="D9463E"/>
-          </a:solidFill>
-          <a:ln/>
-        </p:spPr>
-      </p:sp>
-      <p:sp>
-        <p:nvSpPr>
-          <p:cNvPr id="38" name="Shape 36"/>
-          <p:cNvSpPr/>
-          <p:nvPr/>
-        </p:nvSpPr>
-        <p:spPr>
-          <a:xfrm>
-            <a:off x="7664501" y="2424532"/>
+          <p:cNvPr id="39" name="Shape 37"/>
+          <p:cNvSpPr/>
+          <p:nvPr/>
+        </p:nvSpPr>
+        <p:spPr>
+          <a:xfrm>
+            <a:off x="7694676" y="2268626"/>
+            <a:ext cx="100584" cy="100584"/>
+          </a:xfrm>
+          <a:prstGeom prst="ellipse">
+            <a:avLst/>
+          </a:prstGeom>
+          <a:solidFill>
+            <a:srgbClr val="D9463E"/>
+          </a:solidFill>
+          <a:ln/>
+        </p:spPr>
+      </p:sp>
+      <p:sp>
+        <p:nvSpPr>
+          <p:cNvPr id="40" name="Shape 38"/>
+          <p:cNvSpPr/>
+          <p:nvPr/>
+        </p:nvSpPr>
+        <p:spPr>
+          <a:xfrm>
+            <a:off x="7664501" y="2379269"/>
             <a:ext cx="160934" cy="181051"/>
           </a:xfrm>
           <a:prstGeom prst="roundRect">
             <a:avLst>
-              <a:gd name="adj" fmla="val 170455"/>
+              <a:gd name="adj" fmla="val 159091"/>
             </a:avLst>
           </a:prstGeom>
           <a:solidFill>
@@ -14590,14 +14710,14 @@
       </p:sp>
       <p:sp>
         <p:nvSpPr>
-          <p:cNvPr id="39" name="Shape 37"/>
-          <p:cNvSpPr/>
-          <p:nvPr/>
-        </p:nvSpPr>
-        <p:spPr>
-          <a:xfrm rot="480000">
-            <a:off x="7674559" y="2600554"/>
-            <a:ext cx="45263" cy="130759"/>
+          <p:cNvPr id="41" name="Shape 39"/>
+          <p:cNvSpPr/>
+          <p:nvPr/>
+        </p:nvSpPr>
+        <p:spPr>
+          <a:xfrm rot="960000">
+            <a:off x="7636840" y="2394356"/>
+            <a:ext cx="40234" cy="130759"/>
           </a:xfrm>
           <a:prstGeom prst="rect">
             <a:avLst/>
@@ -14610,14 +14730,14 @@
       </p:sp>
       <p:sp>
         <p:nvSpPr>
-          <p:cNvPr id="40" name="Shape 38"/>
-          <p:cNvSpPr/>
-          <p:nvPr/>
-        </p:nvSpPr>
-        <p:spPr>
-          <a:xfrm rot="-480000">
-            <a:off x="7770114" y="2600554"/>
-            <a:ext cx="45263" cy="130759"/>
+          <p:cNvPr id="42" name="Shape 40"/>
+          <p:cNvSpPr/>
+          <p:nvPr/>
+        </p:nvSpPr>
+        <p:spPr>
+          <a:xfrm rot="-960000">
+            <a:off x="7812862" y="2394356"/>
+            <a:ext cx="40234" cy="130759"/>
           </a:xfrm>
           <a:prstGeom prst="rect">
             <a:avLst/>
@@ -14630,7 +14750,47 @@
       </p:sp>
       <p:sp>
         <p:nvSpPr>
-          <p:cNvPr id="41" name="Text 39"/>
+          <p:cNvPr id="43" name="Shape 41"/>
+          <p:cNvSpPr/>
+          <p:nvPr/>
+        </p:nvSpPr>
+        <p:spPr>
+          <a:xfrm rot="300000">
+            <a:off x="7692161" y="2535174"/>
+            <a:ext cx="45263" cy="181051"/>
+          </a:xfrm>
+          <a:prstGeom prst="rect">
+            <a:avLst/>
+          </a:prstGeom>
+          <a:solidFill>
+            <a:srgbClr val="D9463E"/>
+          </a:solidFill>
+          <a:ln/>
+        </p:spPr>
+      </p:sp>
+      <p:sp>
+        <p:nvSpPr>
+          <p:cNvPr id="44" name="Shape 42"/>
+          <p:cNvSpPr/>
+          <p:nvPr/>
+        </p:nvSpPr>
+        <p:spPr>
+          <a:xfrm rot="-300000">
+            <a:off x="7752512" y="2535174"/>
+            <a:ext cx="45263" cy="181051"/>
+          </a:xfrm>
+          <a:prstGeom prst="rect">
+            <a:avLst/>
+          </a:prstGeom>
+          <a:solidFill>
+            <a:srgbClr val="D9463E"/>
+          </a:solidFill>
+          <a:ln/>
+        </p:spPr>
+      </p:sp>
+      <p:sp>
+        <p:nvSpPr>
+          <p:cNvPr id="45" name="Text 43"/>
           <p:cNvSpPr txBox="1"/>
           <p:nvPr/>
         </p:nvSpPr>
@@ -14692,7 +14852,7 @@
       </p:sp>
       <p:sp>
         <p:nvSpPr>
-          <p:cNvPr id="42" name="Text 40"/>
+          <p:cNvPr id="46" name="Text 44"/>
           <p:cNvSpPr txBox="1"/>
           <p:nvPr/>
         </p:nvSpPr>
@@ -14754,7 +14914,7 @@
       </p:sp>
       <p:sp>
         <p:nvSpPr>
-          <p:cNvPr id="43" name="Shape 41"/>
+          <p:cNvPr id="47" name="Shape 45"/>
           <p:cNvSpPr/>
           <p:nvPr/>
         </p:nvSpPr>
@@ -14781,7 +14941,7 @@
       </p:sp>
       <p:sp>
         <p:nvSpPr>
-          <p:cNvPr id="44" name="Text 42"/>
+          <p:cNvPr id="48" name="Text 46"/>
           <p:cNvSpPr txBox="1"/>
           <p:nvPr/>
         </p:nvSpPr>
@@ -14843,7 +15003,7 @@
       </p:sp>
       <p:pic>
         <p:nvPicPr>
-          <p:cNvPr id="46" name="Image 0" descr="/Users/tsengchenghsun/Class/carClass/Claude outputs/第三週(9-24)/src/logo.png">    </p:cNvPr>
+          <p:cNvPr id="50" name="Image 0" descr="/Users/tsengchenghsun/Class/carClass/Claude outputs/第三週(9-24)/src/logo.png">    </p:cNvPr>
           <p:cNvPicPr>
             <a:picLocks noChangeAspect="1"/>
           </p:cNvPicPr>
@@ -14867,7 +15027,7 @@
       </p:pic>
       <p:sp>
         <p:nvSpPr>
-          <p:cNvPr id="47" name="Text 43"/>
+          <p:cNvPr id="51" name="Text 47"/>
           <p:cNvSpPr txBox="1"/>
           <p:nvPr/>
         </p:nvSpPr>
@@ -14906,7 +15066,7 @@
       </p:sp>
       <p:sp>
         <p:nvSpPr>
-          <p:cNvPr id="48" name="Text 44"/>
+          <p:cNvPr id="52" name="Text 48"/>
           <p:cNvSpPr txBox="1"/>
           <p:nvPr/>
         </p:nvSpPr>
@@ -16573,8 +16733,8 @@
         </p:nvSpPr>
         <p:spPr>
           <a:xfrm>
-            <a:off x="4644238" y="2307031"/>
-            <a:ext cx="230429" cy="230429"/>
+            <a:off x="4663440" y="2268626"/>
+            <a:ext cx="192024" cy="192024"/>
           </a:xfrm>
           <a:prstGeom prst="ellipse">
             <a:avLst/>
@@ -16593,12 +16753,12 @@
         </p:nvSpPr>
         <p:spPr>
           <a:xfrm>
-            <a:off x="4605833" y="2566264"/>
+            <a:off x="4605833" y="2479853"/>
             <a:ext cx="307238" cy="345643"/>
           </a:xfrm>
           <a:prstGeom prst="roundRect">
             <a:avLst>
-              <a:gd name="adj" fmla="val 89286"/>
+              <a:gd name="adj" fmla="val 83333"/>
             </a:avLst>
           </a:prstGeom>
           <a:solidFill>
@@ -16614,9 +16774,9 @@
           <p:nvPr/>
         </p:nvSpPr>
         <p:spPr>
-          <a:xfrm rot="480000">
-            <a:off x="4625035" y="2902306"/>
-            <a:ext cx="86411" cy="249631"/>
+          <a:xfrm rot="960000">
+            <a:off x="4553026" y="2508656"/>
+            <a:ext cx="76810" cy="249631"/>
           </a:xfrm>
           <a:prstGeom prst="rect">
             <a:avLst/>
@@ -16634,9 +16794,9 @@
           <p:nvPr/>
         </p:nvSpPr>
         <p:spPr>
-          <a:xfrm rot="-480000">
-            <a:off x="4807458" y="2902306"/>
-            <a:ext cx="86411" cy="249631"/>
+          <a:xfrm rot="-960000">
+            <a:off x="4889068" y="2508656"/>
+            <a:ext cx="76810" cy="249631"/>
           </a:xfrm>
           <a:prstGeom prst="rect">
             <a:avLst/>
@@ -16649,7 +16809,47 @@
       </p:sp>
       <p:sp>
         <p:nvSpPr>
-          <p:cNvPr id="15" name="Text 13"/>
+          <p:cNvPr id="15" name="Shape 13"/>
+          <p:cNvSpPr/>
+          <p:nvPr/>
+        </p:nvSpPr>
+        <p:spPr>
+          <a:xfrm rot="300000">
+            <a:off x="4658639" y="2777490"/>
+            <a:ext cx="86411" cy="345643"/>
+          </a:xfrm>
+          <a:prstGeom prst="rect">
+            <a:avLst/>
+          </a:prstGeom>
+          <a:solidFill>
+            <a:srgbClr val="007F72"/>
+          </a:solidFill>
+          <a:ln/>
+        </p:spPr>
+      </p:sp>
+      <p:sp>
+        <p:nvSpPr>
+          <p:cNvPr id="16" name="Shape 14"/>
+          <p:cNvSpPr/>
+          <p:nvPr/>
+        </p:nvSpPr>
+        <p:spPr>
+          <a:xfrm rot="-300000">
+            <a:off x="4773854" y="2777490"/>
+            <a:ext cx="86411" cy="345643"/>
+          </a:xfrm>
+          <a:prstGeom prst="rect">
+            <a:avLst/>
+          </a:prstGeom>
+          <a:solidFill>
+            <a:srgbClr val="007F72"/>
+          </a:solidFill>
+          <a:ln/>
+        </p:spPr>
+      </p:sp>
+      <p:sp>
+        <p:nvSpPr>
+          <p:cNvPr id="17" name="Text 15"/>
           <p:cNvSpPr txBox="1"/>
           <p:nvPr/>
         </p:nvSpPr>
@@ -16711,7 +16911,7 @@
       </p:sp>
       <p:sp>
         <p:nvSpPr>
-          <p:cNvPr id="16" name="Text 14"/>
+          <p:cNvPr id="18" name="Text 16"/>
           <p:cNvSpPr txBox="1"/>
           <p:nvPr/>
         </p:nvSpPr>
@@ -16773,7 +16973,7 @@
       </p:sp>
       <p:sp>
         <p:nvSpPr>
-          <p:cNvPr id="17" name="Text 15"/>
+          <p:cNvPr id="19" name="Text 17"/>
           <p:cNvSpPr txBox="1"/>
           <p:nvPr/>
         </p:nvSpPr>
@@ -16835,7 +17035,7 @@
       </p:sp>
       <p:sp>
         <p:nvSpPr>
-          <p:cNvPr id="18" name="Text 16"/>
+          <p:cNvPr id="20" name="Text 18"/>
           <p:cNvSpPr txBox="1"/>
           <p:nvPr/>
         </p:nvSpPr>
@@ -16897,7 +17097,7 @@
       </p:sp>
       <p:sp>
         <p:nvSpPr>
-          <p:cNvPr id="19" name="Text 17"/>
+          <p:cNvPr id="21" name="Text 19"/>
           <p:cNvSpPr txBox="1"/>
           <p:nvPr/>
         </p:nvSpPr>
@@ -16959,7 +17159,7 @@
       </p:sp>
       <p:sp>
         <p:nvSpPr>
-          <p:cNvPr id="20" name="Text 18"/>
+          <p:cNvPr id="22" name="Text 20"/>
           <p:cNvSpPr txBox="1"/>
           <p:nvPr/>
         </p:nvSpPr>
@@ -17021,7 +17221,7 @@
       </p:sp>
       <p:sp>
         <p:nvSpPr>
-          <p:cNvPr id="21" name="Shape 19"/>
+          <p:cNvPr id="23" name="Shape 21"/>
           <p:cNvSpPr/>
           <p:nvPr/>
         </p:nvSpPr>
@@ -17043,7 +17243,7 @@
       </p:sp>
       <p:sp>
         <p:nvSpPr>
-          <p:cNvPr id="22" name="Text 20"/>
+          <p:cNvPr id="24" name="Text 22"/>
           <p:cNvSpPr txBox="1"/>
           <p:nvPr/>
         </p:nvSpPr>
@@ -17105,7 +17305,7 @@
       </p:sp>
       <p:sp>
         <p:nvSpPr>
-          <p:cNvPr id="23" name="Shape 21"/>
+          <p:cNvPr id="25" name="Shape 23"/>
           <p:cNvSpPr/>
           <p:nvPr/>
         </p:nvSpPr>
@@ -17127,7 +17327,7 @@
       </p:sp>
       <p:sp>
         <p:nvSpPr>
-          <p:cNvPr id="24" name="Text 22"/>
+          <p:cNvPr id="26" name="Text 24"/>
           <p:cNvSpPr txBox="1"/>
           <p:nvPr/>
         </p:nvSpPr>
@@ -17189,7 +17389,7 @@
       </p:sp>
       <p:sp>
         <p:nvSpPr>
-          <p:cNvPr id="25" name="Text 23"/>
+          <p:cNvPr id="27" name="Text 25"/>
           <p:cNvSpPr txBox="1"/>
           <p:nvPr/>
         </p:nvSpPr>
@@ -17251,7 +17451,7 @@
       </p:sp>
       <p:sp>
         <p:nvSpPr>
-          <p:cNvPr id="26" name="Text 24"/>
+          <p:cNvPr id="28" name="Text 26"/>
           <p:cNvSpPr txBox="1"/>
           <p:nvPr/>
         </p:nvSpPr>
@@ -17290,7 +17490,7 @@
       </p:sp>
       <p:sp>
         <p:nvSpPr>
-          <p:cNvPr id="27" name="Text 25"/>
+          <p:cNvPr id="29" name="Text 27"/>
           <p:cNvSpPr txBox="1"/>
           <p:nvPr/>
         </p:nvSpPr>
@@ -17329,7 +17529,7 @@
       </p:sp>
       <p:sp>
         <p:nvSpPr>
-          <p:cNvPr id="28" name="Text 26"/>
+          <p:cNvPr id="30" name="Text 28"/>
           <p:cNvSpPr txBox="1"/>
           <p:nvPr/>
         </p:nvSpPr>
@@ -17368,7 +17568,7 @@
       </p:sp>
       <p:sp>
         <p:nvSpPr>
-          <p:cNvPr id="29" name="Shape 27"/>
+          <p:cNvPr id="31" name="Shape 29"/>
           <p:cNvSpPr/>
           <p:nvPr/>
         </p:nvSpPr>
@@ -17395,7 +17595,7 @@
       </p:sp>
       <p:sp>
         <p:nvSpPr>
-          <p:cNvPr id="30" name="Text 28"/>
+          <p:cNvPr id="32" name="Text 30"/>
           <p:cNvSpPr txBox="1"/>
           <p:nvPr/>
         </p:nvSpPr>
@@ -17457,7 +17657,7 @@
       </p:sp>
       <p:pic>
         <p:nvPicPr>
-          <p:cNvPr id="32" name="Image 0" descr="/Users/tsengchenghsun/Class/carClass/Claude outputs/第三週(9-24)/src/logo.png">    </p:cNvPr>
+          <p:cNvPr id="34" name="Image 0" descr="/Users/tsengchenghsun/Class/carClass/Claude outputs/第三週(9-24)/src/logo.png">    </p:cNvPr>
           <p:cNvPicPr>
             <a:picLocks noChangeAspect="1"/>
           </p:cNvPicPr>
@@ -17481,7 +17681,7 @@
       </p:pic>
       <p:sp>
         <p:nvSpPr>
-          <p:cNvPr id="33" name="Text 29"/>
+          <p:cNvPr id="35" name="Text 31"/>
           <p:cNvSpPr txBox="1"/>
           <p:nvPr/>
         </p:nvSpPr>
@@ -17520,7 +17720,7 @@
       </p:sp>
       <p:sp>
         <p:nvSpPr>
-          <p:cNvPr id="34" name="Text 30"/>
+          <p:cNvPr id="36" name="Text 32"/>
           <p:cNvSpPr txBox="1"/>
           <p:nvPr/>
         </p:nvSpPr>
@@ -21778,8 +21978,8 @@
         </p:nvSpPr>
         <p:spPr>
           <a:xfrm>
-            <a:off x="1815998" y="2585009"/>
-            <a:ext cx="208483" cy="208483"/>
+            <a:off x="1833372" y="2550262"/>
+            <a:ext cx="173736" cy="173736"/>
           </a:xfrm>
           <a:prstGeom prst="ellipse">
             <a:avLst/>
@@ -21798,12 +21998,12 @@
         </p:nvSpPr>
         <p:spPr>
           <a:xfrm>
-            <a:off x="1781251" y="2819552"/>
+            <a:off x="1781251" y="2741371"/>
             <a:ext cx="277978" cy="312725"/>
           </a:xfrm>
           <a:prstGeom prst="roundRect">
             <a:avLst>
-              <a:gd name="adj" fmla="val 98684"/>
+              <a:gd name="adj" fmla="val 92105"/>
             </a:avLst>
           </a:prstGeom>
           <a:solidFill>
@@ -21819,9 +22019,9 @@
           <p:nvPr/>
         </p:nvSpPr>
         <p:spPr>
-          <a:xfrm rot="480000">
-            <a:off x="1798625" y="3123590"/>
-            <a:ext cx="78181" cy="225857"/>
+          <a:xfrm rot="960000">
+            <a:off x="1733474" y="2767432"/>
+            <a:ext cx="69494" cy="225857"/>
           </a:xfrm>
           <a:prstGeom prst="rect">
             <a:avLst/>
@@ -21839,9 +22039,9 @@
           <p:nvPr/>
         </p:nvSpPr>
         <p:spPr>
-          <a:xfrm rot="-480000">
-            <a:off x="1963674" y="3123590"/>
-            <a:ext cx="78181" cy="225857"/>
+          <a:xfrm rot="-960000">
+            <a:off x="2037512" y="2767432"/>
+            <a:ext cx="69494" cy="225857"/>
           </a:xfrm>
           <a:prstGeom prst="rect">
             <a:avLst/>
@@ -21855,6 +22055,46 @@
       <p:sp>
         <p:nvSpPr>
           <p:cNvPr id="24" name="Shape 22"/>
+          <p:cNvSpPr/>
+          <p:nvPr/>
+        </p:nvSpPr>
+        <p:spPr>
+          <a:xfrm rot="300000">
+            <a:off x="1829029" y="3010662"/>
+            <a:ext cx="78181" cy="312725"/>
+          </a:xfrm>
+          <a:prstGeom prst="rect">
+            <a:avLst/>
+          </a:prstGeom>
+          <a:solidFill>
+            <a:srgbClr val="007F72"/>
+          </a:solidFill>
+          <a:ln/>
+        </p:spPr>
+      </p:sp>
+      <p:sp>
+        <p:nvSpPr>
+          <p:cNvPr id="25" name="Shape 23"/>
+          <p:cNvSpPr/>
+          <p:nvPr/>
+        </p:nvSpPr>
+        <p:spPr>
+          <a:xfrm rot="-300000">
+            <a:off x="1933270" y="3010662"/>
+            <a:ext cx="78181" cy="312725"/>
+          </a:xfrm>
+          <a:prstGeom prst="rect">
+            <a:avLst/>
+          </a:prstGeom>
+          <a:solidFill>
+            <a:srgbClr val="007F72"/>
+          </a:solidFill>
+          <a:ln/>
+        </p:spPr>
+      </p:sp>
+      <p:sp>
+        <p:nvSpPr>
+          <p:cNvPr id="26" name="Shape 24"/>
           <p:cNvSpPr/>
           <p:nvPr/>
         </p:nvSpPr>
@@ -21874,7 +22114,7 @@
       </p:sp>
       <p:sp>
         <p:nvSpPr>
-          <p:cNvPr id="25" name="Shape 23"/>
+          <p:cNvPr id="27" name="Shape 25"/>
           <p:cNvSpPr/>
           <p:nvPr/>
         </p:nvSpPr>
@@ -21894,7 +22134,7 @@
       </p:sp>
       <p:sp>
         <p:nvSpPr>
-          <p:cNvPr id="26" name="Shape 24"/>
+          <p:cNvPr id="28" name="Shape 26"/>
           <p:cNvSpPr/>
           <p:nvPr/>
         </p:nvSpPr>
@@ -21914,7 +22154,7 @@
       </p:sp>
       <p:sp>
         <p:nvSpPr>
-          <p:cNvPr id="27" name="Shape 25"/>
+          <p:cNvPr id="29" name="Shape 27"/>
           <p:cNvSpPr/>
           <p:nvPr/>
         </p:nvSpPr>
@@ -21934,7 +22174,7 @@
       </p:sp>
       <p:sp>
         <p:nvSpPr>
-          <p:cNvPr id="28" name="Shape 26"/>
+          <p:cNvPr id="30" name="Shape 28"/>
           <p:cNvSpPr/>
           <p:nvPr/>
         </p:nvSpPr>
@@ -21954,7 +22194,7 @@
       </p:sp>
       <p:sp>
         <p:nvSpPr>
-          <p:cNvPr id="29" name="Shape 27"/>
+          <p:cNvPr id="31" name="Shape 29"/>
           <p:cNvSpPr/>
           <p:nvPr/>
         </p:nvSpPr>
@@ -21974,7 +22214,7 @@
       </p:sp>
       <p:sp>
         <p:nvSpPr>
-          <p:cNvPr id="30" name="Shape 28"/>
+          <p:cNvPr id="32" name="Shape 30"/>
           <p:cNvSpPr/>
           <p:nvPr/>
         </p:nvSpPr>
@@ -21994,7 +22234,7 @@
       </p:sp>
       <p:sp>
         <p:nvSpPr>
-          <p:cNvPr id="31" name="Shape 29"/>
+          <p:cNvPr id="33" name="Shape 31"/>
           <p:cNvSpPr/>
           <p:nvPr/>
         </p:nvSpPr>
@@ -22014,14 +22254,14 @@
       </p:sp>
       <p:sp>
         <p:nvSpPr>
-          <p:cNvPr id="32" name="Shape 30"/>
-          <p:cNvSpPr/>
-          <p:nvPr/>
-        </p:nvSpPr>
-        <p:spPr>
-          <a:xfrm>
-            <a:off x="4696358" y="2585009"/>
-            <a:ext cx="208483" cy="208483"/>
+          <p:cNvPr id="34" name="Shape 32"/>
+          <p:cNvSpPr/>
+          <p:nvPr/>
+        </p:nvSpPr>
+        <p:spPr>
+          <a:xfrm>
+            <a:off x="4713732" y="2550262"/>
+            <a:ext cx="173736" cy="173736"/>
           </a:xfrm>
           <a:prstGeom prst="ellipse">
             <a:avLst/>
@@ -22034,18 +22274,18 @@
       </p:sp>
       <p:sp>
         <p:nvSpPr>
-          <p:cNvPr id="33" name="Shape 31"/>
-          <p:cNvSpPr/>
-          <p:nvPr/>
-        </p:nvSpPr>
-        <p:spPr>
-          <a:xfrm>
-            <a:off x="4661611" y="2819552"/>
+          <p:cNvPr id="35" name="Shape 33"/>
+          <p:cNvSpPr/>
+          <p:nvPr/>
+        </p:nvSpPr>
+        <p:spPr>
+          <a:xfrm>
+            <a:off x="4661611" y="2741371"/>
             <a:ext cx="277978" cy="312725"/>
           </a:xfrm>
           <a:prstGeom prst="roundRect">
             <a:avLst>
-              <a:gd name="adj" fmla="val 98684"/>
+              <a:gd name="adj" fmla="val 92105"/>
             </a:avLst>
           </a:prstGeom>
           <a:solidFill>
@@ -22056,14 +22296,14 @@
       </p:sp>
       <p:sp>
         <p:nvSpPr>
-          <p:cNvPr id="34" name="Shape 32"/>
-          <p:cNvSpPr/>
-          <p:nvPr/>
-        </p:nvSpPr>
-        <p:spPr>
-          <a:xfrm rot="480000">
-            <a:off x="4678985" y="3123590"/>
-            <a:ext cx="78181" cy="225857"/>
+          <p:cNvPr id="36" name="Shape 34"/>
+          <p:cNvSpPr/>
+          <p:nvPr/>
+        </p:nvSpPr>
+        <p:spPr>
+          <a:xfrm rot="960000">
+            <a:off x="4613834" y="2767432"/>
+            <a:ext cx="69494" cy="225857"/>
           </a:xfrm>
           <a:prstGeom prst="rect">
             <a:avLst/>
@@ -22076,14 +22316,14 @@
       </p:sp>
       <p:sp>
         <p:nvSpPr>
-          <p:cNvPr id="35" name="Shape 33"/>
-          <p:cNvSpPr/>
-          <p:nvPr/>
-        </p:nvSpPr>
-        <p:spPr>
-          <a:xfrm rot="-480000">
-            <a:off x="4844034" y="3123590"/>
-            <a:ext cx="78181" cy="225857"/>
+          <p:cNvPr id="37" name="Shape 35"/>
+          <p:cNvSpPr/>
+          <p:nvPr/>
+        </p:nvSpPr>
+        <p:spPr>
+          <a:xfrm rot="-960000">
+            <a:off x="4917872" y="2767432"/>
+            <a:ext cx="69494" cy="225857"/>
           </a:xfrm>
           <a:prstGeom prst="rect">
             <a:avLst/>
@@ -22096,7 +22336,47 @@
       </p:sp>
       <p:sp>
         <p:nvSpPr>
-          <p:cNvPr id="36" name="Shape 34"/>
+          <p:cNvPr id="38" name="Shape 36"/>
+          <p:cNvSpPr/>
+          <p:nvPr/>
+        </p:nvSpPr>
+        <p:spPr>
+          <a:xfrm rot="300000">
+            <a:off x="4709389" y="3010662"/>
+            <a:ext cx="78181" cy="312725"/>
+          </a:xfrm>
+          <a:prstGeom prst="rect">
+            <a:avLst/>
+          </a:prstGeom>
+          <a:solidFill>
+            <a:srgbClr val="007F72"/>
+          </a:solidFill>
+          <a:ln/>
+        </p:spPr>
+      </p:sp>
+      <p:sp>
+        <p:nvSpPr>
+          <p:cNvPr id="39" name="Shape 37"/>
+          <p:cNvSpPr/>
+          <p:nvPr/>
+        </p:nvSpPr>
+        <p:spPr>
+          <a:xfrm rot="-300000">
+            <a:off x="4813630" y="3010662"/>
+            <a:ext cx="78181" cy="312725"/>
+          </a:xfrm>
+          <a:prstGeom prst="rect">
+            <a:avLst/>
+          </a:prstGeom>
+          <a:solidFill>
+            <a:srgbClr val="007F72"/>
+          </a:solidFill>
+          <a:ln/>
+        </p:spPr>
+      </p:sp>
+      <p:sp>
+        <p:nvSpPr>
+          <p:cNvPr id="40" name="Shape 38"/>
           <p:cNvSpPr/>
           <p:nvPr/>
         </p:nvSpPr>
@@ -22116,7 +22396,7 @@
       </p:sp>
       <p:sp>
         <p:nvSpPr>
-          <p:cNvPr id="37" name="Shape 35"/>
+          <p:cNvPr id="41" name="Shape 39"/>
           <p:cNvSpPr/>
           <p:nvPr/>
         </p:nvSpPr>
@@ -22136,7 +22416,7 @@
       </p:sp>
       <p:sp>
         <p:nvSpPr>
-          <p:cNvPr id="38" name="Shape 36"/>
+          <p:cNvPr id="42" name="Shape 40"/>
           <p:cNvSpPr/>
           <p:nvPr/>
         </p:nvSpPr>
@@ -22158,7 +22438,7 @@
       </p:sp>
       <p:sp>
         <p:nvSpPr>
-          <p:cNvPr id="39" name="Text 37"/>
+          <p:cNvPr id="43" name="Text 41"/>
           <p:cNvSpPr txBox="1"/>
           <p:nvPr/>
         </p:nvSpPr>
@@ -22220,7 +22500,7 @@
       </p:sp>
       <p:sp>
         <p:nvSpPr>
-          <p:cNvPr id="40" name="Text 38"/>
+          <p:cNvPr id="44" name="Text 42"/>
           <p:cNvSpPr txBox="1"/>
           <p:nvPr/>
         </p:nvSpPr>
@@ -22282,7 +22562,7 @@
       </p:sp>
       <p:sp>
         <p:nvSpPr>
-          <p:cNvPr id="41" name="Text 39"/>
+          <p:cNvPr id="45" name="Text 43"/>
           <p:cNvSpPr txBox="1"/>
           <p:nvPr/>
         </p:nvSpPr>
@@ -22344,7 +22624,7 @@
       </p:sp>
       <p:sp>
         <p:nvSpPr>
-          <p:cNvPr id="42" name="Text 40"/>
+          <p:cNvPr id="46" name="Text 44"/>
           <p:cNvSpPr txBox="1"/>
           <p:nvPr/>
         </p:nvSpPr>
@@ -22406,7 +22686,7 @@
       </p:sp>
       <p:sp>
         <p:nvSpPr>
-          <p:cNvPr id="43" name="Text 41"/>
+          <p:cNvPr id="47" name="Text 45"/>
           <p:cNvSpPr txBox="1"/>
           <p:nvPr/>
         </p:nvSpPr>
@@ -22445,7 +22725,7 @@
       </p:sp>
       <p:sp>
         <p:nvSpPr>
-          <p:cNvPr id="44" name="Shape 42"/>
+          <p:cNvPr id="48" name="Shape 46"/>
           <p:cNvSpPr/>
           <p:nvPr/>
         </p:nvSpPr>
@@ -22472,7 +22752,7 @@
       </p:sp>
       <p:sp>
         <p:nvSpPr>
-          <p:cNvPr id="45" name="Shape 43"/>
+          <p:cNvPr id="49" name="Shape 47"/>
           <p:cNvSpPr/>
           <p:nvPr/>
         </p:nvSpPr>
@@ -22492,7 +22772,7 @@
       </p:sp>
       <p:sp>
         <p:nvSpPr>
-          <p:cNvPr id="46" name="Shape 44"/>
+          <p:cNvPr id="50" name="Shape 48"/>
           <p:cNvSpPr/>
           <p:nvPr/>
         </p:nvSpPr>
@@ -22512,7 +22792,7 @@
       </p:sp>
       <p:sp>
         <p:nvSpPr>
-          <p:cNvPr id="47" name="Shape 45"/>
+          <p:cNvPr id="51" name="Shape 49"/>
           <p:cNvSpPr/>
           <p:nvPr/>
         </p:nvSpPr>
@@ -22532,7 +22812,7 @@
       </p:sp>
       <p:sp>
         <p:nvSpPr>
-          <p:cNvPr id="48" name="Shape 46"/>
+          <p:cNvPr id="52" name="Shape 50"/>
           <p:cNvSpPr/>
           <p:nvPr/>
         </p:nvSpPr>
@@ -22552,7 +22832,7 @@
       </p:sp>
       <p:sp>
         <p:nvSpPr>
-          <p:cNvPr id="49" name="Shape 47"/>
+          <p:cNvPr id="53" name="Shape 51"/>
           <p:cNvSpPr/>
           <p:nvPr/>
         </p:nvSpPr>
@@ -22572,7 +22852,7 @@
       </p:sp>
       <p:sp>
         <p:nvSpPr>
-          <p:cNvPr id="50" name="Shape 48"/>
+          <p:cNvPr id="54" name="Shape 52"/>
           <p:cNvSpPr/>
           <p:nvPr/>
         </p:nvSpPr>
@@ -22592,7 +22872,7 @@
       </p:sp>
       <p:sp>
         <p:nvSpPr>
-          <p:cNvPr id="51" name="Shape 49"/>
+          <p:cNvPr id="55" name="Shape 53"/>
           <p:cNvSpPr/>
           <p:nvPr/>
         </p:nvSpPr>
@@ -22612,7 +22892,7 @@
       </p:sp>
       <p:sp>
         <p:nvSpPr>
-          <p:cNvPr id="52" name="Shape 50"/>
+          <p:cNvPr id="56" name="Shape 54"/>
           <p:cNvSpPr/>
           <p:nvPr/>
         </p:nvSpPr>
@@ -22632,7 +22912,7 @@
       </p:sp>
       <p:sp>
         <p:nvSpPr>
-          <p:cNvPr id="53" name="Shape 51"/>
+          <p:cNvPr id="57" name="Shape 55"/>
           <p:cNvSpPr/>
           <p:nvPr/>
         </p:nvSpPr>
@@ -22652,7 +22932,7 @@
       </p:sp>
       <p:sp>
         <p:nvSpPr>
-          <p:cNvPr id="54" name="Shape 52"/>
+          <p:cNvPr id="58" name="Shape 56"/>
           <p:cNvSpPr/>
           <p:nvPr/>
         </p:nvSpPr>
@@ -22672,7 +22952,7 @@
       </p:sp>
       <p:sp>
         <p:nvSpPr>
-          <p:cNvPr id="55" name="Shape 53"/>
+          <p:cNvPr id="59" name="Shape 57"/>
           <p:cNvSpPr/>
           <p:nvPr/>
         </p:nvSpPr>
@@ -22692,7 +22972,7 @@
       </p:sp>
       <p:sp>
         <p:nvSpPr>
-          <p:cNvPr id="56" name="Shape 54"/>
+          <p:cNvPr id="60" name="Shape 58"/>
           <p:cNvSpPr/>
           <p:nvPr/>
         </p:nvSpPr>
@@ -22712,7 +22992,7 @@
       </p:sp>
       <p:sp>
         <p:nvSpPr>
-          <p:cNvPr id="57" name="Shape 55"/>
+          <p:cNvPr id="61" name="Shape 59"/>
           <p:cNvSpPr/>
           <p:nvPr/>
         </p:nvSpPr>
@@ -22732,7 +23012,7 @@
       </p:sp>
       <p:sp>
         <p:nvSpPr>
-          <p:cNvPr id="58" name="Shape 56"/>
+          <p:cNvPr id="62" name="Shape 60"/>
           <p:cNvSpPr/>
           <p:nvPr/>
         </p:nvSpPr>
@@ -22752,7 +23032,7 @@
       </p:sp>
       <p:sp>
         <p:nvSpPr>
-          <p:cNvPr id="59" name="Shape 57"/>
+          <p:cNvPr id="63" name="Shape 61"/>
           <p:cNvSpPr/>
           <p:nvPr/>
         </p:nvSpPr>
@@ -22772,7 +23052,7 @@
       </p:sp>
       <p:sp>
         <p:nvSpPr>
-          <p:cNvPr id="60" name="Shape 58"/>
+          <p:cNvPr id="64" name="Shape 62"/>
           <p:cNvSpPr/>
           <p:nvPr/>
         </p:nvSpPr>
@@ -22792,7 +23072,7 @@
       </p:sp>
       <p:sp>
         <p:nvSpPr>
-          <p:cNvPr id="61" name="Shape 59"/>
+          <p:cNvPr id="65" name="Shape 63"/>
           <p:cNvSpPr/>
           <p:nvPr/>
         </p:nvSpPr>
@@ -22812,7 +23092,7 @@
       </p:sp>
       <p:sp>
         <p:nvSpPr>
-          <p:cNvPr id="62" name="Shape 60"/>
+          <p:cNvPr id="66" name="Shape 64"/>
           <p:cNvSpPr/>
           <p:nvPr/>
         </p:nvSpPr>
@@ -22832,7 +23112,7 @@
       </p:sp>
       <p:sp>
         <p:nvSpPr>
-          <p:cNvPr id="63" name="Shape 61"/>
+          <p:cNvPr id="67" name="Shape 65"/>
           <p:cNvSpPr/>
           <p:nvPr/>
         </p:nvSpPr>
@@ -22852,7 +23132,7 @@
       </p:sp>
       <p:sp>
         <p:nvSpPr>
-          <p:cNvPr id="64" name="Shape 62"/>
+          <p:cNvPr id="68" name="Shape 66"/>
           <p:cNvSpPr/>
           <p:nvPr/>
         </p:nvSpPr>
@@ -22872,7 +23152,7 @@
       </p:sp>
       <p:sp>
         <p:nvSpPr>
-          <p:cNvPr id="65" name="Shape 63"/>
+          <p:cNvPr id="69" name="Shape 67"/>
           <p:cNvSpPr/>
           <p:nvPr/>
         </p:nvSpPr>
@@ -22892,7 +23172,7 @@
       </p:sp>
       <p:sp>
         <p:nvSpPr>
-          <p:cNvPr id="66" name="Shape 64"/>
+          <p:cNvPr id="70" name="Shape 68"/>
           <p:cNvSpPr/>
           <p:nvPr/>
         </p:nvSpPr>
@@ -22912,7 +23192,7 @@
       </p:sp>
       <p:sp>
         <p:nvSpPr>
-          <p:cNvPr id="67" name="Shape 65"/>
+          <p:cNvPr id="71" name="Shape 69"/>
           <p:cNvSpPr/>
           <p:nvPr/>
         </p:nvSpPr>
@@ -22932,7 +23212,7 @@
       </p:sp>
       <p:sp>
         <p:nvSpPr>
-          <p:cNvPr id="68" name="Shape 66"/>
+          <p:cNvPr id="72" name="Shape 70"/>
           <p:cNvSpPr/>
           <p:nvPr/>
         </p:nvSpPr>
@@ -22952,7 +23232,7 @@
       </p:sp>
       <p:sp>
         <p:nvSpPr>
-          <p:cNvPr id="69" name="Shape 67"/>
+          <p:cNvPr id="73" name="Shape 71"/>
           <p:cNvSpPr/>
           <p:nvPr/>
         </p:nvSpPr>
@@ -22972,7 +23252,7 @@
       </p:sp>
       <p:sp>
         <p:nvSpPr>
-          <p:cNvPr id="70" name="Shape 68"/>
+          <p:cNvPr id="74" name="Shape 72"/>
           <p:cNvSpPr/>
           <p:nvPr/>
         </p:nvSpPr>
@@ -22992,7 +23272,7 @@
       </p:sp>
       <p:sp>
         <p:nvSpPr>
-          <p:cNvPr id="71" name="Shape 69"/>
+          <p:cNvPr id="75" name="Shape 73"/>
           <p:cNvSpPr/>
           <p:nvPr/>
         </p:nvSpPr>
@@ -23012,7 +23292,7 @@
       </p:sp>
       <p:sp>
         <p:nvSpPr>
-          <p:cNvPr id="72" name="Shape 70"/>
+          <p:cNvPr id="76" name="Shape 74"/>
           <p:cNvSpPr/>
           <p:nvPr/>
         </p:nvSpPr>
@@ -23032,7 +23312,7 @@
       </p:sp>
       <p:sp>
         <p:nvSpPr>
-          <p:cNvPr id="73" name="Shape 71"/>
+          <p:cNvPr id="77" name="Shape 75"/>
           <p:cNvSpPr/>
           <p:nvPr/>
         </p:nvSpPr>
@@ -23052,7 +23332,7 @@
       </p:sp>
       <p:sp>
         <p:nvSpPr>
-          <p:cNvPr id="74" name="Shape 72"/>
+          <p:cNvPr id="78" name="Shape 76"/>
           <p:cNvSpPr/>
           <p:nvPr/>
         </p:nvSpPr>
@@ -23072,7 +23352,7 @@
       </p:sp>
       <p:sp>
         <p:nvSpPr>
-          <p:cNvPr id="75" name="Shape 73"/>
+          <p:cNvPr id="79" name="Shape 77"/>
           <p:cNvSpPr/>
           <p:nvPr/>
         </p:nvSpPr>
@@ -23092,7 +23372,7 @@
       </p:sp>
       <p:sp>
         <p:nvSpPr>
-          <p:cNvPr id="76" name="Shape 74"/>
+          <p:cNvPr id="80" name="Shape 78"/>
           <p:cNvSpPr/>
           <p:nvPr/>
         </p:nvSpPr>
@@ -23112,7 +23392,7 @@
       </p:sp>
       <p:sp>
         <p:nvSpPr>
-          <p:cNvPr id="77" name="Shape 75"/>
+          <p:cNvPr id="81" name="Shape 79"/>
           <p:cNvSpPr/>
           <p:nvPr/>
         </p:nvSpPr>
@@ -23132,7 +23412,7 @@
       </p:sp>
       <p:sp>
         <p:nvSpPr>
-          <p:cNvPr id="78" name="Shape 76"/>
+          <p:cNvPr id="82" name="Shape 80"/>
           <p:cNvSpPr/>
           <p:nvPr/>
         </p:nvSpPr>
@@ -23152,7 +23432,7 @@
       </p:sp>
       <p:sp>
         <p:nvSpPr>
-          <p:cNvPr id="79" name="Shape 77"/>
+          <p:cNvPr id="83" name="Shape 81"/>
           <p:cNvSpPr/>
           <p:nvPr/>
         </p:nvSpPr>
@@ -23172,7 +23452,7 @@
       </p:sp>
       <p:sp>
         <p:nvSpPr>
-          <p:cNvPr id="80" name="Shape 78"/>
+          <p:cNvPr id="84" name="Shape 82"/>
           <p:cNvSpPr/>
           <p:nvPr/>
         </p:nvSpPr>
@@ -23192,7 +23472,7 @@
       </p:sp>
       <p:sp>
         <p:nvSpPr>
-          <p:cNvPr id="81" name="Shape 79"/>
+          <p:cNvPr id="85" name="Shape 83"/>
           <p:cNvSpPr/>
           <p:nvPr/>
         </p:nvSpPr>
@@ -23212,7 +23492,7 @@
       </p:sp>
       <p:sp>
         <p:nvSpPr>
-          <p:cNvPr id="82" name="Shape 80"/>
+          <p:cNvPr id="86" name="Shape 84"/>
           <p:cNvSpPr/>
           <p:nvPr/>
         </p:nvSpPr>
@@ -23232,7 +23512,7 @@
       </p:sp>
       <p:sp>
         <p:nvSpPr>
-          <p:cNvPr id="83" name="Shape 81"/>
+          <p:cNvPr id="87" name="Shape 85"/>
           <p:cNvSpPr/>
           <p:nvPr/>
         </p:nvSpPr>
@@ -23252,7 +23532,7 @@
       </p:sp>
       <p:sp>
         <p:nvSpPr>
-          <p:cNvPr id="84" name="Shape 82"/>
+          <p:cNvPr id="88" name="Shape 86"/>
           <p:cNvSpPr/>
           <p:nvPr/>
         </p:nvSpPr>
@@ -23272,7 +23552,7 @@
       </p:sp>
       <p:sp>
         <p:nvSpPr>
-          <p:cNvPr id="85" name="Shape 83"/>
+          <p:cNvPr id="89" name="Shape 87"/>
           <p:cNvSpPr/>
           <p:nvPr/>
         </p:nvSpPr>
@@ -23292,7 +23572,7 @@
       </p:sp>
       <p:sp>
         <p:nvSpPr>
-          <p:cNvPr id="86" name="Shape 84"/>
+          <p:cNvPr id="90" name="Shape 88"/>
           <p:cNvSpPr/>
           <p:nvPr/>
         </p:nvSpPr>
@@ -23312,7 +23592,7 @@
       </p:sp>
       <p:sp>
         <p:nvSpPr>
-          <p:cNvPr id="87" name="Shape 85"/>
+          <p:cNvPr id="91" name="Shape 89"/>
           <p:cNvSpPr/>
           <p:nvPr/>
         </p:nvSpPr>
@@ -23332,7 +23612,7 @@
       </p:sp>
       <p:sp>
         <p:nvSpPr>
-          <p:cNvPr id="88" name="Shape 86"/>
+          <p:cNvPr id="92" name="Shape 90"/>
           <p:cNvSpPr/>
           <p:nvPr/>
         </p:nvSpPr>
@@ -23352,7 +23632,7 @@
       </p:sp>
       <p:sp>
         <p:nvSpPr>
-          <p:cNvPr id="89" name="Shape 87"/>
+          <p:cNvPr id="93" name="Shape 91"/>
           <p:cNvSpPr/>
           <p:nvPr/>
         </p:nvSpPr>
@@ -23372,7 +23652,7 @@
       </p:sp>
       <p:sp>
         <p:nvSpPr>
-          <p:cNvPr id="90" name="Shape 88"/>
+          <p:cNvPr id="94" name="Shape 92"/>
           <p:cNvSpPr/>
           <p:nvPr/>
         </p:nvSpPr>
@@ -23392,7 +23672,7 @@
       </p:sp>
       <p:sp>
         <p:nvSpPr>
-          <p:cNvPr id="91" name="Shape 89"/>
+          <p:cNvPr id="95" name="Shape 93"/>
           <p:cNvSpPr/>
           <p:nvPr/>
         </p:nvSpPr>
@@ -23412,7 +23692,7 @@
       </p:sp>
       <p:sp>
         <p:nvSpPr>
-          <p:cNvPr id="92" name="Shape 90"/>
+          <p:cNvPr id="96" name="Shape 94"/>
           <p:cNvSpPr/>
           <p:nvPr/>
         </p:nvSpPr>
@@ -23432,7 +23712,7 @@
       </p:sp>
       <p:sp>
         <p:nvSpPr>
-          <p:cNvPr id="93" name="Shape 91"/>
+          <p:cNvPr id="97" name="Shape 95"/>
           <p:cNvSpPr/>
           <p:nvPr/>
         </p:nvSpPr>
@@ -23452,7 +23732,7 @@
       </p:sp>
       <p:sp>
         <p:nvSpPr>
-          <p:cNvPr id="94" name="Shape 92"/>
+          <p:cNvPr id="98" name="Shape 96"/>
           <p:cNvSpPr/>
           <p:nvPr/>
         </p:nvSpPr>
@@ -23472,7 +23752,7 @@
       </p:sp>
       <p:sp>
         <p:nvSpPr>
-          <p:cNvPr id="95" name="Shape 93"/>
+          <p:cNvPr id="99" name="Shape 97"/>
           <p:cNvSpPr/>
           <p:nvPr/>
         </p:nvSpPr>
@@ -23492,7 +23772,7 @@
       </p:sp>
       <p:sp>
         <p:nvSpPr>
-          <p:cNvPr id="96" name="Shape 94"/>
+          <p:cNvPr id="100" name="Shape 98"/>
           <p:cNvSpPr/>
           <p:nvPr/>
         </p:nvSpPr>
@@ -23512,7 +23792,7 @@
       </p:sp>
       <p:sp>
         <p:nvSpPr>
-          <p:cNvPr id="97" name="Shape 95"/>
+          <p:cNvPr id="101" name="Shape 99"/>
           <p:cNvSpPr/>
           <p:nvPr/>
         </p:nvSpPr>
@@ -23532,7 +23812,7 @@
       </p:sp>
       <p:sp>
         <p:nvSpPr>
-          <p:cNvPr id="98" name="Shape 96"/>
+          <p:cNvPr id="102" name="Shape 100"/>
           <p:cNvSpPr/>
           <p:nvPr/>
         </p:nvSpPr>
@@ -23552,7 +23832,7 @@
       </p:sp>
       <p:sp>
         <p:nvSpPr>
-          <p:cNvPr id="99" name="Shape 97"/>
+          <p:cNvPr id="103" name="Shape 101"/>
           <p:cNvSpPr/>
           <p:nvPr/>
         </p:nvSpPr>
@@ -23572,7 +23852,7 @@
       </p:sp>
       <p:sp>
         <p:nvSpPr>
-          <p:cNvPr id="100" name="Shape 98"/>
+          <p:cNvPr id="104" name="Shape 102"/>
           <p:cNvSpPr/>
           <p:nvPr/>
         </p:nvSpPr>
@@ -23592,7 +23872,7 @@
       </p:sp>
       <p:sp>
         <p:nvSpPr>
-          <p:cNvPr id="101" name="Shape 99"/>
+          <p:cNvPr id="105" name="Shape 103"/>
           <p:cNvSpPr/>
           <p:nvPr/>
         </p:nvSpPr>
@@ -23612,7 +23892,7 @@
       </p:sp>
       <p:sp>
         <p:nvSpPr>
-          <p:cNvPr id="102" name="Shape 100"/>
+          <p:cNvPr id="106" name="Shape 104"/>
           <p:cNvSpPr/>
           <p:nvPr/>
         </p:nvSpPr>
@@ -23632,7 +23912,7 @@
       </p:sp>
       <p:sp>
         <p:nvSpPr>
-          <p:cNvPr id="103" name="Shape 101"/>
+          <p:cNvPr id="107" name="Shape 105"/>
           <p:cNvSpPr/>
           <p:nvPr/>
         </p:nvSpPr>
@@ -23652,7 +23932,7 @@
       </p:sp>
       <p:sp>
         <p:nvSpPr>
-          <p:cNvPr id="104" name="Shape 102"/>
+          <p:cNvPr id="108" name="Shape 106"/>
           <p:cNvSpPr/>
           <p:nvPr/>
         </p:nvSpPr>
@@ -23672,7 +23952,7 @@
       </p:sp>
       <p:sp>
         <p:nvSpPr>
-          <p:cNvPr id="105" name="Shape 103"/>
+          <p:cNvPr id="109" name="Shape 107"/>
           <p:cNvSpPr/>
           <p:nvPr/>
         </p:nvSpPr>
@@ -23692,7 +23972,7 @@
       </p:sp>
       <p:sp>
         <p:nvSpPr>
-          <p:cNvPr id="106" name="Shape 104"/>
+          <p:cNvPr id="110" name="Shape 108"/>
           <p:cNvSpPr/>
           <p:nvPr/>
         </p:nvSpPr>
@@ -23712,7 +23992,7 @@
       </p:sp>
       <p:sp>
         <p:nvSpPr>
-          <p:cNvPr id="107" name="Shape 105"/>
+          <p:cNvPr id="111" name="Shape 109"/>
           <p:cNvSpPr/>
           <p:nvPr/>
         </p:nvSpPr>
@@ -23732,7 +24012,7 @@
       </p:sp>
       <p:sp>
         <p:nvSpPr>
-          <p:cNvPr id="108" name="Shape 106"/>
+          <p:cNvPr id="112" name="Shape 110"/>
           <p:cNvSpPr/>
           <p:nvPr/>
         </p:nvSpPr>
@@ -23752,7 +24032,7 @@
       </p:sp>
       <p:sp>
         <p:nvSpPr>
-          <p:cNvPr id="109" name="Shape 107"/>
+          <p:cNvPr id="113" name="Shape 111"/>
           <p:cNvSpPr/>
           <p:nvPr/>
         </p:nvSpPr>
@@ -23772,7 +24052,7 @@
       </p:sp>
       <p:sp>
         <p:nvSpPr>
-          <p:cNvPr id="110" name="Shape 108"/>
+          <p:cNvPr id="114" name="Shape 112"/>
           <p:cNvSpPr/>
           <p:nvPr/>
         </p:nvSpPr>
@@ -23792,7 +24072,7 @@
       </p:sp>
       <p:sp>
         <p:nvSpPr>
-          <p:cNvPr id="111" name="Shape 109"/>
+          <p:cNvPr id="115" name="Shape 113"/>
           <p:cNvSpPr/>
           <p:nvPr/>
         </p:nvSpPr>
@@ -23812,7 +24092,7 @@
       </p:sp>
       <p:sp>
         <p:nvSpPr>
-          <p:cNvPr id="112" name="Shape 110"/>
+          <p:cNvPr id="116" name="Shape 114"/>
           <p:cNvSpPr/>
           <p:nvPr/>
         </p:nvSpPr>
@@ -23832,7 +24112,7 @@
       </p:sp>
       <p:sp>
         <p:nvSpPr>
-          <p:cNvPr id="113" name="Shape 111"/>
+          <p:cNvPr id="117" name="Shape 115"/>
           <p:cNvSpPr/>
           <p:nvPr/>
         </p:nvSpPr>
@@ -23852,7 +24132,7 @@
       </p:sp>
       <p:sp>
         <p:nvSpPr>
-          <p:cNvPr id="114" name="Shape 112"/>
+          <p:cNvPr id="118" name="Shape 116"/>
           <p:cNvSpPr/>
           <p:nvPr/>
         </p:nvSpPr>
@@ -23872,7 +24152,7 @@
       </p:sp>
       <p:sp>
         <p:nvSpPr>
-          <p:cNvPr id="115" name="Shape 113"/>
+          <p:cNvPr id="119" name="Shape 117"/>
           <p:cNvSpPr/>
           <p:nvPr/>
         </p:nvSpPr>
@@ -23892,7 +24172,7 @@
       </p:sp>
       <p:sp>
         <p:nvSpPr>
-          <p:cNvPr id="116" name="Shape 114"/>
+          <p:cNvPr id="120" name="Shape 118"/>
           <p:cNvSpPr/>
           <p:nvPr/>
         </p:nvSpPr>
@@ -23912,7 +24192,7 @@
       </p:sp>
       <p:sp>
         <p:nvSpPr>
-          <p:cNvPr id="117" name="Shape 115"/>
+          <p:cNvPr id="121" name="Shape 119"/>
           <p:cNvSpPr/>
           <p:nvPr/>
         </p:nvSpPr>
@@ -23932,7 +24212,7 @@
       </p:sp>
       <p:sp>
         <p:nvSpPr>
-          <p:cNvPr id="118" name="Shape 116"/>
+          <p:cNvPr id="122" name="Shape 120"/>
           <p:cNvSpPr/>
           <p:nvPr/>
         </p:nvSpPr>
@@ -23952,7 +24232,7 @@
       </p:sp>
       <p:sp>
         <p:nvSpPr>
-          <p:cNvPr id="119" name="Shape 117"/>
+          <p:cNvPr id="123" name="Shape 121"/>
           <p:cNvSpPr/>
           <p:nvPr/>
         </p:nvSpPr>
@@ -23972,7 +24252,7 @@
       </p:sp>
       <p:sp>
         <p:nvSpPr>
-          <p:cNvPr id="120" name="Shape 118"/>
+          <p:cNvPr id="124" name="Shape 122"/>
           <p:cNvSpPr/>
           <p:nvPr/>
         </p:nvSpPr>
@@ -23992,7 +24272,7 @@
       </p:sp>
       <p:sp>
         <p:nvSpPr>
-          <p:cNvPr id="121" name="Shape 119"/>
+          <p:cNvPr id="125" name="Shape 123"/>
           <p:cNvSpPr/>
           <p:nvPr/>
         </p:nvSpPr>
@@ -24012,7 +24292,7 @@
       </p:sp>
       <p:sp>
         <p:nvSpPr>
-          <p:cNvPr id="122" name="Shape 120"/>
+          <p:cNvPr id="126" name="Shape 124"/>
           <p:cNvSpPr/>
           <p:nvPr/>
         </p:nvSpPr>
@@ -24032,7 +24312,7 @@
       </p:sp>
       <p:sp>
         <p:nvSpPr>
-          <p:cNvPr id="123" name="Shape 121"/>
+          <p:cNvPr id="127" name="Shape 125"/>
           <p:cNvSpPr/>
           <p:nvPr/>
         </p:nvSpPr>
@@ -24052,7 +24332,7 @@
       </p:sp>
       <p:sp>
         <p:nvSpPr>
-          <p:cNvPr id="124" name="Shape 122"/>
+          <p:cNvPr id="128" name="Shape 126"/>
           <p:cNvSpPr/>
           <p:nvPr/>
         </p:nvSpPr>
@@ -24072,7 +24352,7 @@
       </p:sp>
       <p:sp>
         <p:nvSpPr>
-          <p:cNvPr id="125" name="Shape 123"/>
+          <p:cNvPr id="129" name="Shape 127"/>
           <p:cNvSpPr/>
           <p:nvPr/>
         </p:nvSpPr>
@@ -24092,7 +24372,7 @@
       </p:sp>
       <p:sp>
         <p:nvSpPr>
-          <p:cNvPr id="126" name="Shape 124"/>
+          <p:cNvPr id="130" name="Shape 128"/>
           <p:cNvSpPr/>
           <p:nvPr/>
         </p:nvSpPr>
@@ -24112,7 +24392,7 @@
       </p:sp>
       <p:sp>
         <p:nvSpPr>
-          <p:cNvPr id="127" name="Shape 125"/>
+          <p:cNvPr id="131" name="Shape 129"/>
           <p:cNvSpPr/>
           <p:nvPr/>
         </p:nvSpPr>
@@ -24132,7 +24412,7 @@
       </p:sp>
       <p:sp>
         <p:nvSpPr>
-          <p:cNvPr id="128" name="Shape 126"/>
+          <p:cNvPr id="132" name="Shape 130"/>
           <p:cNvSpPr/>
           <p:nvPr/>
         </p:nvSpPr>
@@ -24152,7 +24432,7 @@
       </p:sp>
       <p:sp>
         <p:nvSpPr>
-          <p:cNvPr id="129" name="Shape 127"/>
+          <p:cNvPr id="133" name="Shape 131"/>
           <p:cNvSpPr/>
           <p:nvPr/>
         </p:nvSpPr>
@@ -24172,7 +24452,7 @@
       </p:sp>
       <p:sp>
         <p:nvSpPr>
-          <p:cNvPr id="130" name="Shape 128"/>
+          <p:cNvPr id="134" name="Shape 132"/>
           <p:cNvSpPr/>
           <p:nvPr/>
         </p:nvSpPr>
@@ -24192,7 +24472,7 @@
       </p:sp>
       <p:sp>
         <p:nvSpPr>
-          <p:cNvPr id="131" name="Shape 129"/>
+          <p:cNvPr id="135" name="Shape 133"/>
           <p:cNvSpPr/>
           <p:nvPr/>
         </p:nvSpPr>
@@ -24212,7 +24492,7 @@
       </p:sp>
       <p:sp>
         <p:nvSpPr>
-          <p:cNvPr id="132" name="Shape 130"/>
+          <p:cNvPr id="136" name="Shape 134"/>
           <p:cNvSpPr/>
           <p:nvPr/>
         </p:nvSpPr>
@@ -24232,7 +24512,7 @@
       </p:sp>
       <p:sp>
         <p:nvSpPr>
-          <p:cNvPr id="133" name="Shape 131"/>
+          <p:cNvPr id="137" name="Shape 135"/>
           <p:cNvSpPr/>
           <p:nvPr/>
         </p:nvSpPr>
@@ -24252,7 +24532,7 @@
       </p:sp>
       <p:sp>
         <p:nvSpPr>
-          <p:cNvPr id="134" name="Shape 132"/>
+          <p:cNvPr id="138" name="Shape 136"/>
           <p:cNvSpPr/>
           <p:nvPr/>
         </p:nvSpPr>
@@ -24272,7 +24552,7 @@
       </p:sp>
       <p:sp>
         <p:nvSpPr>
-          <p:cNvPr id="135" name="Shape 133"/>
+          <p:cNvPr id="139" name="Shape 137"/>
           <p:cNvSpPr/>
           <p:nvPr/>
         </p:nvSpPr>
@@ -24292,7 +24572,7 @@
       </p:sp>
       <p:sp>
         <p:nvSpPr>
-          <p:cNvPr id="136" name="Shape 134"/>
+          <p:cNvPr id="140" name="Shape 138"/>
           <p:cNvSpPr/>
           <p:nvPr/>
         </p:nvSpPr>
@@ -24312,7 +24592,7 @@
       </p:sp>
       <p:sp>
         <p:nvSpPr>
-          <p:cNvPr id="137" name="Shape 135"/>
+          <p:cNvPr id="141" name="Shape 139"/>
           <p:cNvSpPr/>
           <p:nvPr/>
         </p:nvSpPr>
@@ -24332,7 +24612,7 @@
       </p:sp>
       <p:sp>
         <p:nvSpPr>
-          <p:cNvPr id="138" name="Shape 136"/>
+          <p:cNvPr id="142" name="Shape 140"/>
           <p:cNvSpPr/>
           <p:nvPr/>
         </p:nvSpPr>
@@ -24352,7 +24632,7 @@
       </p:sp>
       <p:sp>
         <p:nvSpPr>
-          <p:cNvPr id="139" name="Shape 137"/>
+          <p:cNvPr id="143" name="Shape 141"/>
           <p:cNvSpPr/>
           <p:nvPr/>
         </p:nvSpPr>
@@ -24372,7 +24652,7 @@
       </p:sp>
       <p:sp>
         <p:nvSpPr>
-          <p:cNvPr id="140" name="Shape 138"/>
+          <p:cNvPr id="144" name="Shape 142"/>
           <p:cNvSpPr/>
           <p:nvPr/>
         </p:nvSpPr>
@@ -24392,7 +24672,7 @@
       </p:sp>
       <p:sp>
         <p:nvSpPr>
-          <p:cNvPr id="141" name="Shape 139"/>
+          <p:cNvPr id="145" name="Shape 143"/>
           <p:cNvSpPr/>
           <p:nvPr/>
         </p:nvSpPr>
@@ -24412,7 +24692,7 @@
       </p:sp>
       <p:sp>
         <p:nvSpPr>
-          <p:cNvPr id="142" name="Shape 140"/>
+          <p:cNvPr id="146" name="Shape 144"/>
           <p:cNvSpPr/>
           <p:nvPr/>
         </p:nvSpPr>
@@ -24432,7 +24712,7 @@
       </p:sp>
       <p:sp>
         <p:nvSpPr>
-          <p:cNvPr id="143" name="Shape 141"/>
+          <p:cNvPr id="147" name="Shape 145"/>
           <p:cNvSpPr/>
           <p:nvPr/>
         </p:nvSpPr>
@@ -24452,7 +24732,7 @@
       </p:sp>
       <p:sp>
         <p:nvSpPr>
-          <p:cNvPr id="144" name="Shape 142"/>
+          <p:cNvPr id="148" name="Shape 146"/>
           <p:cNvSpPr/>
           <p:nvPr/>
         </p:nvSpPr>
@@ -24472,7 +24752,7 @@
       </p:sp>
       <p:sp>
         <p:nvSpPr>
-          <p:cNvPr id="145" name="Shape 143"/>
+          <p:cNvPr id="149" name="Shape 147"/>
           <p:cNvSpPr/>
           <p:nvPr/>
         </p:nvSpPr>
@@ -24492,7 +24772,7 @@
       </p:sp>
       <p:sp>
         <p:nvSpPr>
-          <p:cNvPr id="146" name="Shape 144"/>
+          <p:cNvPr id="150" name="Shape 148"/>
           <p:cNvSpPr/>
           <p:nvPr/>
         </p:nvSpPr>
@@ -24512,7 +24792,7 @@
       </p:sp>
       <p:sp>
         <p:nvSpPr>
-          <p:cNvPr id="147" name="Shape 145"/>
+          <p:cNvPr id="151" name="Shape 149"/>
           <p:cNvSpPr/>
           <p:nvPr/>
         </p:nvSpPr>
@@ -24532,7 +24812,7 @@
       </p:sp>
       <p:sp>
         <p:nvSpPr>
-          <p:cNvPr id="148" name="Shape 146"/>
+          <p:cNvPr id="152" name="Shape 150"/>
           <p:cNvSpPr/>
           <p:nvPr/>
         </p:nvSpPr>
@@ -24552,7 +24832,7 @@
       </p:sp>
       <p:sp>
         <p:nvSpPr>
-          <p:cNvPr id="149" name="Shape 147"/>
+          <p:cNvPr id="153" name="Shape 151"/>
           <p:cNvSpPr/>
           <p:nvPr/>
         </p:nvSpPr>
@@ -24572,7 +24852,7 @@
       </p:sp>
       <p:sp>
         <p:nvSpPr>
-          <p:cNvPr id="150" name="Shape 148"/>
+          <p:cNvPr id="154" name="Shape 152"/>
           <p:cNvSpPr/>
           <p:nvPr/>
         </p:nvSpPr>
@@ -24592,7 +24872,7 @@
       </p:sp>
       <p:sp>
         <p:nvSpPr>
-          <p:cNvPr id="151" name="Shape 149"/>
+          <p:cNvPr id="155" name="Shape 153"/>
           <p:cNvSpPr/>
           <p:nvPr/>
         </p:nvSpPr>
@@ -24612,7 +24892,7 @@
       </p:sp>
       <p:sp>
         <p:nvSpPr>
-          <p:cNvPr id="152" name="Shape 150"/>
+          <p:cNvPr id="156" name="Shape 154"/>
           <p:cNvSpPr/>
           <p:nvPr/>
         </p:nvSpPr>
@@ -24632,7 +24912,7 @@
       </p:sp>
       <p:sp>
         <p:nvSpPr>
-          <p:cNvPr id="153" name="Shape 151"/>
+          <p:cNvPr id="157" name="Shape 155"/>
           <p:cNvSpPr/>
           <p:nvPr/>
         </p:nvSpPr>
@@ -24652,7 +24932,7 @@
       </p:sp>
       <p:sp>
         <p:nvSpPr>
-          <p:cNvPr id="154" name="Shape 152"/>
+          <p:cNvPr id="158" name="Shape 156"/>
           <p:cNvSpPr/>
           <p:nvPr/>
         </p:nvSpPr>
@@ -24672,7 +24952,7 @@
       </p:sp>
       <p:sp>
         <p:nvSpPr>
-          <p:cNvPr id="155" name="Shape 153"/>
+          <p:cNvPr id="159" name="Shape 157"/>
           <p:cNvSpPr/>
           <p:nvPr/>
         </p:nvSpPr>
@@ -24692,7 +24972,7 @@
       </p:sp>
       <p:sp>
         <p:nvSpPr>
-          <p:cNvPr id="156" name="Shape 154"/>
+          <p:cNvPr id="160" name="Shape 158"/>
           <p:cNvSpPr/>
           <p:nvPr/>
         </p:nvSpPr>
@@ -24712,7 +24992,7 @@
       </p:sp>
       <p:sp>
         <p:nvSpPr>
-          <p:cNvPr id="157" name="Shape 155"/>
+          <p:cNvPr id="161" name="Shape 159"/>
           <p:cNvSpPr/>
           <p:nvPr/>
         </p:nvSpPr>
@@ -24732,7 +25012,7 @@
       </p:sp>
       <p:sp>
         <p:nvSpPr>
-          <p:cNvPr id="158" name="Shape 156"/>
+          <p:cNvPr id="162" name="Shape 160"/>
           <p:cNvSpPr/>
           <p:nvPr/>
         </p:nvSpPr>
@@ -24752,7 +25032,7 @@
       </p:sp>
       <p:sp>
         <p:nvSpPr>
-          <p:cNvPr id="159" name="Shape 157"/>
+          <p:cNvPr id="163" name="Shape 161"/>
           <p:cNvSpPr/>
           <p:nvPr/>
         </p:nvSpPr>
@@ -24772,7 +25052,7 @@
       </p:sp>
       <p:sp>
         <p:nvSpPr>
-          <p:cNvPr id="160" name="Shape 158"/>
+          <p:cNvPr id="164" name="Shape 162"/>
           <p:cNvSpPr/>
           <p:nvPr/>
         </p:nvSpPr>
@@ -24792,7 +25072,7 @@
       </p:sp>
       <p:sp>
         <p:nvSpPr>
-          <p:cNvPr id="161" name="Shape 159"/>
+          <p:cNvPr id="165" name="Shape 163"/>
           <p:cNvSpPr/>
           <p:nvPr/>
         </p:nvSpPr>
@@ -24812,7 +25092,7 @@
       </p:sp>
       <p:sp>
         <p:nvSpPr>
-          <p:cNvPr id="162" name="Shape 160"/>
+          <p:cNvPr id="166" name="Shape 164"/>
           <p:cNvSpPr/>
           <p:nvPr/>
         </p:nvSpPr>
@@ -24832,7 +25112,7 @@
       </p:sp>
       <p:sp>
         <p:nvSpPr>
-          <p:cNvPr id="163" name="Shape 161"/>
+          <p:cNvPr id="167" name="Shape 165"/>
           <p:cNvSpPr/>
           <p:nvPr/>
         </p:nvSpPr>
@@ -24852,7 +25132,7 @@
       </p:sp>
       <p:sp>
         <p:nvSpPr>
-          <p:cNvPr id="164" name="Shape 162"/>
+          <p:cNvPr id="168" name="Shape 166"/>
           <p:cNvSpPr/>
           <p:nvPr/>
         </p:nvSpPr>
@@ -24872,7 +25152,7 @@
       </p:sp>
       <p:sp>
         <p:nvSpPr>
-          <p:cNvPr id="165" name="Shape 163"/>
+          <p:cNvPr id="169" name="Shape 167"/>
           <p:cNvSpPr/>
           <p:nvPr/>
         </p:nvSpPr>
@@ -24892,7 +25172,7 @@
       </p:sp>
       <p:sp>
         <p:nvSpPr>
-          <p:cNvPr id="166" name="Shape 164"/>
+          <p:cNvPr id="170" name="Shape 168"/>
           <p:cNvSpPr/>
           <p:nvPr/>
         </p:nvSpPr>
@@ -24912,7 +25192,7 @@
       </p:sp>
       <p:sp>
         <p:nvSpPr>
-          <p:cNvPr id="167" name="Shape 165"/>
+          <p:cNvPr id="171" name="Shape 169"/>
           <p:cNvSpPr/>
           <p:nvPr/>
         </p:nvSpPr>
@@ -24932,7 +25212,7 @@
       </p:sp>
       <p:sp>
         <p:nvSpPr>
-          <p:cNvPr id="168" name="Shape 166"/>
+          <p:cNvPr id="172" name="Shape 170"/>
           <p:cNvSpPr/>
           <p:nvPr/>
         </p:nvSpPr>
@@ -24952,7 +25232,7 @@
       </p:sp>
       <p:sp>
         <p:nvSpPr>
-          <p:cNvPr id="169" name="Shape 167"/>
+          <p:cNvPr id="173" name="Shape 171"/>
           <p:cNvSpPr/>
           <p:nvPr/>
         </p:nvSpPr>
@@ -24972,7 +25252,7 @@
       </p:sp>
       <p:sp>
         <p:nvSpPr>
-          <p:cNvPr id="170" name="Shape 168"/>
+          <p:cNvPr id="174" name="Shape 172"/>
           <p:cNvSpPr/>
           <p:nvPr/>
         </p:nvSpPr>
@@ -24992,7 +25272,7 @@
       </p:sp>
       <p:sp>
         <p:nvSpPr>
-          <p:cNvPr id="171" name="Shape 169"/>
+          <p:cNvPr id="175" name="Shape 173"/>
           <p:cNvSpPr/>
           <p:nvPr/>
         </p:nvSpPr>
@@ -25012,7 +25292,7 @@
       </p:sp>
       <p:sp>
         <p:nvSpPr>
-          <p:cNvPr id="172" name="Shape 170"/>
+          <p:cNvPr id="176" name="Shape 174"/>
           <p:cNvSpPr/>
           <p:nvPr/>
         </p:nvSpPr>
@@ -25032,7 +25312,7 @@
       </p:sp>
       <p:sp>
         <p:nvSpPr>
-          <p:cNvPr id="173" name="Shape 171"/>
+          <p:cNvPr id="177" name="Shape 175"/>
           <p:cNvSpPr/>
           <p:nvPr/>
         </p:nvSpPr>
@@ -25052,7 +25332,7 @@
       </p:sp>
       <p:sp>
         <p:nvSpPr>
-          <p:cNvPr id="174" name="Shape 172"/>
+          <p:cNvPr id="178" name="Shape 176"/>
           <p:cNvSpPr/>
           <p:nvPr/>
         </p:nvSpPr>
@@ -25072,7 +25352,7 @@
       </p:sp>
       <p:sp>
         <p:nvSpPr>
-          <p:cNvPr id="175" name="Shape 173"/>
+          <p:cNvPr id="179" name="Shape 177"/>
           <p:cNvSpPr/>
           <p:nvPr/>
         </p:nvSpPr>
@@ -25092,7 +25372,7 @@
       </p:sp>
       <p:sp>
         <p:nvSpPr>
-          <p:cNvPr id="176" name="Shape 174"/>
+          <p:cNvPr id="180" name="Shape 178"/>
           <p:cNvSpPr/>
           <p:nvPr/>
         </p:nvSpPr>
@@ -25112,7 +25392,7 @@
       </p:sp>
       <p:sp>
         <p:nvSpPr>
-          <p:cNvPr id="177" name="Shape 175"/>
+          <p:cNvPr id="181" name="Shape 179"/>
           <p:cNvSpPr/>
           <p:nvPr/>
         </p:nvSpPr>
@@ -25132,7 +25412,7 @@
       </p:sp>
       <p:sp>
         <p:nvSpPr>
-          <p:cNvPr id="178" name="Shape 176"/>
+          <p:cNvPr id="182" name="Shape 180"/>
           <p:cNvSpPr/>
           <p:nvPr/>
         </p:nvSpPr>
@@ -25152,7 +25432,7 @@
       </p:sp>
       <p:sp>
         <p:nvSpPr>
-          <p:cNvPr id="179" name="Shape 177"/>
+          <p:cNvPr id="183" name="Shape 181"/>
           <p:cNvSpPr/>
           <p:nvPr/>
         </p:nvSpPr>
@@ -25172,7 +25452,7 @@
       </p:sp>
       <p:sp>
         <p:nvSpPr>
-          <p:cNvPr id="180" name="Shape 178"/>
+          <p:cNvPr id="184" name="Shape 182"/>
           <p:cNvSpPr/>
           <p:nvPr/>
         </p:nvSpPr>
@@ -25192,7 +25472,7 @@
       </p:sp>
       <p:sp>
         <p:nvSpPr>
-          <p:cNvPr id="181" name="Shape 179"/>
+          <p:cNvPr id="185" name="Shape 183"/>
           <p:cNvSpPr/>
           <p:nvPr/>
         </p:nvSpPr>
@@ -25212,7 +25492,7 @@
       </p:sp>
       <p:sp>
         <p:nvSpPr>
-          <p:cNvPr id="182" name="Shape 180"/>
+          <p:cNvPr id="186" name="Shape 184"/>
           <p:cNvSpPr/>
           <p:nvPr/>
         </p:nvSpPr>
@@ -25232,7 +25512,7 @@
       </p:sp>
       <p:sp>
         <p:nvSpPr>
-          <p:cNvPr id="183" name="Shape 181"/>
+          <p:cNvPr id="187" name="Shape 185"/>
           <p:cNvSpPr/>
           <p:nvPr/>
         </p:nvSpPr>
@@ -25252,7 +25532,7 @@
       </p:sp>
       <p:sp>
         <p:nvSpPr>
-          <p:cNvPr id="184" name="Shape 182"/>
+          <p:cNvPr id="188" name="Shape 186"/>
           <p:cNvSpPr/>
           <p:nvPr/>
         </p:nvSpPr>
@@ -25272,7 +25552,7 @@
       </p:sp>
       <p:sp>
         <p:nvSpPr>
-          <p:cNvPr id="185" name="Shape 183"/>
+          <p:cNvPr id="189" name="Shape 187"/>
           <p:cNvSpPr/>
           <p:nvPr/>
         </p:nvSpPr>
@@ -25292,7 +25572,7 @@
       </p:sp>
       <p:sp>
         <p:nvSpPr>
-          <p:cNvPr id="186" name="Shape 184"/>
+          <p:cNvPr id="190" name="Shape 188"/>
           <p:cNvSpPr/>
           <p:nvPr/>
         </p:nvSpPr>
@@ -25312,7 +25592,7 @@
       </p:sp>
       <p:sp>
         <p:nvSpPr>
-          <p:cNvPr id="187" name="Shape 185"/>
+          <p:cNvPr id="191" name="Shape 189"/>
           <p:cNvSpPr/>
           <p:nvPr/>
         </p:nvSpPr>
@@ -25332,7 +25612,7 @@
       </p:sp>
       <p:sp>
         <p:nvSpPr>
-          <p:cNvPr id="188" name="Shape 186"/>
+          <p:cNvPr id="192" name="Shape 190"/>
           <p:cNvSpPr/>
           <p:nvPr/>
         </p:nvSpPr>
@@ -25352,7 +25632,7 @@
       </p:sp>
       <p:sp>
         <p:nvSpPr>
-          <p:cNvPr id="189" name="Shape 187"/>
+          <p:cNvPr id="193" name="Shape 191"/>
           <p:cNvSpPr/>
           <p:nvPr/>
         </p:nvSpPr>
@@ -25372,7 +25652,7 @@
       </p:sp>
       <p:sp>
         <p:nvSpPr>
-          <p:cNvPr id="190" name="Shape 188"/>
+          <p:cNvPr id="194" name="Shape 192"/>
           <p:cNvSpPr/>
           <p:nvPr/>
         </p:nvSpPr>
@@ -25392,7 +25672,7 @@
       </p:sp>
       <p:sp>
         <p:nvSpPr>
-          <p:cNvPr id="191" name="Shape 189"/>
+          <p:cNvPr id="195" name="Shape 193"/>
           <p:cNvSpPr/>
           <p:nvPr/>
         </p:nvSpPr>
@@ -25412,7 +25692,7 @@
       </p:sp>
       <p:sp>
         <p:nvSpPr>
-          <p:cNvPr id="192" name="Shape 190"/>
+          <p:cNvPr id="196" name="Shape 194"/>
           <p:cNvSpPr/>
           <p:nvPr/>
         </p:nvSpPr>
@@ -25432,7 +25712,7 @@
       </p:sp>
       <p:sp>
         <p:nvSpPr>
-          <p:cNvPr id="193" name="Shape 191"/>
+          <p:cNvPr id="197" name="Shape 195"/>
           <p:cNvSpPr/>
           <p:nvPr/>
         </p:nvSpPr>
@@ -25452,7 +25732,7 @@
       </p:sp>
       <p:sp>
         <p:nvSpPr>
-          <p:cNvPr id="194" name="Shape 192"/>
+          <p:cNvPr id="198" name="Shape 196"/>
           <p:cNvSpPr/>
           <p:nvPr/>
         </p:nvSpPr>
@@ -25472,7 +25752,7 @@
       </p:sp>
       <p:sp>
         <p:nvSpPr>
-          <p:cNvPr id="195" name="Shape 193"/>
+          <p:cNvPr id="199" name="Shape 197"/>
           <p:cNvSpPr/>
           <p:nvPr/>
         </p:nvSpPr>
@@ -25492,7 +25772,7 @@
       </p:sp>
       <p:sp>
         <p:nvSpPr>
-          <p:cNvPr id="196" name="Shape 194"/>
+          <p:cNvPr id="200" name="Shape 198"/>
           <p:cNvSpPr/>
           <p:nvPr/>
         </p:nvSpPr>
@@ -25512,7 +25792,7 @@
       </p:sp>
       <p:sp>
         <p:nvSpPr>
-          <p:cNvPr id="197" name="Shape 195"/>
+          <p:cNvPr id="201" name="Shape 199"/>
           <p:cNvSpPr/>
           <p:nvPr/>
         </p:nvSpPr>
@@ -25532,7 +25812,7 @@
       </p:sp>
       <p:sp>
         <p:nvSpPr>
-          <p:cNvPr id="198" name="Shape 196"/>
+          <p:cNvPr id="202" name="Shape 200"/>
           <p:cNvSpPr/>
           <p:nvPr/>
         </p:nvSpPr>
@@ -25552,7 +25832,7 @@
       </p:sp>
       <p:sp>
         <p:nvSpPr>
-          <p:cNvPr id="199" name="Shape 197"/>
+          <p:cNvPr id="203" name="Shape 201"/>
           <p:cNvSpPr/>
           <p:nvPr/>
         </p:nvSpPr>
@@ -25572,7 +25852,7 @@
       </p:sp>
       <p:sp>
         <p:nvSpPr>
-          <p:cNvPr id="200" name="Shape 198"/>
+          <p:cNvPr id="204" name="Shape 202"/>
           <p:cNvSpPr/>
           <p:nvPr/>
         </p:nvSpPr>
@@ -25592,7 +25872,7 @@
       </p:sp>
       <p:sp>
         <p:nvSpPr>
-          <p:cNvPr id="201" name="Shape 199"/>
+          <p:cNvPr id="205" name="Shape 203"/>
           <p:cNvSpPr/>
           <p:nvPr/>
         </p:nvSpPr>
@@ -25612,7 +25892,7 @@
       </p:sp>
       <p:sp>
         <p:nvSpPr>
-          <p:cNvPr id="202" name="Shape 200"/>
+          <p:cNvPr id="206" name="Shape 204"/>
           <p:cNvSpPr/>
           <p:nvPr/>
         </p:nvSpPr>
@@ -25632,7 +25912,7 @@
       </p:sp>
       <p:sp>
         <p:nvSpPr>
-          <p:cNvPr id="203" name="Shape 201"/>
+          <p:cNvPr id="207" name="Shape 205"/>
           <p:cNvSpPr/>
           <p:nvPr/>
         </p:nvSpPr>
@@ -25652,7 +25932,7 @@
       </p:sp>
       <p:sp>
         <p:nvSpPr>
-          <p:cNvPr id="204" name="Shape 202"/>
+          <p:cNvPr id="208" name="Shape 206"/>
           <p:cNvSpPr/>
           <p:nvPr/>
         </p:nvSpPr>
@@ -25672,7 +25952,7 @@
       </p:sp>
       <p:sp>
         <p:nvSpPr>
-          <p:cNvPr id="205" name="Shape 203"/>
+          <p:cNvPr id="209" name="Shape 207"/>
           <p:cNvSpPr/>
           <p:nvPr/>
         </p:nvSpPr>
@@ -25692,7 +25972,7 @@
       </p:sp>
       <p:sp>
         <p:nvSpPr>
-          <p:cNvPr id="206" name="Shape 204"/>
+          <p:cNvPr id="210" name="Shape 208"/>
           <p:cNvSpPr/>
           <p:nvPr/>
         </p:nvSpPr>
@@ -25712,7 +25992,7 @@
       </p:sp>
       <p:sp>
         <p:nvSpPr>
-          <p:cNvPr id="207" name="Shape 205"/>
+          <p:cNvPr id="211" name="Shape 209"/>
           <p:cNvSpPr/>
           <p:nvPr/>
         </p:nvSpPr>
@@ -25732,7 +26012,7 @@
       </p:sp>
       <p:sp>
         <p:nvSpPr>
-          <p:cNvPr id="208" name="Shape 206"/>
+          <p:cNvPr id="212" name="Shape 210"/>
           <p:cNvSpPr/>
           <p:nvPr/>
         </p:nvSpPr>
@@ -25752,7 +26032,7 @@
       </p:sp>
       <p:sp>
         <p:nvSpPr>
-          <p:cNvPr id="209" name="Shape 207"/>
+          <p:cNvPr id="213" name="Shape 211"/>
           <p:cNvSpPr/>
           <p:nvPr/>
         </p:nvSpPr>
@@ -25772,7 +26052,7 @@
       </p:sp>
       <p:sp>
         <p:nvSpPr>
-          <p:cNvPr id="210" name="Shape 208"/>
+          <p:cNvPr id="214" name="Shape 212"/>
           <p:cNvSpPr/>
           <p:nvPr/>
         </p:nvSpPr>
@@ -25792,7 +26072,7 @@
       </p:sp>
       <p:sp>
         <p:nvSpPr>
-          <p:cNvPr id="211" name="Shape 209"/>
+          <p:cNvPr id="215" name="Shape 213"/>
           <p:cNvSpPr/>
           <p:nvPr/>
         </p:nvSpPr>
@@ -25812,7 +26092,7 @@
       </p:sp>
       <p:sp>
         <p:nvSpPr>
-          <p:cNvPr id="212" name="Shape 210"/>
+          <p:cNvPr id="216" name="Shape 214"/>
           <p:cNvSpPr/>
           <p:nvPr/>
         </p:nvSpPr>
@@ -25832,7 +26112,7 @@
       </p:sp>
       <p:sp>
         <p:nvSpPr>
-          <p:cNvPr id="213" name="Shape 211"/>
+          <p:cNvPr id="217" name="Shape 215"/>
           <p:cNvSpPr/>
           <p:nvPr/>
         </p:nvSpPr>
@@ -25852,7 +26132,7 @@
       </p:sp>
       <p:sp>
         <p:nvSpPr>
-          <p:cNvPr id="214" name="Shape 212"/>
+          <p:cNvPr id="218" name="Shape 216"/>
           <p:cNvSpPr/>
           <p:nvPr/>
         </p:nvSpPr>
@@ -25872,7 +26152,7 @@
       </p:sp>
       <p:sp>
         <p:nvSpPr>
-          <p:cNvPr id="215" name="Shape 213"/>
+          <p:cNvPr id="219" name="Shape 217"/>
           <p:cNvSpPr/>
           <p:nvPr/>
         </p:nvSpPr>
@@ -25892,7 +26172,7 @@
       </p:sp>
       <p:sp>
         <p:nvSpPr>
-          <p:cNvPr id="216" name="Shape 214"/>
+          <p:cNvPr id="220" name="Shape 218"/>
           <p:cNvSpPr/>
           <p:nvPr/>
         </p:nvSpPr>
@@ -25912,7 +26192,7 @@
       </p:sp>
       <p:sp>
         <p:nvSpPr>
-          <p:cNvPr id="217" name="Shape 215"/>
+          <p:cNvPr id="221" name="Shape 219"/>
           <p:cNvSpPr/>
           <p:nvPr/>
         </p:nvSpPr>
@@ -25932,7 +26212,7 @@
       </p:sp>
       <p:sp>
         <p:nvSpPr>
-          <p:cNvPr id="218" name="Shape 216"/>
+          <p:cNvPr id="222" name="Shape 220"/>
           <p:cNvSpPr/>
           <p:nvPr/>
         </p:nvSpPr>
@@ -25952,7 +26232,7 @@
       </p:sp>
       <p:sp>
         <p:nvSpPr>
-          <p:cNvPr id="219" name="Shape 217"/>
+          <p:cNvPr id="223" name="Shape 221"/>
           <p:cNvSpPr/>
           <p:nvPr/>
         </p:nvSpPr>
@@ -25972,7 +26252,7 @@
       </p:sp>
       <p:sp>
         <p:nvSpPr>
-          <p:cNvPr id="220" name="Shape 218"/>
+          <p:cNvPr id="224" name="Shape 222"/>
           <p:cNvSpPr/>
           <p:nvPr/>
         </p:nvSpPr>
@@ -25992,7 +26272,7 @@
       </p:sp>
       <p:sp>
         <p:nvSpPr>
-          <p:cNvPr id="221" name="Shape 219"/>
+          <p:cNvPr id="225" name="Shape 223"/>
           <p:cNvSpPr/>
           <p:nvPr/>
         </p:nvSpPr>
@@ -26012,7 +26292,7 @@
       </p:sp>
       <p:sp>
         <p:nvSpPr>
-          <p:cNvPr id="222" name="Shape 220"/>
+          <p:cNvPr id="226" name="Shape 224"/>
           <p:cNvSpPr/>
           <p:nvPr/>
         </p:nvSpPr>
@@ -26032,7 +26312,7 @@
       </p:sp>
       <p:sp>
         <p:nvSpPr>
-          <p:cNvPr id="223" name="Shape 221"/>
+          <p:cNvPr id="227" name="Shape 225"/>
           <p:cNvSpPr/>
           <p:nvPr/>
         </p:nvSpPr>
@@ -26052,7 +26332,7 @@
       </p:sp>
       <p:sp>
         <p:nvSpPr>
-          <p:cNvPr id="224" name="Shape 222"/>
+          <p:cNvPr id="228" name="Shape 226"/>
           <p:cNvSpPr/>
           <p:nvPr/>
         </p:nvSpPr>
@@ -26072,7 +26352,7 @@
       </p:sp>
       <p:sp>
         <p:nvSpPr>
-          <p:cNvPr id="225" name="Shape 223"/>
+          <p:cNvPr id="229" name="Shape 227"/>
           <p:cNvSpPr/>
           <p:nvPr/>
         </p:nvSpPr>
@@ -26092,7 +26372,7 @@
       </p:sp>
       <p:sp>
         <p:nvSpPr>
-          <p:cNvPr id="226" name="Shape 224"/>
+          <p:cNvPr id="230" name="Shape 228"/>
           <p:cNvSpPr/>
           <p:nvPr/>
         </p:nvSpPr>
@@ -26112,7 +26392,7 @@
       </p:sp>
       <p:sp>
         <p:nvSpPr>
-          <p:cNvPr id="227" name="Shape 225"/>
+          <p:cNvPr id="231" name="Shape 229"/>
           <p:cNvSpPr/>
           <p:nvPr/>
         </p:nvSpPr>
@@ -26132,7 +26412,7 @@
       </p:sp>
       <p:sp>
         <p:nvSpPr>
-          <p:cNvPr id="228" name="Shape 226"/>
+          <p:cNvPr id="232" name="Shape 230"/>
           <p:cNvSpPr/>
           <p:nvPr/>
         </p:nvSpPr>
@@ -26152,7 +26432,7 @@
       </p:sp>
       <p:sp>
         <p:nvSpPr>
-          <p:cNvPr id="229" name="Shape 227"/>
+          <p:cNvPr id="233" name="Shape 231"/>
           <p:cNvSpPr/>
           <p:nvPr/>
         </p:nvSpPr>
@@ -26172,7 +26452,7 @@
       </p:sp>
       <p:sp>
         <p:nvSpPr>
-          <p:cNvPr id="230" name="Shape 228"/>
+          <p:cNvPr id="234" name="Shape 232"/>
           <p:cNvSpPr/>
           <p:nvPr/>
         </p:nvSpPr>
@@ -26192,7 +26472,7 @@
       </p:sp>
       <p:sp>
         <p:nvSpPr>
-          <p:cNvPr id="231" name="Shape 229"/>
+          <p:cNvPr id="235" name="Shape 233"/>
           <p:cNvSpPr/>
           <p:nvPr/>
         </p:nvSpPr>
@@ -26212,7 +26492,7 @@
       </p:sp>
       <p:sp>
         <p:nvSpPr>
-          <p:cNvPr id="232" name="Shape 230"/>
+          <p:cNvPr id="236" name="Shape 234"/>
           <p:cNvSpPr/>
           <p:nvPr/>
         </p:nvSpPr>
@@ -26232,7 +26512,7 @@
       </p:sp>
       <p:sp>
         <p:nvSpPr>
-          <p:cNvPr id="233" name="Shape 231"/>
+          <p:cNvPr id="237" name="Shape 235"/>
           <p:cNvSpPr/>
           <p:nvPr/>
         </p:nvSpPr>
@@ -26252,7 +26532,7 @@
       </p:sp>
       <p:sp>
         <p:nvSpPr>
-          <p:cNvPr id="234" name="Shape 232"/>
+          <p:cNvPr id="238" name="Shape 236"/>
           <p:cNvSpPr/>
           <p:nvPr/>
         </p:nvSpPr>
@@ -26272,7 +26552,7 @@
       </p:sp>
       <p:sp>
         <p:nvSpPr>
-          <p:cNvPr id="235" name="Shape 233"/>
+          <p:cNvPr id="239" name="Shape 237"/>
           <p:cNvSpPr/>
           <p:nvPr/>
         </p:nvSpPr>
@@ -26292,7 +26572,7 @@
       </p:sp>
       <p:sp>
         <p:nvSpPr>
-          <p:cNvPr id="236" name="Shape 234"/>
+          <p:cNvPr id="240" name="Shape 238"/>
           <p:cNvSpPr/>
           <p:nvPr/>
         </p:nvSpPr>
@@ -26312,7 +26592,7 @@
       </p:sp>
       <p:sp>
         <p:nvSpPr>
-          <p:cNvPr id="237" name="Shape 235"/>
+          <p:cNvPr id="241" name="Shape 239"/>
           <p:cNvSpPr/>
           <p:nvPr/>
         </p:nvSpPr>
@@ -26332,7 +26612,7 @@
       </p:sp>
       <p:sp>
         <p:nvSpPr>
-          <p:cNvPr id="238" name="Shape 236"/>
+          <p:cNvPr id="242" name="Shape 240"/>
           <p:cNvSpPr/>
           <p:nvPr/>
         </p:nvSpPr>
@@ -26352,7 +26632,7 @@
       </p:sp>
       <p:sp>
         <p:nvSpPr>
-          <p:cNvPr id="239" name="Shape 237"/>
+          <p:cNvPr id="243" name="Shape 241"/>
           <p:cNvSpPr/>
           <p:nvPr/>
         </p:nvSpPr>
@@ -26372,7 +26652,7 @@
       </p:sp>
       <p:sp>
         <p:nvSpPr>
-          <p:cNvPr id="240" name="Shape 238"/>
+          <p:cNvPr id="244" name="Shape 242"/>
           <p:cNvSpPr/>
           <p:nvPr/>
         </p:nvSpPr>
@@ -26392,7 +26672,7 @@
       </p:sp>
       <p:sp>
         <p:nvSpPr>
-          <p:cNvPr id="241" name="Shape 239"/>
+          <p:cNvPr id="245" name="Shape 243"/>
           <p:cNvSpPr/>
           <p:nvPr/>
         </p:nvSpPr>
@@ -26412,7 +26692,7 @@
       </p:sp>
       <p:sp>
         <p:nvSpPr>
-          <p:cNvPr id="242" name="Shape 240"/>
+          <p:cNvPr id="246" name="Shape 244"/>
           <p:cNvSpPr/>
           <p:nvPr/>
         </p:nvSpPr>
@@ -26432,7 +26712,7 @@
       </p:sp>
       <p:sp>
         <p:nvSpPr>
-          <p:cNvPr id="243" name="Shape 241"/>
+          <p:cNvPr id="247" name="Shape 245"/>
           <p:cNvSpPr/>
           <p:nvPr/>
         </p:nvSpPr>
@@ -26452,7 +26732,7 @@
       </p:sp>
       <p:sp>
         <p:nvSpPr>
-          <p:cNvPr id="244" name="Shape 242"/>
+          <p:cNvPr id="248" name="Shape 246"/>
           <p:cNvSpPr/>
           <p:nvPr/>
         </p:nvSpPr>
@@ -26472,7 +26752,7 @@
       </p:sp>
       <p:sp>
         <p:nvSpPr>
-          <p:cNvPr id="245" name="Shape 243"/>
+          <p:cNvPr id="249" name="Shape 247"/>
           <p:cNvSpPr/>
           <p:nvPr/>
         </p:nvSpPr>
@@ -26492,7 +26772,7 @@
       </p:sp>
       <p:sp>
         <p:nvSpPr>
-          <p:cNvPr id="246" name="Shape 244"/>
+          <p:cNvPr id="250" name="Shape 248"/>
           <p:cNvSpPr/>
           <p:nvPr/>
         </p:nvSpPr>
@@ -26512,7 +26792,7 @@
       </p:sp>
       <p:sp>
         <p:nvSpPr>
-          <p:cNvPr id="247" name="Shape 245"/>
+          <p:cNvPr id="251" name="Shape 249"/>
           <p:cNvSpPr/>
           <p:nvPr/>
         </p:nvSpPr>
@@ -26532,7 +26812,7 @@
       </p:sp>
       <p:sp>
         <p:nvSpPr>
-          <p:cNvPr id="248" name="Shape 246"/>
+          <p:cNvPr id="252" name="Shape 250"/>
           <p:cNvSpPr/>
           <p:nvPr/>
         </p:nvSpPr>
@@ -26552,7 +26832,7 @@
       </p:sp>
       <p:sp>
         <p:nvSpPr>
-          <p:cNvPr id="249" name="Shape 247"/>
+          <p:cNvPr id="253" name="Shape 251"/>
           <p:cNvSpPr/>
           <p:nvPr/>
         </p:nvSpPr>
@@ -26572,7 +26852,7 @@
       </p:sp>
       <p:sp>
         <p:nvSpPr>
-          <p:cNvPr id="250" name="Shape 248"/>
+          <p:cNvPr id="254" name="Shape 252"/>
           <p:cNvSpPr/>
           <p:nvPr/>
         </p:nvSpPr>
@@ -26592,7 +26872,7 @@
       </p:sp>
       <p:sp>
         <p:nvSpPr>
-          <p:cNvPr id="251" name="Shape 249"/>
+          <p:cNvPr id="255" name="Shape 253"/>
           <p:cNvSpPr/>
           <p:nvPr/>
         </p:nvSpPr>
@@ -26612,7 +26892,7 @@
       </p:sp>
       <p:sp>
         <p:nvSpPr>
-          <p:cNvPr id="252" name="Shape 250"/>
+          <p:cNvPr id="256" name="Shape 254"/>
           <p:cNvSpPr/>
           <p:nvPr/>
         </p:nvSpPr>
@@ -26632,7 +26912,7 @@
       </p:sp>
       <p:sp>
         <p:nvSpPr>
-          <p:cNvPr id="253" name="Shape 251"/>
+          <p:cNvPr id="257" name="Shape 255"/>
           <p:cNvSpPr/>
           <p:nvPr/>
         </p:nvSpPr>
@@ -26652,7 +26932,7 @@
       </p:sp>
       <p:sp>
         <p:nvSpPr>
-          <p:cNvPr id="254" name="Shape 252"/>
+          <p:cNvPr id="258" name="Shape 256"/>
           <p:cNvSpPr/>
           <p:nvPr/>
         </p:nvSpPr>
@@ -26672,7 +26952,7 @@
       </p:sp>
       <p:sp>
         <p:nvSpPr>
-          <p:cNvPr id="255" name="Shape 253"/>
+          <p:cNvPr id="259" name="Shape 257"/>
           <p:cNvSpPr/>
           <p:nvPr/>
         </p:nvSpPr>
@@ -26692,7 +26972,7 @@
       </p:sp>
       <p:sp>
         <p:nvSpPr>
-          <p:cNvPr id="256" name="Shape 254"/>
+          <p:cNvPr id="260" name="Shape 258"/>
           <p:cNvSpPr/>
           <p:nvPr/>
         </p:nvSpPr>
@@ -26712,7 +26992,7 @@
       </p:sp>
       <p:sp>
         <p:nvSpPr>
-          <p:cNvPr id="257" name="Shape 255"/>
+          <p:cNvPr id="261" name="Shape 259"/>
           <p:cNvSpPr/>
           <p:nvPr/>
         </p:nvSpPr>
@@ -26732,7 +27012,7 @@
       </p:sp>
       <p:sp>
         <p:nvSpPr>
-          <p:cNvPr id="258" name="Shape 256"/>
+          <p:cNvPr id="262" name="Shape 260"/>
           <p:cNvSpPr/>
           <p:nvPr/>
         </p:nvSpPr>
@@ -26752,7 +27032,7 @@
       </p:sp>
       <p:sp>
         <p:nvSpPr>
-          <p:cNvPr id="259" name="Shape 257"/>
+          <p:cNvPr id="263" name="Shape 261"/>
           <p:cNvSpPr/>
           <p:nvPr/>
         </p:nvSpPr>
@@ -26772,7 +27052,7 @@
       </p:sp>
       <p:sp>
         <p:nvSpPr>
-          <p:cNvPr id="260" name="Shape 258"/>
+          <p:cNvPr id="264" name="Shape 262"/>
           <p:cNvSpPr/>
           <p:nvPr/>
         </p:nvSpPr>
@@ -26792,7 +27072,7 @@
       </p:sp>
       <p:sp>
         <p:nvSpPr>
-          <p:cNvPr id="261" name="Shape 259"/>
+          <p:cNvPr id="265" name="Shape 263"/>
           <p:cNvSpPr/>
           <p:nvPr/>
         </p:nvSpPr>
@@ -26812,7 +27092,7 @@
       </p:sp>
       <p:sp>
         <p:nvSpPr>
-          <p:cNvPr id="262" name="Shape 260"/>
+          <p:cNvPr id="266" name="Shape 264"/>
           <p:cNvSpPr/>
           <p:nvPr/>
         </p:nvSpPr>
@@ -26832,7 +27112,7 @@
       </p:sp>
       <p:sp>
         <p:nvSpPr>
-          <p:cNvPr id="263" name="Shape 261"/>
+          <p:cNvPr id="267" name="Shape 265"/>
           <p:cNvSpPr/>
           <p:nvPr/>
         </p:nvSpPr>
@@ -26852,7 +27132,7 @@
       </p:sp>
       <p:sp>
         <p:nvSpPr>
-          <p:cNvPr id="264" name="Shape 262"/>
+          <p:cNvPr id="268" name="Shape 266"/>
           <p:cNvSpPr/>
           <p:nvPr/>
         </p:nvSpPr>
@@ -26872,7 +27152,7 @@
       </p:sp>
       <p:sp>
         <p:nvSpPr>
-          <p:cNvPr id="265" name="Shape 263"/>
+          <p:cNvPr id="269" name="Shape 267"/>
           <p:cNvSpPr/>
           <p:nvPr/>
         </p:nvSpPr>
@@ -26892,7 +27172,7 @@
       </p:sp>
       <p:sp>
         <p:nvSpPr>
-          <p:cNvPr id="266" name="Shape 264"/>
+          <p:cNvPr id="270" name="Shape 268"/>
           <p:cNvSpPr/>
           <p:nvPr/>
         </p:nvSpPr>
@@ -26912,7 +27192,7 @@
       </p:sp>
       <p:sp>
         <p:nvSpPr>
-          <p:cNvPr id="267" name="Shape 265"/>
+          <p:cNvPr id="271" name="Shape 269"/>
           <p:cNvSpPr/>
           <p:nvPr/>
         </p:nvSpPr>
@@ -26932,7 +27212,7 @@
       </p:sp>
       <p:sp>
         <p:nvSpPr>
-          <p:cNvPr id="268" name="Shape 266"/>
+          <p:cNvPr id="272" name="Shape 270"/>
           <p:cNvSpPr/>
           <p:nvPr/>
         </p:nvSpPr>
@@ -26952,7 +27232,7 @@
       </p:sp>
       <p:sp>
         <p:nvSpPr>
-          <p:cNvPr id="269" name="Shape 267"/>
+          <p:cNvPr id="273" name="Shape 271"/>
           <p:cNvSpPr/>
           <p:nvPr/>
         </p:nvSpPr>
@@ -26972,7 +27252,7 @@
       </p:sp>
       <p:sp>
         <p:nvSpPr>
-          <p:cNvPr id="270" name="Shape 268"/>
+          <p:cNvPr id="274" name="Shape 272"/>
           <p:cNvSpPr/>
           <p:nvPr/>
         </p:nvSpPr>
@@ -26992,7 +27272,7 @@
       </p:sp>
       <p:sp>
         <p:nvSpPr>
-          <p:cNvPr id="271" name="Shape 269"/>
+          <p:cNvPr id="275" name="Shape 273"/>
           <p:cNvSpPr/>
           <p:nvPr/>
         </p:nvSpPr>
@@ -27012,7 +27292,7 @@
       </p:sp>
       <p:sp>
         <p:nvSpPr>
-          <p:cNvPr id="272" name="Shape 270"/>
+          <p:cNvPr id="276" name="Shape 274"/>
           <p:cNvSpPr/>
           <p:nvPr/>
         </p:nvSpPr>
@@ -27032,7 +27312,7 @@
       </p:sp>
       <p:sp>
         <p:nvSpPr>
-          <p:cNvPr id="273" name="Shape 271"/>
+          <p:cNvPr id="277" name="Shape 275"/>
           <p:cNvSpPr/>
           <p:nvPr/>
         </p:nvSpPr>
@@ -27052,7 +27332,7 @@
       </p:sp>
       <p:sp>
         <p:nvSpPr>
-          <p:cNvPr id="274" name="Shape 272"/>
+          <p:cNvPr id="278" name="Shape 276"/>
           <p:cNvSpPr/>
           <p:nvPr/>
         </p:nvSpPr>
@@ -27072,7 +27352,7 @@
       </p:sp>
       <p:sp>
         <p:nvSpPr>
-          <p:cNvPr id="275" name="Shape 273"/>
+          <p:cNvPr id="279" name="Shape 277"/>
           <p:cNvSpPr/>
           <p:nvPr/>
         </p:nvSpPr>
@@ -27092,7 +27372,7 @@
       </p:sp>
       <p:sp>
         <p:nvSpPr>
-          <p:cNvPr id="276" name="Shape 274"/>
+          <p:cNvPr id="280" name="Shape 278"/>
           <p:cNvSpPr/>
           <p:nvPr/>
         </p:nvSpPr>
@@ -27112,7 +27392,7 @@
       </p:sp>
       <p:sp>
         <p:nvSpPr>
-          <p:cNvPr id="277" name="Shape 275"/>
+          <p:cNvPr id="281" name="Shape 279"/>
           <p:cNvSpPr/>
           <p:nvPr/>
         </p:nvSpPr>
@@ -27132,7 +27412,7 @@
       </p:sp>
       <p:sp>
         <p:nvSpPr>
-          <p:cNvPr id="278" name="Shape 276"/>
+          <p:cNvPr id="282" name="Shape 280"/>
           <p:cNvSpPr/>
           <p:nvPr/>
         </p:nvSpPr>
@@ -27152,7 +27432,7 @@
       </p:sp>
       <p:sp>
         <p:nvSpPr>
-          <p:cNvPr id="279" name="Shape 277"/>
+          <p:cNvPr id="283" name="Shape 281"/>
           <p:cNvSpPr/>
           <p:nvPr/>
         </p:nvSpPr>
@@ -27172,7 +27452,7 @@
       </p:sp>
       <p:sp>
         <p:nvSpPr>
-          <p:cNvPr id="280" name="Shape 278"/>
+          <p:cNvPr id="284" name="Shape 282"/>
           <p:cNvSpPr/>
           <p:nvPr/>
         </p:nvSpPr>
@@ -27192,7 +27472,7 @@
       </p:sp>
       <p:sp>
         <p:nvSpPr>
-          <p:cNvPr id="281" name="Shape 279"/>
+          <p:cNvPr id="285" name="Shape 283"/>
           <p:cNvSpPr/>
           <p:nvPr/>
         </p:nvSpPr>
@@ -27212,7 +27492,7 @@
       </p:sp>
       <p:sp>
         <p:nvSpPr>
-          <p:cNvPr id="282" name="Shape 280"/>
+          <p:cNvPr id="286" name="Shape 284"/>
           <p:cNvSpPr/>
           <p:nvPr/>
         </p:nvSpPr>
@@ -27232,7 +27512,7 @@
       </p:sp>
       <p:sp>
         <p:nvSpPr>
-          <p:cNvPr id="283" name="Shape 281"/>
+          <p:cNvPr id="287" name="Shape 285"/>
           <p:cNvSpPr/>
           <p:nvPr/>
         </p:nvSpPr>
@@ -27252,7 +27532,7 @@
       </p:sp>
       <p:sp>
         <p:nvSpPr>
-          <p:cNvPr id="284" name="Shape 282"/>
+          <p:cNvPr id="288" name="Shape 286"/>
           <p:cNvSpPr/>
           <p:nvPr/>
         </p:nvSpPr>
@@ -27272,7 +27552,7 @@
       </p:sp>
       <p:sp>
         <p:nvSpPr>
-          <p:cNvPr id="285" name="Shape 283"/>
+          <p:cNvPr id="289" name="Shape 287"/>
           <p:cNvSpPr/>
           <p:nvPr/>
         </p:nvSpPr>
@@ -27292,7 +27572,7 @@
       </p:sp>
       <p:sp>
         <p:nvSpPr>
-          <p:cNvPr id="286" name="Shape 284"/>
+          <p:cNvPr id="290" name="Shape 288"/>
           <p:cNvSpPr/>
           <p:nvPr/>
         </p:nvSpPr>
@@ -27312,7 +27592,7 @@
       </p:sp>
       <p:sp>
         <p:nvSpPr>
-          <p:cNvPr id="287" name="Shape 285"/>
+          <p:cNvPr id="291" name="Shape 289"/>
           <p:cNvSpPr/>
           <p:nvPr/>
         </p:nvSpPr>
@@ -27332,7 +27612,7 @@
       </p:sp>
       <p:sp>
         <p:nvSpPr>
-          <p:cNvPr id="288" name="Shape 286"/>
+          <p:cNvPr id="292" name="Shape 290"/>
           <p:cNvSpPr/>
           <p:nvPr/>
         </p:nvSpPr>
@@ -27352,7 +27632,7 @@
       </p:sp>
       <p:sp>
         <p:nvSpPr>
-          <p:cNvPr id="289" name="Shape 287"/>
+          <p:cNvPr id="293" name="Shape 291"/>
           <p:cNvSpPr/>
           <p:nvPr/>
         </p:nvSpPr>
@@ -27372,7 +27652,7 @@
       </p:sp>
       <p:sp>
         <p:nvSpPr>
-          <p:cNvPr id="290" name="Shape 288"/>
+          <p:cNvPr id="294" name="Shape 292"/>
           <p:cNvSpPr/>
           <p:nvPr/>
         </p:nvSpPr>
@@ -27392,7 +27672,7 @@
       </p:sp>
       <p:sp>
         <p:nvSpPr>
-          <p:cNvPr id="291" name="Shape 289"/>
+          <p:cNvPr id="295" name="Shape 293"/>
           <p:cNvSpPr/>
           <p:nvPr/>
         </p:nvSpPr>
@@ -27412,7 +27692,7 @@
       </p:sp>
       <p:sp>
         <p:nvSpPr>
-          <p:cNvPr id="292" name="Shape 290"/>
+          <p:cNvPr id="296" name="Shape 294"/>
           <p:cNvSpPr/>
           <p:nvPr/>
         </p:nvSpPr>
@@ -27432,7 +27712,7 @@
       </p:sp>
       <p:sp>
         <p:nvSpPr>
-          <p:cNvPr id="293" name="Shape 291"/>
+          <p:cNvPr id="297" name="Shape 295"/>
           <p:cNvSpPr/>
           <p:nvPr/>
         </p:nvSpPr>
@@ -27452,7 +27732,7 @@
       </p:sp>
       <p:sp>
         <p:nvSpPr>
-          <p:cNvPr id="294" name="Shape 292"/>
+          <p:cNvPr id="298" name="Shape 296"/>
           <p:cNvSpPr/>
           <p:nvPr/>
         </p:nvSpPr>
@@ -27472,7 +27752,7 @@
       </p:sp>
       <p:sp>
         <p:nvSpPr>
-          <p:cNvPr id="295" name="Shape 293"/>
+          <p:cNvPr id="299" name="Shape 297"/>
           <p:cNvSpPr/>
           <p:nvPr/>
         </p:nvSpPr>
@@ -27492,7 +27772,7 @@
       </p:sp>
       <p:sp>
         <p:nvSpPr>
-          <p:cNvPr id="296" name="Shape 294"/>
+          <p:cNvPr id="300" name="Shape 298"/>
           <p:cNvSpPr/>
           <p:nvPr/>
         </p:nvSpPr>
@@ -27512,7 +27792,7 @@
       </p:sp>
       <p:sp>
         <p:nvSpPr>
-          <p:cNvPr id="297" name="Shape 295"/>
+          <p:cNvPr id="301" name="Shape 299"/>
           <p:cNvSpPr/>
           <p:nvPr/>
         </p:nvSpPr>
@@ -27532,7 +27812,7 @@
       </p:sp>
       <p:sp>
         <p:nvSpPr>
-          <p:cNvPr id="298" name="Shape 296"/>
+          <p:cNvPr id="302" name="Shape 300"/>
           <p:cNvSpPr/>
           <p:nvPr/>
         </p:nvSpPr>
@@ -27552,7 +27832,7 @@
       </p:sp>
       <p:sp>
         <p:nvSpPr>
-          <p:cNvPr id="299" name="Shape 297"/>
+          <p:cNvPr id="303" name="Shape 301"/>
           <p:cNvSpPr/>
           <p:nvPr/>
         </p:nvSpPr>
@@ -27572,7 +27852,7 @@
       </p:sp>
       <p:sp>
         <p:nvSpPr>
-          <p:cNvPr id="300" name="Shape 298"/>
+          <p:cNvPr id="304" name="Shape 302"/>
           <p:cNvSpPr/>
           <p:nvPr/>
         </p:nvSpPr>
@@ -27592,7 +27872,7 @@
       </p:sp>
       <p:sp>
         <p:nvSpPr>
-          <p:cNvPr id="301" name="Shape 299"/>
+          <p:cNvPr id="305" name="Shape 303"/>
           <p:cNvSpPr/>
           <p:nvPr/>
         </p:nvSpPr>
@@ -27612,7 +27892,7 @@
       </p:sp>
       <p:sp>
         <p:nvSpPr>
-          <p:cNvPr id="302" name="Shape 300"/>
+          <p:cNvPr id="306" name="Shape 304"/>
           <p:cNvSpPr/>
           <p:nvPr/>
         </p:nvSpPr>
@@ -27632,7 +27912,7 @@
       </p:sp>
       <p:sp>
         <p:nvSpPr>
-          <p:cNvPr id="303" name="Shape 301"/>
+          <p:cNvPr id="307" name="Shape 305"/>
           <p:cNvSpPr/>
           <p:nvPr/>
         </p:nvSpPr>
@@ -27652,7 +27932,7 @@
       </p:sp>
       <p:sp>
         <p:nvSpPr>
-          <p:cNvPr id="304" name="Shape 302"/>
+          <p:cNvPr id="308" name="Shape 306"/>
           <p:cNvSpPr/>
           <p:nvPr/>
         </p:nvSpPr>
@@ -27672,7 +27952,7 @@
       </p:sp>
       <p:sp>
         <p:nvSpPr>
-          <p:cNvPr id="305" name="Shape 303"/>
+          <p:cNvPr id="309" name="Shape 307"/>
           <p:cNvSpPr/>
           <p:nvPr/>
         </p:nvSpPr>
@@ -27692,7 +27972,7 @@
       </p:sp>
       <p:sp>
         <p:nvSpPr>
-          <p:cNvPr id="306" name="Shape 304"/>
+          <p:cNvPr id="310" name="Shape 308"/>
           <p:cNvSpPr/>
           <p:nvPr/>
         </p:nvSpPr>
@@ -27712,7 +27992,7 @@
       </p:sp>
       <p:sp>
         <p:nvSpPr>
-          <p:cNvPr id="307" name="Shape 305"/>
+          <p:cNvPr id="311" name="Shape 309"/>
           <p:cNvSpPr/>
           <p:nvPr/>
         </p:nvSpPr>
@@ -27732,7 +28012,7 @@
       </p:sp>
       <p:sp>
         <p:nvSpPr>
-          <p:cNvPr id="308" name="Shape 306"/>
+          <p:cNvPr id="312" name="Shape 310"/>
           <p:cNvSpPr/>
           <p:nvPr/>
         </p:nvSpPr>
@@ -27752,7 +28032,7 @@
       </p:sp>
       <p:sp>
         <p:nvSpPr>
-          <p:cNvPr id="309" name="Shape 307"/>
+          <p:cNvPr id="313" name="Shape 311"/>
           <p:cNvSpPr/>
           <p:nvPr/>
         </p:nvSpPr>
@@ -27772,7 +28052,7 @@
       </p:sp>
       <p:sp>
         <p:nvSpPr>
-          <p:cNvPr id="310" name="Shape 308"/>
+          <p:cNvPr id="314" name="Shape 312"/>
           <p:cNvSpPr/>
           <p:nvPr/>
         </p:nvSpPr>
@@ -27792,7 +28072,7 @@
       </p:sp>
       <p:sp>
         <p:nvSpPr>
-          <p:cNvPr id="311" name="Shape 309"/>
+          <p:cNvPr id="315" name="Shape 313"/>
           <p:cNvSpPr/>
           <p:nvPr/>
         </p:nvSpPr>
@@ -27812,7 +28092,7 @@
       </p:sp>
       <p:sp>
         <p:nvSpPr>
-          <p:cNvPr id="312" name="Shape 310"/>
+          <p:cNvPr id="316" name="Shape 314"/>
           <p:cNvSpPr/>
           <p:nvPr/>
         </p:nvSpPr>
@@ -27832,7 +28112,7 @@
       </p:sp>
       <p:sp>
         <p:nvSpPr>
-          <p:cNvPr id="313" name="Shape 311"/>
+          <p:cNvPr id="317" name="Shape 315"/>
           <p:cNvSpPr/>
           <p:nvPr/>
         </p:nvSpPr>
@@ -27852,7 +28132,7 @@
       </p:sp>
       <p:sp>
         <p:nvSpPr>
-          <p:cNvPr id="314" name="Shape 312"/>
+          <p:cNvPr id="318" name="Shape 316"/>
           <p:cNvSpPr/>
           <p:nvPr/>
         </p:nvSpPr>
@@ -27872,7 +28152,7 @@
       </p:sp>
       <p:sp>
         <p:nvSpPr>
-          <p:cNvPr id="315" name="Shape 313"/>
+          <p:cNvPr id="319" name="Shape 317"/>
           <p:cNvSpPr/>
           <p:nvPr/>
         </p:nvSpPr>
@@ -27892,7 +28172,7 @@
       </p:sp>
       <p:sp>
         <p:nvSpPr>
-          <p:cNvPr id="316" name="Shape 314"/>
+          <p:cNvPr id="320" name="Shape 318"/>
           <p:cNvSpPr/>
           <p:nvPr/>
         </p:nvSpPr>
@@ -27912,7 +28192,7 @@
       </p:sp>
       <p:sp>
         <p:nvSpPr>
-          <p:cNvPr id="317" name="Shape 315"/>
+          <p:cNvPr id="321" name="Shape 319"/>
           <p:cNvSpPr/>
           <p:nvPr/>
         </p:nvSpPr>
@@ -27932,7 +28212,7 @@
       </p:sp>
       <p:sp>
         <p:nvSpPr>
-          <p:cNvPr id="318" name="Shape 316"/>
+          <p:cNvPr id="322" name="Shape 320"/>
           <p:cNvSpPr/>
           <p:nvPr/>
         </p:nvSpPr>
@@ -27952,7 +28232,7 @@
       </p:sp>
       <p:sp>
         <p:nvSpPr>
-          <p:cNvPr id="319" name="Shape 317"/>
+          <p:cNvPr id="323" name="Shape 321"/>
           <p:cNvSpPr/>
           <p:nvPr/>
         </p:nvSpPr>
@@ -27972,7 +28252,7 @@
       </p:sp>
       <p:sp>
         <p:nvSpPr>
-          <p:cNvPr id="320" name="Shape 318"/>
+          <p:cNvPr id="324" name="Shape 322"/>
           <p:cNvSpPr/>
           <p:nvPr/>
         </p:nvSpPr>
@@ -27992,7 +28272,7 @@
       </p:sp>
       <p:sp>
         <p:nvSpPr>
-          <p:cNvPr id="321" name="Shape 319"/>
+          <p:cNvPr id="325" name="Shape 323"/>
           <p:cNvSpPr/>
           <p:nvPr/>
         </p:nvSpPr>
@@ -28012,7 +28292,7 @@
       </p:sp>
       <p:sp>
         <p:nvSpPr>
-          <p:cNvPr id="322" name="Shape 320"/>
+          <p:cNvPr id="326" name="Shape 324"/>
           <p:cNvSpPr/>
           <p:nvPr/>
         </p:nvSpPr>
@@ -28032,7 +28312,7 @@
       </p:sp>
       <p:sp>
         <p:nvSpPr>
-          <p:cNvPr id="323" name="Shape 321"/>
+          <p:cNvPr id="327" name="Shape 325"/>
           <p:cNvSpPr/>
           <p:nvPr/>
         </p:nvSpPr>
@@ -28052,7 +28332,7 @@
       </p:sp>
       <p:sp>
         <p:nvSpPr>
-          <p:cNvPr id="324" name="Shape 322"/>
+          <p:cNvPr id="328" name="Shape 326"/>
           <p:cNvSpPr/>
           <p:nvPr/>
         </p:nvSpPr>
@@ -28072,7 +28352,7 @@
       </p:sp>
       <p:sp>
         <p:nvSpPr>
-          <p:cNvPr id="325" name="Shape 323"/>
+          <p:cNvPr id="329" name="Shape 327"/>
           <p:cNvSpPr/>
           <p:nvPr/>
         </p:nvSpPr>
@@ -28092,7 +28372,7 @@
       </p:sp>
       <p:sp>
         <p:nvSpPr>
-          <p:cNvPr id="326" name="Shape 324"/>
+          <p:cNvPr id="330" name="Shape 328"/>
           <p:cNvSpPr/>
           <p:nvPr/>
         </p:nvSpPr>
@@ -28112,7 +28392,7 @@
       </p:sp>
       <p:sp>
         <p:nvSpPr>
-          <p:cNvPr id="327" name="Shape 325"/>
+          <p:cNvPr id="331" name="Shape 329"/>
           <p:cNvSpPr/>
           <p:nvPr/>
         </p:nvSpPr>
@@ -28132,7 +28412,7 @@
       </p:sp>
       <p:sp>
         <p:nvSpPr>
-          <p:cNvPr id="328" name="Shape 326"/>
+          <p:cNvPr id="332" name="Shape 330"/>
           <p:cNvSpPr/>
           <p:nvPr/>
         </p:nvSpPr>
@@ -28152,7 +28432,7 @@
       </p:sp>
       <p:sp>
         <p:nvSpPr>
-          <p:cNvPr id="329" name="Shape 327"/>
+          <p:cNvPr id="333" name="Shape 331"/>
           <p:cNvSpPr/>
           <p:nvPr/>
         </p:nvSpPr>
@@ -28172,7 +28452,7 @@
       </p:sp>
       <p:sp>
         <p:nvSpPr>
-          <p:cNvPr id="330" name="Shape 328"/>
+          <p:cNvPr id="334" name="Shape 332"/>
           <p:cNvSpPr/>
           <p:nvPr/>
         </p:nvSpPr>
@@ -28192,7 +28472,7 @@
       </p:sp>
       <p:sp>
         <p:nvSpPr>
-          <p:cNvPr id="331" name="Shape 329"/>
+          <p:cNvPr id="335" name="Shape 333"/>
           <p:cNvSpPr/>
           <p:nvPr/>
         </p:nvSpPr>
@@ -28212,7 +28492,7 @@
       </p:sp>
       <p:sp>
         <p:nvSpPr>
-          <p:cNvPr id="332" name="Shape 330"/>
+          <p:cNvPr id="336" name="Shape 334"/>
           <p:cNvSpPr/>
           <p:nvPr/>
         </p:nvSpPr>
@@ -28232,7 +28512,7 @@
       </p:sp>
       <p:sp>
         <p:nvSpPr>
-          <p:cNvPr id="333" name="Shape 331"/>
+          <p:cNvPr id="337" name="Shape 335"/>
           <p:cNvSpPr/>
           <p:nvPr/>
         </p:nvSpPr>
@@ -28252,7 +28532,7 @@
       </p:sp>
       <p:sp>
         <p:nvSpPr>
-          <p:cNvPr id="334" name="Shape 332"/>
+          <p:cNvPr id="338" name="Shape 336"/>
           <p:cNvSpPr/>
           <p:nvPr/>
         </p:nvSpPr>
@@ -28272,7 +28552,7 @@
       </p:sp>
       <p:sp>
         <p:nvSpPr>
-          <p:cNvPr id="335" name="Shape 333"/>
+          <p:cNvPr id="339" name="Shape 337"/>
           <p:cNvSpPr/>
           <p:nvPr/>
         </p:nvSpPr>
@@ -28292,7 +28572,7 @@
       </p:sp>
       <p:sp>
         <p:nvSpPr>
-          <p:cNvPr id="336" name="Shape 334"/>
+          <p:cNvPr id="340" name="Shape 338"/>
           <p:cNvSpPr/>
           <p:nvPr/>
         </p:nvSpPr>
@@ -28312,7 +28592,7 @@
       </p:sp>
       <p:sp>
         <p:nvSpPr>
-          <p:cNvPr id="337" name="Shape 335"/>
+          <p:cNvPr id="341" name="Shape 339"/>
           <p:cNvSpPr/>
           <p:nvPr/>
         </p:nvSpPr>
@@ -28332,7 +28612,7 @@
       </p:sp>
       <p:sp>
         <p:nvSpPr>
-          <p:cNvPr id="338" name="Shape 336"/>
+          <p:cNvPr id="342" name="Shape 340"/>
           <p:cNvSpPr/>
           <p:nvPr/>
         </p:nvSpPr>
@@ -28352,7 +28632,7 @@
       </p:sp>
       <p:sp>
         <p:nvSpPr>
-          <p:cNvPr id="339" name="Shape 337"/>
+          <p:cNvPr id="343" name="Shape 341"/>
           <p:cNvSpPr/>
           <p:nvPr/>
         </p:nvSpPr>
@@ -28372,7 +28652,7 @@
       </p:sp>
       <p:sp>
         <p:nvSpPr>
-          <p:cNvPr id="340" name="Shape 338"/>
+          <p:cNvPr id="344" name="Shape 342"/>
           <p:cNvSpPr/>
           <p:nvPr/>
         </p:nvSpPr>
@@ -28392,7 +28672,7 @@
       </p:sp>
       <p:sp>
         <p:nvSpPr>
-          <p:cNvPr id="341" name="Shape 339"/>
+          <p:cNvPr id="345" name="Shape 343"/>
           <p:cNvSpPr/>
           <p:nvPr/>
         </p:nvSpPr>
@@ -28412,7 +28692,7 @@
       </p:sp>
       <p:sp>
         <p:nvSpPr>
-          <p:cNvPr id="342" name="Shape 340"/>
+          <p:cNvPr id="346" name="Shape 344"/>
           <p:cNvSpPr/>
           <p:nvPr/>
         </p:nvSpPr>
@@ -28432,7 +28712,7 @@
       </p:sp>
       <p:sp>
         <p:nvSpPr>
-          <p:cNvPr id="343" name="Shape 341"/>
+          <p:cNvPr id="347" name="Shape 345"/>
           <p:cNvSpPr/>
           <p:nvPr/>
         </p:nvSpPr>
@@ -28452,7 +28732,7 @@
       </p:sp>
       <p:sp>
         <p:nvSpPr>
-          <p:cNvPr id="344" name="Shape 342"/>
+          <p:cNvPr id="348" name="Shape 346"/>
           <p:cNvSpPr/>
           <p:nvPr/>
         </p:nvSpPr>
@@ -28472,7 +28752,7 @@
       </p:sp>
       <p:sp>
         <p:nvSpPr>
-          <p:cNvPr id="345" name="Shape 343"/>
+          <p:cNvPr id="349" name="Shape 347"/>
           <p:cNvSpPr/>
           <p:nvPr/>
         </p:nvSpPr>
@@ -28492,7 +28772,7 @@
       </p:sp>
       <p:sp>
         <p:nvSpPr>
-          <p:cNvPr id="346" name="Shape 344"/>
+          <p:cNvPr id="350" name="Shape 348"/>
           <p:cNvSpPr/>
           <p:nvPr/>
         </p:nvSpPr>
@@ -28512,7 +28792,7 @@
       </p:sp>
       <p:sp>
         <p:nvSpPr>
-          <p:cNvPr id="347" name="Shape 345"/>
+          <p:cNvPr id="351" name="Shape 349"/>
           <p:cNvSpPr/>
           <p:nvPr/>
         </p:nvSpPr>
@@ -28532,7 +28812,7 @@
       </p:sp>
       <p:sp>
         <p:nvSpPr>
-          <p:cNvPr id="348" name="Shape 346"/>
+          <p:cNvPr id="352" name="Shape 350"/>
           <p:cNvSpPr/>
           <p:nvPr/>
         </p:nvSpPr>
@@ -28552,7 +28832,7 @@
       </p:sp>
       <p:sp>
         <p:nvSpPr>
-          <p:cNvPr id="349" name="Shape 347"/>
+          <p:cNvPr id="353" name="Shape 351"/>
           <p:cNvSpPr/>
           <p:nvPr/>
         </p:nvSpPr>
@@ -28572,7 +28852,7 @@
       </p:sp>
       <p:sp>
         <p:nvSpPr>
-          <p:cNvPr id="350" name="Shape 348"/>
+          <p:cNvPr id="354" name="Shape 352"/>
           <p:cNvSpPr/>
           <p:nvPr/>
         </p:nvSpPr>
@@ -28592,7 +28872,7 @@
       </p:sp>
       <p:sp>
         <p:nvSpPr>
-          <p:cNvPr id="351" name="Shape 349"/>
+          <p:cNvPr id="355" name="Shape 353"/>
           <p:cNvSpPr/>
           <p:nvPr/>
         </p:nvSpPr>
@@ -28612,7 +28892,7 @@
       </p:sp>
       <p:sp>
         <p:nvSpPr>
-          <p:cNvPr id="352" name="Shape 350"/>
+          <p:cNvPr id="356" name="Shape 354"/>
           <p:cNvSpPr/>
           <p:nvPr/>
         </p:nvSpPr>
@@ -28632,7 +28912,7 @@
       </p:sp>
       <p:sp>
         <p:nvSpPr>
-          <p:cNvPr id="353" name="Text 351"/>
+          <p:cNvPr id="357" name="Text 355"/>
           <p:cNvSpPr txBox="1"/>
           <p:nvPr/>
         </p:nvSpPr>
@@ -28671,7 +28951,7 @@
       </p:sp>
       <p:sp>
         <p:nvSpPr>
-          <p:cNvPr id="354" name="Text 352"/>
+          <p:cNvPr id="358" name="Text 356"/>
           <p:cNvSpPr txBox="1"/>
           <p:nvPr/>
         </p:nvSpPr>
@@ -28710,7 +28990,7 @@
       </p:sp>
       <p:sp>
         <p:nvSpPr>
-          <p:cNvPr id="355" name="Shape 353"/>
+          <p:cNvPr id="359" name="Shape 357"/>
           <p:cNvSpPr/>
           <p:nvPr/>
         </p:nvSpPr>
@@ -28737,7 +29017,7 @@
       </p:sp>
       <p:sp>
         <p:nvSpPr>
-          <p:cNvPr id="356" name="Shape 354"/>
+          <p:cNvPr id="360" name="Shape 358"/>
           <p:cNvSpPr/>
           <p:nvPr/>
         </p:nvSpPr>
@@ -28757,7 +29037,7 @@
       </p:sp>
       <p:sp>
         <p:nvSpPr>
-          <p:cNvPr id="357" name="Shape 355"/>
+          <p:cNvPr id="361" name="Shape 359"/>
           <p:cNvSpPr/>
           <p:nvPr/>
         </p:nvSpPr>
@@ -28777,7 +29057,7 @@
       </p:sp>
       <p:sp>
         <p:nvSpPr>
-          <p:cNvPr id="358" name="Shape 356"/>
+          <p:cNvPr id="362" name="Shape 360"/>
           <p:cNvSpPr/>
           <p:nvPr/>
         </p:nvSpPr>
@@ -28797,7 +29077,7 @@
       </p:sp>
       <p:sp>
         <p:nvSpPr>
-          <p:cNvPr id="359" name="Shape 357"/>
+          <p:cNvPr id="363" name="Shape 361"/>
           <p:cNvSpPr/>
           <p:nvPr/>
         </p:nvSpPr>
@@ -28817,7 +29097,7 @@
       </p:sp>
       <p:sp>
         <p:nvSpPr>
-          <p:cNvPr id="360" name="Shape 358"/>
+          <p:cNvPr id="364" name="Shape 362"/>
           <p:cNvSpPr/>
           <p:nvPr/>
         </p:nvSpPr>
@@ -28837,7 +29117,7 @@
       </p:sp>
       <p:sp>
         <p:nvSpPr>
-          <p:cNvPr id="361" name="Shape 359"/>
+          <p:cNvPr id="365" name="Shape 363"/>
           <p:cNvSpPr/>
           <p:nvPr/>
         </p:nvSpPr>
@@ -28857,7 +29137,7 @@
       </p:sp>
       <p:sp>
         <p:nvSpPr>
-          <p:cNvPr id="362" name="Shape 360"/>
+          <p:cNvPr id="366" name="Shape 364"/>
           <p:cNvSpPr/>
           <p:nvPr/>
         </p:nvSpPr>
@@ -28877,7 +29157,7 @@
       </p:sp>
       <p:sp>
         <p:nvSpPr>
-          <p:cNvPr id="363" name="Shape 361"/>
+          <p:cNvPr id="367" name="Shape 365"/>
           <p:cNvSpPr/>
           <p:nvPr/>
         </p:nvSpPr>
@@ -28897,7 +29177,7 @@
       </p:sp>
       <p:sp>
         <p:nvSpPr>
-          <p:cNvPr id="364" name="Shape 362"/>
+          <p:cNvPr id="368" name="Shape 366"/>
           <p:cNvSpPr/>
           <p:nvPr/>
         </p:nvSpPr>
@@ -28917,7 +29197,7 @@
       </p:sp>
       <p:sp>
         <p:nvSpPr>
-          <p:cNvPr id="365" name="Shape 363"/>
+          <p:cNvPr id="369" name="Shape 367"/>
           <p:cNvSpPr/>
           <p:nvPr/>
         </p:nvSpPr>
@@ -28937,7 +29217,7 @@
       </p:sp>
       <p:sp>
         <p:nvSpPr>
-          <p:cNvPr id="366" name="Shape 364"/>
+          <p:cNvPr id="370" name="Shape 368"/>
           <p:cNvSpPr/>
           <p:nvPr/>
         </p:nvSpPr>
@@ -28957,7 +29237,7 @@
       </p:sp>
       <p:sp>
         <p:nvSpPr>
-          <p:cNvPr id="367" name="Shape 365"/>
+          <p:cNvPr id="371" name="Shape 369"/>
           <p:cNvSpPr/>
           <p:nvPr/>
         </p:nvSpPr>
@@ -28977,7 +29257,7 @@
       </p:sp>
       <p:sp>
         <p:nvSpPr>
-          <p:cNvPr id="368" name="Shape 366"/>
+          <p:cNvPr id="372" name="Shape 370"/>
           <p:cNvSpPr/>
           <p:nvPr/>
         </p:nvSpPr>
@@ -28997,7 +29277,7 @@
       </p:sp>
       <p:sp>
         <p:nvSpPr>
-          <p:cNvPr id="369" name="Shape 367"/>
+          <p:cNvPr id="373" name="Shape 371"/>
           <p:cNvSpPr/>
           <p:nvPr/>
         </p:nvSpPr>
@@ -29017,7 +29297,7 @@
       </p:sp>
       <p:sp>
         <p:nvSpPr>
-          <p:cNvPr id="370" name="Shape 368"/>
+          <p:cNvPr id="374" name="Shape 372"/>
           <p:cNvSpPr/>
           <p:nvPr/>
         </p:nvSpPr>
@@ -29037,7 +29317,7 @@
       </p:sp>
       <p:sp>
         <p:nvSpPr>
-          <p:cNvPr id="371" name="Text 369"/>
+          <p:cNvPr id="375" name="Text 373"/>
           <p:cNvSpPr txBox="1"/>
           <p:nvPr/>
         </p:nvSpPr>
@@ -29076,7 +29356,7 @@
       </p:sp>
       <p:sp>
         <p:nvSpPr>
-          <p:cNvPr id="372" name="Text 370"/>
+          <p:cNvPr id="376" name="Text 374"/>
           <p:cNvSpPr txBox="1"/>
           <p:nvPr/>
         </p:nvSpPr>
@@ -29138,7 +29418,7 @@
       </p:sp>
       <p:sp>
         <p:nvSpPr>
-          <p:cNvPr id="373" name="Shape 371"/>
+          <p:cNvPr id="377" name="Shape 375"/>
           <p:cNvSpPr/>
           <p:nvPr/>
         </p:nvSpPr>
@@ -29165,7 +29445,7 @@
       </p:sp>
       <p:sp>
         <p:nvSpPr>
-          <p:cNvPr id="374" name="Text 372"/>
+          <p:cNvPr id="378" name="Text 376"/>
           <p:cNvSpPr txBox="1"/>
           <p:nvPr/>
         </p:nvSpPr>
@@ -29227,7 +29507,7 @@
       </p:sp>
       <p:pic>
         <p:nvPicPr>
-          <p:cNvPr id="376" name="Image 0" descr="/Users/tsengchenghsun/Class/carClass/Claude outputs/第三週(9-24)/src/logo.png">    </p:cNvPr>
+          <p:cNvPr id="380" name="Image 0" descr="/Users/tsengchenghsun/Class/carClass/Claude outputs/第三週(9-24)/src/logo.png">    </p:cNvPr>
           <p:cNvPicPr>
             <a:picLocks noChangeAspect="1"/>
           </p:cNvPicPr>
@@ -29251,7 +29531,7 @@
       </p:pic>
       <p:sp>
         <p:nvSpPr>
-          <p:cNvPr id="377" name="Text 373"/>
+          <p:cNvPr id="381" name="Text 377"/>
           <p:cNvSpPr txBox="1"/>
           <p:nvPr/>
         </p:nvSpPr>
@@ -29290,7 +29570,7 @@
       </p:sp>
       <p:sp>
         <p:nvSpPr>
-          <p:cNvPr id="378" name="Text 374"/>
+          <p:cNvPr id="382" name="Text 378"/>
           <p:cNvSpPr txBox="1"/>
           <p:nvPr/>
         </p:nvSpPr>

--- a/第三週(09-24)/第三週_第2節_簡報.pptx
+++ b/第三週(09-24)/第三週_第2節_簡報.pptx
@@ -11489,7 +11489,7 @@
         <p:spPr>
           <a:xfrm>
             <a:off x="502920" y="676656"/>
-            <a:ext cx="8138160" cy="713232"/>
+            <a:ext cx="8138160" cy="560684"/>
           </a:xfrm>
           <a:prstGeom prst="rect">
             <a:avLst/>
@@ -11550,12 +11550,12 @@
         </p:nvSpPr>
         <p:spPr>
           <a:xfrm>
-            <a:off x="502920" y="1243584"/>
-            <a:ext cx="3904488" cy="2578608"/>
+            <a:off x="502920" y="1255628"/>
+            <a:ext cx="3904488" cy="2566564"/>
           </a:xfrm>
           <a:prstGeom prst="roundRect">
             <a:avLst>
-              <a:gd name="adj" fmla="val 3546"/>
+              <a:gd name="adj" fmla="val 3563"/>
             </a:avLst>
           </a:prstGeom>
           <a:solidFill>
@@ -11577,7 +11577,7 @@
         </p:nvSpPr>
         <p:spPr>
           <a:xfrm>
-            <a:off x="948781" y="1626535"/>
+            <a:off x="948781" y="1638579"/>
             <a:ext cx="168981" cy="96012"/>
           </a:xfrm>
           <a:prstGeom prst="roundRect">
@@ -11599,7 +11599,7 @@
         </p:nvSpPr>
         <p:spPr>
           <a:xfrm>
-            <a:off x="987186" y="1607332"/>
+            <a:off x="987186" y="1619376"/>
             <a:ext cx="49926" cy="23043"/>
           </a:xfrm>
           <a:prstGeom prst="roundRect">
@@ -11621,7 +11621,7 @@
         </p:nvSpPr>
         <p:spPr>
           <a:xfrm>
-            <a:off x="1002548" y="1641897"/>
+            <a:off x="1002548" y="1653941"/>
             <a:ext cx="61448" cy="61448"/>
           </a:xfrm>
           <a:prstGeom prst="ellipse">
@@ -11641,7 +11641,7 @@
         </p:nvSpPr>
         <p:spPr>
           <a:xfrm>
-            <a:off x="1015990" y="1655338"/>
+            <a:off x="1015990" y="1667382"/>
             <a:ext cx="34564" cy="34564"/>
           </a:xfrm>
           <a:prstGeom prst="ellipse">
@@ -11663,7 +11663,7 @@
         </p:nvSpPr>
         <p:spPr>
           <a:xfrm>
-            <a:off x="1079358" y="1638056"/>
+            <a:off x="1079358" y="1650100"/>
             <a:ext cx="19202" cy="19202"/>
           </a:xfrm>
           <a:prstGeom prst="ellipse">
@@ -11685,7 +11685,7 @@
         </p:nvSpPr>
         <p:spPr>
           <a:xfrm>
-            <a:off x="1232245" y="1626535"/>
+            <a:off x="1232245" y="1638579"/>
             <a:ext cx="168981" cy="96012"/>
           </a:xfrm>
           <a:prstGeom prst="roundRect">
@@ -11707,7 +11707,7 @@
         </p:nvSpPr>
         <p:spPr>
           <a:xfrm>
-            <a:off x="1270650" y="1607332"/>
+            <a:off x="1270650" y="1619376"/>
             <a:ext cx="49926" cy="23043"/>
           </a:xfrm>
           <a:prstGeom prst="roundRect">
@@ -11729,7 +11729,7 @@
         </p:nvSpPr>
         <p:spPr>
           <a:xfrm>
-            <a:off x="1286012" y="1641897"/>
+            <a:off x="1286012" y="1653941"/>
             <a:ext cx="61448" cy="61448"/>
           </a:xfrm>
           <a:prstGeom prst="ellipse">
@@ -11749,7 +11749,7 @@
         </p:nvSpPr>
         <p:spPr>
           <a:xfrm>
-            <a:off x="1299454" y="1655338"/>
+            <a:off x="1299454" y="1667382"/>
             <a:ext cx="34564" cy="34564"/>
           </a:xfrm>
           <a:prstGeom prst="ellipse">
@@ -11771,7 +11771,7 @@
         </p:nvSpPr>
         <p:spPr>
           <a:xfrm>
-            <a:off x="1362822" y="1638056"/>
+            <a:off x="1362822" y="1650100"/>
             <a:ext cx="19202" cy="19202"/>
           </a:xfrm>
           <a:prstGeom prst="ellipse">
@@ -11793,7 +11793,7 @@
         </p:nvSpPr>
         <p:spPr>
           <a:xfrm>
-            <a:off x="1515709" y="1626535"/>
+            <a:off x="1515709" y="1638579"/>
             <a:ext cx="168981" cy="96012"/>
           </a:xfrm>
           <a:prstGeom prst="roundRect">
@@ -11815,7 +11815,7 @@
         </p:nvSpPr>
         <p:spPr>
           <a:xfrm>
-            <a:off x="1554114" y="1607332"/>
+            <a:off x="1554114" y="1619376"/>
             <a:ext cx="49926" cy="23043"/>
           </a:xfrm>
           <a:prstGeom prst="roundRect">
@@ -11837,7 +11837,7 @@
         </p:nvSpPr>
         <p:spPr>
           <a:xfrm>
-            <a:off x="1569476" y="1641897"/>
+            <a:off x="1569476" y="1653941"/>
             <a:ext cx="61448" cy="61448"/>
           </a:xfrm>
           <a:prstGeom prst="ellipse">
@@ -11857,7 +11857,7 @@
         </p:nvSpPr>
         <p:spPr>
           <a:xfrm>
-            <a:off x="1582918" y="1655338"/>
+            <a:off x="1582918" y="1667382"/>
             <a:ext cx="34564" cy="34564"/>
           </a:xfrm>
           <a:prstGeom prst="ellipse">
@@ -11879,7 +11879,7 @@
         </p:nvSpPr>
         <p:spPr>
           <a:xfrm>
-            <a:off x="1646286" y="1638056"/>
+            <a:off x="1646286" y="1650100"/>
             <a:ext cx="19202" cy="19202"/>
           </a:xfrm>
           <a:prstGeom prst="ellipse">
@@ -11901,7 +11901,7 @@
         </p:nvSpPr>
         <p:spPr>
           <a:xfrm>
-            <a:off x="941832" y="1792224"/>
+            <a:off x="941832" y="1804268"/>
             <a:ext cx="713232" cy="237744"/>
           </a:xfrm>
           <a:prstGeom prst="roundRect">
@@ -11928,7 +11928,7 @@
         </p:nvSpPr>
         <p:spPr>
           <a:xfrm>
-            <a:off x="630936" y="2011680"/>
+            <a:off x="630936" y="2023724"/>
             <a:ext cx="1371600" cy="347472"/>
           </a:xfrm>
           <a:prstGeom prst="roundRect">
@@ -11955,7 +11955,7 @@
         </p:nvSpPr>
         <p:spPr>
           <a:xfrm>
-            <a:off x="841248" y="2258568"/>
+            <a:off x="841248" y="2270612"/>
             <a:ext cx="201168" cy="201168"/>
           </a:xfrm>
           <a:prstGeom prst="ellipse">
@@ -11975,7 +11975,7 @@
         </p:nvSpPr>
         <p:spPr>
           <a:xfrm>
-            <a:off x="1591056" y="2258568"/>
+            <a:off x="1591056" y="2270612"/>
             <a:ext cx="201168" cy="201168"/>
           </a:xfrm>
           <a:prstGeom prst="ellipse">
@@ -11995,7 +11995,7 @@
         </p:nvSpPr>
         <p:spPr>
           <a:xfrm>
-            <a:off x="576072" y="2359152"/>
+            <a:off x="576072" y="2371196"/>
             <a:ext cx="1481328" cy="0"/>
           </a:xfrm>
           <a:prstGeom prst="line">
@@ -12018,7 +12018,7 @@
         </p:nvSpPr>
         <p:spPr>
           <a:xfrm>
-            <a:off x="2148840" y="1426464"/>
+            <a:off x="2148840" y="1438508"/>
             <a:ext cx="2112264" cy="274320"/>
           </a:xfrm>
           <a:prstGeom prst="rect">
@@ -12057,7 +12057,7 @@
         </p:nvSpPr>
         <p:spPr>
           <a:xfrm>
-            <a:off x="2148840" y="1719072"/>
+            <a:off x="2148840" y="1731116"/>
             <a:ext cx="2112264" cy="420624"/>
           </a:xfrm>
           <a:prstGeom prst="rect">
@@ -12119,7 +12119,7 @@
         </p:nvSpPr>
         <p:spPr>
           <a:xfrm>
-            <a:off x="2148840" y="2176272"/>
+            <a:off x="2148840" y="2188316"/>
             <a:ext cx="2112264" cy="347472"/>
           </a:xfrm>
           <a:prstGeom prst="rect">
@@ -12181,7 +12181,7 @@
         </p:nvSpPr>
         <p:spPr>
           <a:xfrm>
-            <a:off x="630936" y="2532888"/>
+            <a:off x="630936" y="2538910"/>
             <a:ext cx="3648456" cy="0"/>
           </a:xfrm>
           <a:prstGeom prst="line">
@@ -12204,7 +12204,7 @@
         </p:nvSpPr>
         <p:spPr>
           <a:xfrm rot="-2280000">
-            <a:off x="1064181" y="2893453"/>
+            <a:off x="1064181" y="2899475"/>
             <a:ext cx="65288" cy="6913"/>
           </a:xfrm>
           <a:prstGeom prst="rect">
@@ -12226,7 +12226,7 @@
         </p:nvSpPr>
         <p:spPr>
           <a:xfrm rot="-1140000">
-            <a:off x="1076884" y="2916849"/>
+            <a:off x="1076884" y="2922871"/>
             <a:ext cx="65288" cy="6913"/>
           </a:xfrm>
           <a:prstGeom prst="rect">
@@ -12248,7 +12248,7 @@
         </p:nvSpPr>
         <p:spPr>
           <a:xfrm>
-            <a:off x="1081278" y="2943106"/>
+            <a:off x="1081278" y="2949128"/>
             <a:ext cx="65288" cy="6913"/>
           </a:xfrm>
           <a:prstGeom prst="rect">
@@ -12270,7 +12270,7 @@
         </p:nvSpPr>
         <p:spPr>
           <a:xfrm rot="1140000">
-            <a:off x="1076884" y="2969363"/>
+            <a:off x="1076884" y="2975385"/>
             <a:ext cx="65288" cy="6913"/>
           </a:xfrm>
           <a:prstGeom prst="rect">
@@ -12292,7 +12292,7 @@
         </p:nvSpPr>
         <p:spPr>
           <a:xfrm rot="2280000">
-            <a:off x="1064181" y="2992759"/>
+            <a:off x="1064181" y="2998781"/>
             <a:ext cx="65288" cy="6913"/>
           </a:xfrm>
           <a:prstGeom prst="rect">
@@ -12314,7 +12314,7 @@
         </p:nvSpPr>
         <p:spPr>
           <a:xfrm>
-            <a:off x="979505" y="2908158"/>
+            <a:off x="979505" y="2914180"/>
             <a:ext cx="69129" cy="24963"/>
           </a:xfrm>
           <a:prstGeom prst="ellipse">
@@ -12334,7 +12334,7 @@
         </p:nvSpPr>
         <p:spPr>
           <a:xfrm>
-            <a:off x="979505" y="2919679"/>
+            <a:off x="979505" y="2925701"/>
             <a:ext cx="69129" cy="65288"/>
           </a:xfrm>
           <a:prstGeom prst="rect">
@@ -12354,7 +12354,7 @@
         </p:nvSpPr>
         <p:spPr>
           <a:xfrm>
-            <a:off x="979505" y="2971526"/>
+            <a:off x="979505" y="2977548"/>
             <a:ext cx="69129" cy="24963"/>
           </a:xfrm>
           <a:prstGeom prst="ellipse">
@@ -12374,7 +12374,7 @@
         </p:nvSpPr>
         <p:spPr>
           <a:xfrm>
-            <a:off x="979505" y="2938882"/>
+            <a:off x="979505" y="2944904"/>
             <a:ext cx="69129" cy="13442"/>
           </a:xfrm>
           <a:prstGeom prst="rect">
@@ -12396,7 +12396,7 @@
         </p:nvSpPr>
         <p:spPr>
           <a:xfrm>
-            <a:off x="1002548" y="2996489"/>
+            <a:off x="1002548" y="3002511"/>
             <a:ext cx="23043" cy="26883"/>
           </a:xfrm>
           <a:prstGeom prst="rect">
@@ -12418,7 +12418,7 @@
         </p:nvSpPr>
         <p:spPr>
           <a:xfrm>
-            <a:off x="1232245" y="2915839"/>
+            <a:off x="1232245" y="2921861"/>
             <a:ext cx="168981" cy="96012"/>
           </a:xfrm>
           <a:prstGeom prst="roundRect">
@@ -12440,7 +12440,7 @@
         </p:nvSpPr>
         <p:spPr>
           <a:xfrm>
-            <a:off x="1270650" y="2896636"/>
+            <a:off x="1270650" y="2902658"/>
             <a:ext cx="49926" cy="23043"/>
           </a:xfrm>
           <a:prstGeom prst="roundRect">
@@ -12462,7 +12462,7 @@
         </p:nvSpPr>
         <p:spPr>
           <a:xfrm>
-            <a:off x="1286012" y="2931201"/>
+            <a:off x="1286012" y="2937223"/>
             <a:ext cx="61448" cy="61448"/>
           </a:xfrm>
           <a:prstGeom prst="ellipse">
@@ -12482,7 +12482,7 @@
         </p:nvSpPr>
         <p:spPr>
           <a:xfrm>
-            <a:off x="1299454" y="2944642"/>
+            <a:off x="1299454" y="2950664"/>
             <a:ext cx="34564" cy="34564"/>
           </a:xfrm>
           <a:prstGeom prst="ellipse">
@@ -12504,7 +12504,7 @@
         </p:nvSpPr>
         <p:spPr>
           <a:xfrm>
-            <a:off x="1362822" y="2927360"/>
+            <a:off x="1362822" y="2933382"/>
             <a:ext cx="19202" cy="19202"/>
           </a:xfrm>
           <a:prstGeom prst="ellipse">
@@ -12526,7 +12526,7 @@
         </p:nvSpPr>
         <p:spPr>
           <a:xfrm>
-            <a:off x="1523390" y="2942722"/>
+            <a:off x="1523390" y="2948744"/>
             <a:ext cx="34564" cy="34564"/>
           </a:xfrm>
           <a:prstGeom prst="ellipse">
@@ -12546,7 +12546,7 @@
         </p:nvSpPr>
         <p:spPr>
           <a:xfrm>
-            <a:off x="1550274" y="2904317"/>
+            <a:off x="1550274" y="2910339"/>
             <a:ext cx="46086" cy="111374"/>
           </a:xfrm>
           <a:prstGeom prst="chevron">
@@ -12568,7 +12568,7 @@
         </p:nvSpPr>
         <p:spPr>
           <a:xfrm>
-            <a:off x="1588679" y="2888955"/>
+            <a:off x="1588679" y="2894977"/>
             <a:ext cx="49926" cy="142098"/>
           </a:xfrm>
           <a:prstGeom prst="chevron">
@@ -12592,7 +12592,7 @@
         </p:nvSpPr>
         <p:spPr>
           <a:xfrm>
-            <a:off x="1627083" y="2873593"/>
+            <a:off x="1627083" y="2879616"/>
             <a:ext cx="53767" cy="172822"/>
           </a:xfrm>
           <a:prstGeom prst="chevron">
@@ -12616,7 +12616,7 @@
         </p:nvSpPr>
         <p:spPr>
           <a:xfrm>
-            <a:off x="941832" y="3081528"/>
+            <a:off x="941832" y="3087550"/>
             <a:ext cx="713232" cy="237744"/>
           </a:xfrm>
           <a:prstGeom prst="roundRect">
@@ -12643,7 +12643,7 @@
         </p:nvSpPr>
         <p:spPr>
           <a:xfrm>
-            <a:off x="630936" y="3300984"/>
+            <a:off x="630936" y="3307006"/>
             <a:ext cx="1371600" cy="347472"/>
           </a:xfrm>
           <a:prstGeom prst="roundRect">
@@ -12670,7 +12670,7 @@
         </p:nvSpPr>
         <p:spPr>
           <a:xfrm>
-            <a:off x="841248" y="3547872"/>
+            <a:off x="841248" y="3553894"/>
             <a:ext cx="201168" cy="201168"/>
           </a:xfrm>
           <a:prstGeom prst="ellipse">
@@ -12690,7 +12690,7 @@
         </p:nvSpPr>
         <p:spPr>
           <a:xfrm>
-            <a:off x="1591056" y="3547872"/>
+            <a:off x="1591056" y="3553894"/>
             <a:ext cx="201168" cy="201168"/>
           </a:xfrm>
           <a:prstGeom prst="ellipse">
@@ -12710,7 +12710,7 @@
         </p:nvSpPr>
         <p:spPr>
           <a:xfrm>
-            <a:off x="576072" y="3648456"/>
+            <a:off x="576072" y="3654478"/>
             <a:ext cx="1481328" cy="0"/>
           </a:xfrm>
           <a:prstGeom prst="line">
@@ -12733,7 +12733,7 @@
         </p:nvSpPr>
         <p:spPr>
           <a:xfrm>
-            <a:off x="2148840" y="2715768"/>
+            <a:off x="2148840" y="2721790"/>
             <a:ext cx="2112264" cy="274320"/>
           </a:xfrm>
           <a:prstGeom prst="rect">
@@ -12772,7 +12772,7 @@
         </p:nvSpPr>
         <p:spPr>
           <a:xfrm>
-            <a:off x="2148840" y="3008376"/>
+            <a:off x="2148840" y="3014398"/>
             <a:ext cx="2112264" cy="420624"/>
           </a:xfrm>
           <a:prstGeom prst="rect">
@@ -12834,7 +12834,7 @@
         </p:nvSpPr>
         <p:spPr>
           <a:xfrm>
-            <a:off x="2148840" y="3465576"/>
+            <a:off x="2148840" y="3471598"/>
             <a:ext cx="2112264" cy="347472"/>
           </a:xfrm>
           <a:prstGeom prst="rect">
@@ -12896,12 +12896,12 @@
         </p:nvSpPr>
         <p:spPr>
           <a:xfrm>
-            <a:off x="4736592" y="1243584"/>
-            <a:ext cx="3904488" cy="2578608"/>
+            <a:off x="4736592" y="1255628"/>
+            <a:ext cx="3904488" cy="2566564"/>
           </a:xfrm>
           <a:prstGeom prst="roundRect">
             <a:avLst>
-              <a:gd name="adj" fmla="val 3546"/>
+              <a:gd name="adj" fmla="val 3563"/>
             </a:avLst>
           </a:prstGeom>
           <a:solidFill>
@@ -12923,7 +12923,7 @@
         </p:nvSpPr>
         <p:spPr>
           <a:xfrm>
-            <a:off x="4919472" y="1408176"/>
+            <a:off x="4919472" y="1420220"/>
             <a:ext cx="347472" cy="347472"/>
           </a:xfrm>
           <a:prstGeom prst="ellipse">
@@ -12943,7 +12943,7 @@
         </p:nvSpPr>
         <p:spPr>
           <a:xfrm>
-            <a:off x="4919472" y="1453896"/>
+            <a:off x="4919472" y="1465940"/>
             <a:ext cx="347472" cy="256032"/>
           </a:xfrm>
           <a:prstGeom prst="rect">
@@ -12982,7 +12982,7 @@
         </p:nvSpPr>
         <p:spPr>
           <a:xfrm>
-            <a:off x="5340096" y="1389888"/>
+            <a:off x="5340096" y="1401932"/>
             <a:ext cx="3118104" cy="420624"/>
           </a:xfrm>
           <a:prstGeom prst="rect">
@@ -13021,7 +13021,7 @@
         </p:nvSpPr>
         <p:spPr>
           <a:xfrm>
-            <a:off x="4919472" y="1847088"/>
+            <a:off x="4919472" y="1859132"/>
             <a:ext cx="3538728" cy="201168"/>
           </a:xfrm>
           <a:prstGeom prst="rect">
@@ -13062,7 +13062,7 @@
         </p:nvSpPr>
         <p:spPr>
           <a:xfrm>
-            <a:off x="4919472" y="2029968"/>
+            <a:off x="4919472" y="2042012"/>
             <a:ext cx="3538728" cy="201168"/>
           </a:xfrm>
           <a:prstGeom prst="rect">
@@ -13108,7 +13108,7 @@
         </p:nvSpPr>
         <p:spPr>
           <a:xfrm>
-            <a:off x="4919472" y="2304288"/>
+            <a:off x="4919472" y="2316332"/>
             <a:ext cx="36576" cy="237744"/>
           </a:xfrm>
           <a:prstGeom prst="rect">
@@ -13128,7 +13128,7 @@
         </p:nvSpPr>
         <p:spPr>
           <a:xfrm>
-            <a:off x="5047488" y="2267712"/>
+            <a:off x="5047488" y="2279756"/>
             <a:ext cx="3429000" cy="456079"/>
           </a:xfrm>
           <a:prstGeom prst="rect">
@@ -13190,7 +13190,7 @@
         </p:nvSpPr>
         <p:spPr>
           <a:xfrm>
-            <a:off x="4919472" y="2796943"/>
+            <a:off x="4919472" y="2808987"/>
             <a:ext cx="36576" cy="237744"/>
           </a:xfrm>
           <a:prstGeom prst="rect">
@@ -13210,7 +13210,7 @@
         </p:nvSpPr>
         <p:spPr>
           <a:xfrm>
-            <a:off x="5047488" y="2760367"/>
+            <a:off x="5047488" y="2772411"/>
             <a:ext cx="3429000" cy="313748"/>
           </a:xfrm>
           <a:prstGeom prst="rect">
@@ -13272,7 +13272,7 @@
         </p:nvSpPr>
         <p:spPr>
           <a:xfrm>
-            <a:off x="4919472" y="3147267"/>
+            <a:off x="4919472" y="3159311"/>
             <a:ext cx="36576" cy="237744"/>
           </a:xfrm>
           <a:prstGeom prst="rect">
@@ -13292,7 +13292,7 @@
         </p:nvSpPr>
         <p:spPr>
           <a:xfrm>
-            <a:off x="5047488" y="3110691"/>
+            <a:off x="5047488" y="3122735"/>
             <a:ext cx="3429000" cy="313748"/>
           </a:xfrm>
           <a:prstGeom prst="rect">

--- a/第三週(09-24)/第三週_第2節_簡報.pptx
+++ b/第三週(09-24)/第三週_第2節_簡報.pptx
@@ -29703,11 +29703,11 @@
         <p:spPr>
           <a:xfrm>
             <a:off x="502920" y="1133856"/>
-            <a:ext cx="8138160" cy="713232"/>
+            <a:ext cx="8138160" cy="819473"/>
           </a:xfrm>
           <a:prstGeom prst="roundRect">
             <a:avLst>
-              <a:gd name="adj" fmla="val 10256"/>
+              <a:gd name="adj" fmla="val 8927"/>
             </a:avLst>
           </a:prstGeom>
           <a:solidFill>
@@ -29725,7 +29725,7 @@
         <p:spPr>
           <a:xfrm>
             <a:off x="649224" y="1207008"/>
-            <a:ext cx="7845552" cy="566928"/>
+            <a:ext cx="7845552" cy="673169"/>
           </a:xfrm>
           <a:prstGeom prst="rect">
             <a:avLst/>
@@ -29793,7 +29793,7 @@
           </p:nvPr>
         </p:nvGraphicFramePr>
         <p:xfrm>
-          <a:off x="502920" y="1956816"/>
+          <a:off x="502920" y="2063057"/>
           <a:ext cx="8138160" cy="914400"/>
         </p:xfrm>
         <a:graphic>
@@ -31848,7 +31848,7 @@
         </p:nvSpPr>
         <p:spPr>
           <a:xfrm>
-            <a:off x="502920" y="4242816"/>
+            <a:off x="502920" y="4349057"/>
             <a:ext cx="8138160" cy="457200"/>
           </a:xfrm>
           <a:prstGeom prst="rect">

--- a/第三週(09-24)/第三週_第2節_簡報.pptx
+++ b/第三週(09-24)/第三週_第2節_簡報.pptx
@@ -3984,7 +3984,7 @@
                 <a:ea typeface="Arial Unicode MS"/>
                 <a:cs typeface="Arial Unicode MS"/>
               </a:rPr>
-              <a:t>反過來，</a:t>
+              <a:t>反過來要把 d 算出來。</a:t>
             </a:r>
             <a:r>
               <a:rPr sz="1000" b="1" lang="zh-TW" dirty="0">
@@ -3995,7 +3995,7 @@
                 <a:ea typeface="Arial Unicode MS"/>
                 <a:cs typeface="Arial Unicode MS"/>
               </a:rPr>
-              <a:t>d ＝ h ÷ tan α</a:t>
+              <a:t>d 現在在分母</a:t>
             </a:r>
             <a:r>
               <a:rPr sz="1000" lang="zh-TW" dirty="0">
@@ -4006,7 +4006,7 @@
                 <a:ea typeface="Arial Unicode MS"/>
                 <a:cs typeface="Arial Unicode MS"/>
               </a:rPr>
-              <a:t>。這就是右邊第一條式子。
+              <a:t>，所以先把它乘過去，再把 tan α 除過去：
 </a:t>
             </a:r>
           </a:p>
@@ -4028,29 +4028,7 @@
                 <a:ea typeface="Arial Unicode MS"/>
                 <a:cs typeface="Arial Unicode MS"/>
               </a:rPr>
-              <a:t>（計算機操作，請在台上示範一次：手機的計算機把螢幕轉成橫的就會出現 tan。</a:t>
-            </a:r>
-            <a:r>
-              <a:rPr sz="1000" b="1" lang="zh-TW" dirty="0">
-                <a:solidFill>
-                  <a:srgbClr val="000000"/>
-                </a:solidFill>
-                <a:latin typeface="Arial Unicode MS"/>
-                <a:ea typeface="Arial Unicode MS"/>
-                <a:cs typeface="Arial Unicode MS"/>
-              </a:rPr>
-              <a:t>按之前務必確認是「DEG」（度）模式，不是 RAD</a:t>
-            </a:r>
-            <a:r>
-              <a:rPr sz="1000" lang="zh-TW" dirty="0">
-                <a:solidFill>
-                  <a:srgbClr val="000000"/>
-                </a:solidFill>
-                <a:latin typeface="Arial Unicode MS"/>
-                <a:ea typeface="Arial Unicode MS"/>
-                <a:cs typeface="Arial Unicode MS"/>
-              </a:rPr>
-              <a:t>——這是最常出錯的地方，同一個數字按錯模式，答案會差很多。按法是先輸入角度再按 tan。）
+              <a:t>兩邊同乘 d：d × tan α ＝ h
 </a:t>
             </a:r>
           </a:p>
@@ -4064,6 +4042,17 @@
               </a:spcAft>
             </a:pPr>
             <a:r>
+              <a:rPr sz="1000" lang="zh-TW" dirty="0">
+                <a:solidFill>
+                  <a:srgbClr val="000000"/>
+                </a:solidFill>
+                <a:latin typeface="Arial Unicode MS"/>
+                <a:ea typeface="Arial Unicode MS"/>
+                <a:cs typeface="Arial Unicode MS"/>
+              </a:rPr>
+              <a:t>兩邊同除以 tan α：</a:t>
+            </a:r>
+            <a:r>
               <a:rPr sz="1000" b="1" lang="zh-TW" dirty="0">
                 <a:solidFill>
                   <a:srgbClr val="000000"/>
@@ -4072,7 +4061,7 @@
                 <a:ea typeface="Arial Unicode MS"/>
                 <a:cs typeface="Arial Unicode MS"/>
               </a:rPr>
-              <a:t>同學不需要自己會按 tan。</a:t>
+              <a:t>d ＝ h ÷ tan α</a:t>
             </a:r>
             <a:r>
               <a:rPr sz="1000" lang="zh-TW" dirty="0">
@@ -4083,7 +4072,7 @@
                 <a:ea typeface="Arial Unicode MS"/>
                 <a:cs typeface="Arial Unicode MS"/>
               </a:rPr>
-              <a:t>今天的學習單和考試都不會要你們算三角函數——我要你們懂的是這個「角度愈小、距離愈遠」的關係，不是計算技巧。
+              <a:t>
 </a:t>
             </a:r>
           </a:p>
@@ -4105,7 +4094,7 @@
                 <a:ea typeface="Arial Unicode MS"/>
                 <a:cs typeface="Arial Unicode MS"/>
               </a:rPr>
-              <a:t>那 α 怎麼知道？看照片。紅點在畫面上比地平線低了幾列像素，數得出來；每一列像素代表幾度，是相機的規格。兩個相乘就是 α。這是第二條式子。
+              <a:t>這就是右邊第一條式子。
 </a:t>
             </a:r>
           </a:p>
@@ -4127,7 +4116,194 @@
                 <a:ea typeface="Arial Unicode MS"/>
                 <a:cs typeface="Arial Unicode MS"/>
               </a:rPr>
-              <a:t>我們代數字算一次。這台相機水平一千九百二十個像素、視野六十度，六十除以一千九百二十，每個像素是零點零三一二五度。
+              <a:t>（很容易寫反成 tan α ÷ h。教一個檢查的方法：代數字進去，如果算出來是零點零三這種數字，那不可能是距離，一定是寫反了。）
+</a:t>
+            </a:r>
+          </a:p>
+          <a:p>
+            <a:pPr algn="l">
+              <a:lnSpc>
+                <a:spcPct val="115000"/>
+              </a:lnSpc>
+              <a:spcAft>
+                <a:spcPts val="500"/>
+              </a:spcAft>
+            </a:pPr>
+            <a:r>
+              <a:rPr sz="1000" lang="zh-TW" dirty="0">
+                <a:solidFill>
+                  <a:srgbClr val="000000"/>
+                </a:solidFill>
+                <a:latin typeface="Arial Unicode MS"/>
+                <a:ea typeface="Arial Unicode MS"/>
+                <a:cs typeface="Arial Unicode MS"/>
+              </a:rPr>
+              <a:t>（計算機操作，請在台上示範一次：手機的計算機把螢幕轉成橫的就會出現 tan。</a:t>
+            </a:r>
+            <a:r>
+              <a:rPr sz="1000" b="1" lang="zh-TW" dirty="0">
+                <a:solidFill>
+                  <a:srgbClr val="000000"/>
+                </a:solidFill>
+                <a:latin typeface="Arial Unicode MS"/>
+                <a:ea typeface="Arial Unicode MS"/>
+                <a:cs typeface="Arial Unicode MS"/>
+              </a:rPr>
+              <a:t>按之前務必確認是「DEG」（度）模式，不是 RAD</a:t>
+            </a:r>
+            <a:r>
+              <a:rPr sz="1000" lang="zh-TW" dirty="0">
+                <a:solidFill>
+                  <a:srgbClr val="000000"/>
+                </a:solidFill>
+                <a:latin typeface="Arial Unicode MS"/>
+                <a:ea typeface="Arial Unicode MS"/>
+                <a:cs typeface="Arial Unicode MS"/>
+              </a:rPr>
+              <a:t>——這是最常出錯的地方，同一個數字按錯模式，答案會差很多。按法是先輸入角度再按 tan。）
+</a:t>
+            </a:r>
+          </a:p>
+          <a:p>
+            <a:pPr algn="l">
+              <a:lnSpc>
+                <a:spcPct val="115000"/>
+              </a:lnSpc>
+              <a:spcAft>
+                <a:spcPts val="500"/>
+              </a:spcAft>
+            </a:pPr>
+            <a:r>
+              <a:rPr sz="1000" b="1" lang="zh-TW" dirty="0">
+                <a:solidFill>
+                  <a:srgbClr val="000000"/>
+                </a:solidFill>
+                <a:latin typeface="Arial Unicode MS"/>
+                <a:ea typeface="Arial Unicode MS"/>
+                <a:cs typeface="Arial Unicode MS"/>
+              </a:rPr>
+              <a:t>同學不需要自己會按 tan。</a:t>
+            </a:r>
+            <a:r>
+              <a:rPr sz="1000" lang="zh-TW" dirty="0">
+                <a:solidFill>
+                  <a:srgbClr val="000000"/>
+                </a:solidFill>
+                <a:latin typeface="Arial Unicode MS"/>
+                <a:ea typeface="Arial Unicode MS"/>
+                <a:cs typeface="Arial Unicode MS"/>
+              </a:rPr>
+              <a:t>今天的學習單和考試都不會要你們算三角函數——我要你們懂的是這個「角度愈小、距離愈遠」的關係，不是計算技巧。
+</a:t>
+            </a:r>
+          </a:p>
+          <a:p>
+            <a:pPr algn="l">
+              <a:lnSpc>
+                <a:spcPct val="115000"/>
+              </a:lnSpc>
+              <a:spcAft>
+                <a:spcPts val="500"/>
+              </a:spcAft>
+            </a:pPr>
+            <a:r>
+              <a:rPr sz="1000" lang="zh-TW" dirty="0">
+                <a:solidFill>
+                  <a:srgbClr val="000000"/>
+                </a:solidFill>
+                <a:latin typeface="Arial Unicode MS"/>
+                <a:ea typeface="Arial Unicode MS"/>
+                <a:cs typeface="Arial Unicode MS"/>
+              </a:rPr>
+              <a:t>那 α 怎麼知道？看照片。紅點在畫面上比地平線低了幾列像素，數得出來；每一列像素代表幾度，是相機的規格。兩個相乘就是 α。這是第二條式子。
+</a:t>
+            </a:r>
+          </a:p>
+          <a:p>
+            <a:pPr algn="l">
+              <a:lnSpc>
+                <a:spcPct val="115000"/>
+              </a:lnSpc>
+              <a:spcAft>
+                <a:spcPts val="500"/>
+              </a:spcAft>
+            </a:pPr>
+            <a:r>
+              <a:rPr sz="1000" lang="zh-TW" dirty="0">
+                <a:solidFill>
+                  <a:srgbClr val="000000"/>
+                </a:solidFill>
+                <a:latin typeface="Arial Unicode MS"/>
+                <a:ea typeface="Arial Unicode MS"/>
+                <a:cs typeface="Arial Unicode MS"/>
+              </a:rPr>
+              <a:t>我們代數字算一次。這台相機水平一千九百二十個像素、水平視野六十度，六十除以一千九百二十，每個像素零點零三一二五度。
+</a:t>
+            </a:r>
+          </a:p>
+          <a:p>
+            <a:pPr algn="l">
+              <a:lnSpc>
+                <a:spcPct val="115000"/>
+              </a:lnSpc>
+              <a:spcAft>
+                <a:spcPts val="500"/>
+              </a:spcAft>
+            </a:pPr>
+            <a:r>
+              <a:rPr sz="1000" lang="zh-TW" dirty="0">
+                <a:solidFill>
+                  <a:srgbClr val="000000"/>
+                </a:solidFill>
+                <a:latin typeface="Arial Unicode MS"/>
+                <a:ea typeface="Arial Unicode MS"/>
+                <a:cs typeface="Arial Unicode MS"/>
+              </a:rPr>
+              <a:t>（這裡要補一句，不然會有同學被繞進去：</a:t>
+            </a:r>
+            <a:r>
+              <a:rPr sz="1000" b="1" lang="zh-TW" dirty="0">
+                <a:solidFill>
+                  <a:srgbClr val="000000"/>
+                </a:solidFill>
+                <a:latin typeface="Arial Unicode MS"/>
+                <a:ea typeface="Arial Unicode MS"/>
+                <a:cs typeface="Arial Unicode MS"/>
+              </a:rPr>
+              <a:t>俯角是上下的角度，我們數的是「往下第幾列」，所以真正要用的是垂直方向的每一度幾個像素。</a:t>
+            </a:r>
+            <a:r>
+              <a:rPr sz="1000" lang="zh-TW" dirty="0">
+                <a:solidFill>
+                  <a:srgbClr val="000000"/>
+                </a:solidFill>
+                <a:latin typeface="Arial Unicode MS"/>
+                <a:ea typeface="Arial Unicode MS"/>
+                <a:cs typeface="Arial Unicode MS"/>
+              </a:rPr>
+              <a:t>那為什麼可以拿水平的數字來算？因為感光元件上的像素是</a:t>
+            </a:r>
+            <a:r>
+              <a:rPr sz="1000" b="1" lang="zh-TW" dirty="0">
+                <a:solidFill>
+                  <a:srgbClr val="000000"/>
+                </a:solidFill>
+                <a:latin typeface="Arial Unicode MS"/>
+                <a:ea typeface="Arial Unicode MS"/>
+                <a:cs typeface="Arial Unicode MS"/>
+              </a:rPr>
+              <a:t>正方形</a:t>
+            </a:r>
+            <a:r>
+              <a:rPr sz="1000" lang="zh-TW" dirty="0">
+                <a:solidFill>
+                  <a:srgbClr val="000000"/>
+                </a:solidFill>
+                <a:latin typeface="Arial Unicode MS"/>
+                <a:ea typeface="Arial Unicode MS"/>
+                <a:cs typeface="Arial Unicode MS"/>
+              </a:rPr>
+              <a:t>的，水平一格和垂直一格張開的角度一樣大，所以垂直方向每一列同樣是零點零三一二五度。規格表習慣只寫水平，是因為水平視野才是大家拿來比較的那個數字。）
 </a:t>
             </a:r>
           </a:p>
@@ -17361,7 +17537,7 @@
                 <a:ea typeface="Arial" pitchFamily="34" charset="-122"/>
                 <a:cs typeface="Arial" pitchFamily="34" charset="-120"/>
               </a:rPr>
-              <a:t>α = số hàng × độ mỗi điểm ảnh</a:t>
+              <a:t>α = số hàng × độ mỗi hàng</a:t>
             </a:r>
             <a:endParaRPr lang="en-US" sz="1250" dirty="0"/>
           </a:p>
@@ -17381,7 +17557,7 @@
                 <a:ea typeface="微軟正黑體" pitchFamily="34" charset="-122"/>
                 <a:cs typeface="微軟正黑體" pitchFamily="34" charset="-120"/>
               </a:rPr>
-              <a:t>俯角 ＝ 地平線下方第幾列 × 每像素幾度</a:t>
+              <a:t>俯角 ＝ 地平線下方第幾列 × 每一列幾度</a:t>
             </a:r>
             <a:endParaRPr lang="en-US" sz="1250" dirty="0"/>
           </a:p>
@@ -17423,7 +17599,7 @@
                 <a:ea typeface="Arial" pitchFamily="34" charset="-122"/>
                 <a:cs typeface="Arial" pitchFamily="34" charset="-120"/>
               </a:rPr>
-              <a:t>Ví dụ: 1920 px, 60° → 0,03125°/px</a:t>
+              <a:t>Ví dụ: 1920 px, 60° → 0,03125° mỗi hàng</a:t>
             </a:r>
             <a:endParaRPr lang="en-US" sz="1050" dirty="0"/>
           </a:p>
@@ -17443,7 +17619,7 @@
                 <a:ea typeface="微軟正黑體" pitchFamily="34" charset="-122"/>
                 <a:cs typeface="微軟正黑體" pitchFamily="34" charset="-120"/>
               </a:rPr>
-              <a:t>代數字：每像素 0.03125°</a:t>
+              <a:t>代數字：1920 像素、60° → 每列 0.03125°</a:t>
             </a:r>
             <a:endParaRPr lang="en-US" sz="1050" dirty="0"/>
           </a:p>

--- a/第三週(09-24)/第三週_第2節_簡報.pptx
+++ b/第三週(09-24)/第三週_第2節_簡報.pptx
@@ -5613,6 +5613,28 @@
                 <a:cs typeface="Arial Unicode MS"/>
               </a:rPr>
               <a:t>（預期讀值，請依序寫在白板上：基準 ±0.33、3840 px ±0.16、30° 視野 ±0.16、高度 2.2 m ±0.22、1280 px ±0.49。）
+</a:t>
+            </a:r>
+          </a:p>
+          <a:p>
+            <a:pPr algn="l">
+              <a:lnSpc>
+                <a:spcPct val="115000"/>
+              </a:lnSpc>
+              <a:spcAft>
+                <a:spcPts val="500"/>
+              </a:spcAft>
+            </a:pPr>
+            <a:r>
+              <a:rPr sz="1000" lang="zh-TW" dirty="0">
+                <a:solidFill>
+                  <a:srgbClr val="000000"/>
+                </a:solidFill>
+                <a:latin typeface="Arial Unicode MS"/>
+                <a:ea typeface="Arial Unicode MS"/>
+                <a:cs typeface="Arial Unicode MS"/>
+              </a:rPr>
+              <a:t>（像素那條滑桿只停在真的買得到的規格上：640、1280、1920、2896、3840，拉不到中間的數字。這是故意的——市面上沒有三千六百八十像素的相機。光達的線束數也一樣，只有 8、16、32、64、128。）
 </a:t>
             </a:r>
           </a:p>

--- a/第三週(09-24)/第三週_第2節_簡報.pptx
+++ b/第三週(09-24)/第三週_第2節_簡報.pptx
@@ -7515,7 +7515,7 @@
                 <a:ea typeface="Arial Unicode MS"/>
                 <a:cs typeface="Arial Unicode MS"/>
               </a:rPr>
-              <a:t>那個東西在哪裡、有多大、是什麼</a:t>
+              <a:t>那個東西在哪裡、有多大、輪廓長什麼樣</a:t>
             </a:r>
             <a:r>
               <a:rPr sz="1000" lang="zh-TW" dirty="0">
@@ -7724,7 +7724,7 @@
                 <a:ea typeface="Arial Unicode MS"/>
                 <a:cs typeface="Arial Unicode MS"/>
               </a:rPr>
-              <a:t>線束數買的不是「這個點多遠」，是「那是什麼、在哪裡、多大、往哪走」。</a:t>
+              <a:t>線束數買的不是「這個點多遠」，是「那個東西有多大、邊界在哪、往哪動」。</a:t>
             </a:r>
             <a:r>
               <a:rPr sz="1000" lang="zh-TW" dirty="0">
@@ -7736,6 +7736,72 @@
                 <a:cs typeface="Arial Unicode MS"/>
               </a:rPr>
               <a:t>
+</a:t>
+            </a:r>
+          </a:p>
+          <a:p>
+            <a:pPr algn="l">
+              <a:lnSpc>
+                <a:spcPct val="115000"/>
+              </a:lnSpc>
+              <a:spcAft>
+                <a:spcPts val="500"/>
+              </a:spcAft>
+            </a:pPr>
+            <a:r>
+              <a:rPr sz="1000" lang="zh-TW" dirty="0">
+                <a:solidFill>
+                  <a:srgbClr val="000000"/>
+                </a:solidFill>
+                <a:latin typeface="Arial Unicode MS"/>
+                <a:ea typeface="Arial Unicode MS"/>
+                <a:cs typeface="Arial Unicode MS"/>
+              </a:rPr>
+              <a:t>（這裡一定會有同學想到第一節那句「光達不知道那是什麼」，然後覺得矛盾。先謝謝他問，這兩句不衝突：點數多給你的是</a:t>
+            </a:r>
+            <a:r>
+              <a:rPr sz="1000" b="1" lang="zh-TW" dirty="0">
+                <a:solidFill>
+                  <a:srgbClr val="000000"/>
+                </a:solidFill>
+                <a:latin typeface="Arial Unicode MS"/>
+                <a:ea typeface="Arial Unicode MS"/>
+                <a:cs typeface="Arial Unicode MS"/>
+              </a:rPr>
+              <a:t>形狀</a:t>
+            </a:r>
+            <a:r>
+              <a:rPr sz="1000" lang="zh-TW" dirty="0">
+                <a:solidFill>
+                  <a:srgbClr val="000000"/>
+                </a:solidFill>
+                <a:latin typeface="Arial Unicode MS"/>
+                <a:ea typeface="Arial Unicode MS"/>
+                <a:cs typeface="Arial Unicode MS"/>
+              </a:rPr>
+              <a:t>——多寬、多高、輪廓大概什麼樣、中心在哪。至於「那是一個人」這個</a:t>
+            </a:r>
+            <a:r>
+              <a:rPr sz="1000" b="1" lang="zh-TW" dirty="0">
+                <a:solidFill>
+                  <a:srgbClr val="000000"/>
+                </a:solidFill>
+                <a:latin typeface="Arial Unicode MS"/>
+                <a:ea typeface="Arial Unicode MS"/>
+                <a:cs typeface="Arial Unicode MS"/>
+              </a:rPr>
+              <a:t>名字</a:t>
+            </a:r>
+            <a:r>
+              <a:rPr sz="1000" lang="zh-TW" dirty="0">
+                <a:solidFill>
+                  <a:srgbClr val="000000"/>
+                </a:solidFill>
+                <a:latin typeface="Arial Unicode MS"/>
+                <a:ea typeface="Arial Unicode MS"/>
+                <a:cs typeface="Arial Unicode MS"/>
+              </a:rPr>
+              <a:t>，還是要靠相機給，那就是第一節那張補洞表的分工。真車的做法是把光達的形狀跟相機的類別配在一起用。點雲本身能不能認出類別，是第四章感知要講的事，今天先不進去。）
 </a:t>
             </a:r>
           </a:p>

--- a/第三週(09-24)/第三週_第2節_簡報.pptx
+++ b/第三週(09-24)/第三週_第2節_簡報.pptx
@@ -7845,7 +7845,51 @@
                 <a:ea typeface="Arial Unicode MS"/>
                 <a:cs typeface="Arial Unicode MS"/>
               </a:rPr>
-              <a:t>（補一句工具的限制：我們的工具為了教學，距離是直接算出來的，沒有加測距雜訊，所以永遠顯示四十點零。真機每一個點都會有正負兩公分左右的跳動。）
+              <a:t>（工具上這件事現在看得到：光達那張卡寫的是 </a:t>
+            </a:r>
+            <a:r>
+              <a:rPr sz="1000" b="1" lang="zh-TW" dirty="0">
+                <a:solidFill>
+                  <a:srgbClr val="000000"/>
+                </a:solidFill>
+                <a:latin typeface="Arial Unicode MS"/>
+                <a:ea typeface="Arial Unicode MS"/>
+                <a:cs typeface="Arial Unicode MS"/>
+              </a:rPr>
+              <a:t>40.0 ± 0.02 m</a:t>
+            </a:r>
+            <a:r>
+              <a:rPr sz="1000" lang="zh-TW" dirty="0">
+                <a:solidFill>
+                  <a:srgbClr val="000000"/>
+                </a:solidFill>
+                <a:latin typeface="Arial Unicode MS"/>
+                <a:ea typeface="Arial Unicode MS"/>
+                <a:cs typeface="Arial Unicode MS"/>
+              </a:rPr>
+              <a:t>，相機那張是 </a:t>
+            </a:r>
+            <a:r>
+              <a:rPr sz="1000" b="1" lang="zh-TW" dirty="0">
+                <a:solidFill>
+                  <a:srgbClr val="000000"/>
+                </a:solidFill>
+                <a:latin typeface="Arial Unicode MS"/>
+                <a:ea typeface="Arial Unicode MS"/>
+                <a:cs typeface="Arial Unicode MS"/>
+              </a:rPr>
+              <a:t>± 0.58</a:t>
+            </a:r>
+            <a:r>
+              <a:rPr sz="1000" lang="zh-TW" dirty="0">
+                <a:solidFill>
+                  <a:srgbClr val="000000"/>
+                </a:solidFill>
+                <a:latin typeface="Arial Unicode MS"/>
+                <a:ea typeface="Arial Unicode MS"/>
+                <a:cs typeface="Arial Unicode MS"/>
+              </a:rPr>
+              <a:t>，熱像更差。拉線束數的時候，光達那個 ±0.02 從頭到尾不會變——因為它由計時電路決定，跟幾條線無關。另外補一句限制：工具的距離是直接算出來的，沒有加雜訊，所以中間那個數字永遠是 40.0；真機每一個點都會在 ±2 公分內跳動。）
 </a:t>
             </a:r>
           </a:p>

--- a/第三週(09-24)/第三週_第2節_簡報.pptx
+++ b/第三週(09-24)/第三週_第2節_簡報.pptx
@@ -684,7 +684,7 @@
                 <a:ea typeface="Arial Unicode MS"/>
                 <a:cs typeface="Arial Unicode MS"/>
               </a:rPr>
-              <a:t>這一輪反過來走：從遠拉到近。請一位同學上來，慢慢拖，每停一個點就唸一排數字。
+              <a:t>這一輪反過來走，從遠拉到近。請一位同學上來，慢慢拖，每停一個點就唸一排數字。我在白板上畫一個五欄的表，一邊拖一邊填。
 </a:t>
             </a:r>
           </a:p>
@@ -706,7 +706,7 @@
                 <a:ea typeface="Arial Unicode MS"/>
                 <a:cs typeface="Arial Unicode MS"/>
               </a:rPr>
-              <a:t>（預期讀值，建議在白板上畫一個五欄的表，一邊拖一邊填：
+              <a:t>三十公尺：相機正負零點三三、光達二十八點、雷達三十點零、超音波沒有數字、熱像二十像素。
 </a:t>
             </a:r>
           </a:p>
@@ -728,7 +728,7 @@
                 <a:ea typeface="Arial Unicode MS"/>
                 <a:cs typeface="Arial Unicode MS"/>
               </a:rPr>
-              <a:t>三十公尺：相機 ±0.33、光達 28 點、雷達 30.0、超音波沒有、熱像 20 px
+              <a:t>十公尺：相機正負零點零四、光達三百零八點、雷達十點零、超音波還是沒有、熱像六十二像素。
 </a:t>
             </a:r>
           </a:p>
@@ -750,7 +750,29 @@
                 <a:ea typeface="Arial Unicode MS"/>
                 <a:cs typeface="Arial Unicode MS"/>
               </a:rPr>
-              <a:t>十公尺：　相機 ±0.04、光達 308 點、雷達 10.0、超音波沒有、熱像 62 px
+              <a:t>四公尺：相機正負零點零一、光達一千九百二十五點、雷達四點零、</a:t>
+            </a:r>
+            <a:r>
+              <a:rPr sz="1000" b="1" lang="zh-TW" dirty="0">
+                <a:solidFill>
+                  <a:srgbClr val="000000"/>
+                </a:solidFill>
+                <a:latin typeface="Arial Unicode MS"/>
+                <a:ea typeface="Arial Unicode MS"/>
+                <a:cs typeface="Arial Unicode MS"/>
+              </a:rPr>
+              <a:t>超音波四點零零，第一次出現</a:t>
+            </a:r>
+            <a:r>
+              <a:rPr sz="1000" lang="zh-TW" dirty="0">
+                <a:solidFill>
+                  <a:srgbClr val="000000"/>
+                </a:solidFill>
+                <a:latin typeface="Arial Unicode MS"/>
+                <a:ea typeface="Arial Unicode MS"/>
+                <a:cs typeface="Arial Unicode MS"/>
+              </a:rPr>
+              <a:t>、熱像一百五十三像素。
 </a:t>
             </a:r>
           </a:p>
@@ -772,7 +794,7 @@
                 <a:ea typeface="Arial Unicode MS"/>
                 <a:cs typeface="Arial Unicode MS"/>
               </a:rPr>
-              <a:t>四公尺：　相機 ±0.01、光達 1925 點、雷達 4.0、</a:t>
+              <a:t>三點四公尺：</a:t>
             </a:r>
             <a:r>
               <a:rPr sz="1000" b="1" lang="zh-TW" dirty="0">
@@ -783,7 +805,7 @@
                 <a:ea typeface="Arial Unicode MS"/>
                 <a:cs typeface="Arial Unicode MS"/>
               </a:rPr>
-              <a:t>超音波 4.00 ← 第一次出現</a:t>
+              <a:t>光達不見了</a:t>
             </a:r>
             <a:r>
               <a:rPr sz="1000" lang="zh-TW" dirty="0">
@@ -794,7 +816,7 @@
                 <a:ea typeface="Arial Unicode MS"/>
                 <a:cs typeface="Arial Unicode MS"/>
               </a:rPr>
-              <a:t>、熱像 153 px
+              <a:t>，那張卡變成「落在近距離盲區內」；超音波三點四零。
 </a:t>
             </a:r>
           </a:p>
@@ -816,29 +838,7 @@
                 <a:ea typeface="Arial Unicode MS"/>
                 <a:cs typeface="Arial Unicode MS"/>
               </a:rPr>
-              <a:t>三點四公尺：</a:t>
-            </a:r>
-            <a:r>
-              <a:rPr sz="1000" b="1" lang="zh-TW" dirty="0">
-                <a:solidFill>
-                  <a:srgbClr val="000000"/>
-                </a:solidFill>
-                <a:latin typeface="Arial Unicode MS"/>
-                <a:ea typeface="Arial Unicode MS"/>
-                <a:cs typeface="Arial Unicode MS"/>
-              </a:rPr>
-              <a:t>光達消失</a:t>
-            </a:r>
-            <a:r>
-              <a:rPr sz="1000" lang="zh-TW" dirty="0">
-                <a:solidFill>
-                  <a:srgbClr val="000000"/>
-                </a:solidFill>
-                <a:latin typeface="Arial Unicode MS"/>
-                <a:ea typeface="Arial Unicode MS"/>
-                <a:cs typeface="Arial Unicode MS"/>
-              </a:rPr>
-              <a:t>「落在近距離盲區內」、超音波 3.40
+              <a:t>一公尺：光達還是沒有；超音波一點零零、雷達一點零、熱像五百一十六像素。
 </a:t>
             </a:r>
           </a:p>
@@ -860,7 +860,7 @@
                 <a:ea typeface="Arial Unicode MS"/>
                 <a:cs typeface="Arial Unicode MS"/>
               </a:rPr>
-              <a:t>一公尺：　光達還是沒有、超音波 1.00、雷達 1.0、熱像 516 px）
+              <a:t>好，我問三題。
 </a:t>
             </a:r>
           </a:p>
@@ -882,7 +882,7 @@
                 <a:ea typeface="Arial Unicode MS"/>
                 <a:cs typeface="Arial Unicode MS"/>
               </a:rPr>
-              <a:t>先講第一題。三十公尺到四公尺，哪一種一路都沒數字？
+              <a:t>第一題，三十公尺到四公尺，哪一種一路都沒有數字？
 </a:t>
             </a:r>
           </a:p>
@@ -904,7 +904,7 @@
                 <a:ea typeface="Arial Unicode MS"/>
                 <a:cs typeface="Arial Unicode MS"/>
               </a:rPr>
-              <a:t>（預期答案：超音波。）
+              <a:t>超音波。它在工具裡只到四點五公尺，所以四公尺才第一次亮起來。它不是壞掉，它天生就只管停車的距離。
 </a:t>
             </a:r>
           </a:p>
@@ -926,7 +926,7 @@
                 <a:ea typeface="Arial Unicode MS"/>
                 <a:cs typeface="Arial Unicode MS"/>
               </a:rPr>
-              <a:t>對。超音波在工具裡只到四點五公尺，四公尺才第一次亮起來。它不是壞掉，它天生就只管停車的距離。
+              <a:t>第二題比較重要。繼續拖，拖到三點五公尺以下，大家看光達那張卡。
 </a:t>
             </a:r>
           </a:p>
@@ -948,7 +948,7 @@
                 <a:ea typeface="Arial Unicode MS"/>
                 <a:cs typeface="Arial Unicode MS"/>
               </a:rPr>
-              <a:t>第二題比較重要。繼續拖，拖到三點五公尺以下——
+              <a:t>光達不見了，變成紅字。這就是我們剛剛那張圖講的盲區：光達裝在車頂，車身周圍三點五公尺以內完全看不到。
 </a:t>
             </a:r>
           </a:p>
@@ -970,7 +970,51 @@
                 <a:ea typeface="Arial Unicode MS"/>
                 <a:cs typeface="Arial Unicode MS"/>
               </a:rPr>
-              <a:t>（讓同學親眼看到光達那張卡變成紅字。）
+              <a:t>請注意這裡有一段</a:t>
+            </a:r>
+            <a:r>
+              <a:rPr sz="1000" b="1" lang="zh-TW" dirty="0">
+                <a:solidFill>
+                  <a:srgbClr val="000000"/>
+                </a:solidFill>
+                <a:latin typeface="Arial Unicode MS"/>
+                <a:ea typeface="Arial Unicode MS"/>
+                <a:cs typeface="Arial Unicode MS"/>
+              </a:rPr>
+              <a:t>接力</a:t>
+            </a:r>
+            <a:r>
+              <a:rPr sz="1000" lang="zh-TW" dirty="0">
+                <a:solidFill>
+                  <a:srgbClr val="000000"/>
+                </a:solidFill>
+                <a:latin typeface="Arial Unicode MS"/>
+                <a:ea typeface="Arial Unicode MS"/>
+                <a:cs typeface="Arial Unicode MS"/>
+              </a:rPr>
+              <a:t>。超音波從四點五公尺開始有，光達到三點五公尺才沒有。中間那一公尺，兩個都在。這是設計出來的，不是巧合。如果超音波只到三公尺，那三到三點五公尺這一段，就會是</a:t>
+            </a:r>
+            <a:r>
+              <a:rPr sz="1000" b="1" lang="zh-TW" dirty="0">
+                <a:solidFill>
+                  <a:srgbClr val="000000"/>
+                </a:solidFill>
+                <a:latin typeface="Arial Unicode MS"/>
+                <a:ea typeface="Arial Unicode MS"/>
+                <a:cs typeface="Arial Unicode MS"/>
+              </a:rPr>
+              <a:t>沒有任何感測器</a:t>
+            </a:r>
+            <a:r>
+              <a:rPr sz="1000" lang="zh-TW" dirty="0">
+                <a:solidFill>
+                  <a:srgbClr val="000000"/>
+                </a:solidFill>
+                <a:latin typeface="Arial Unicode MS"/>
+                <a:ea typeface="Arial Unicode MS"/>
+                <a:cs typeface="Arial Unicode MS"/>
+              </a:rPr>
+              <a:t>的空窗。
 </a:t>
             </a:r>
           </a:p>
@@ -992,7 +1036,7 @@
                 <a:ea typeface="Arial Unicode MS"/>
                 <a:cs typeface="Arial Unicode MS"/>
               </a:rPr>
-              <a:t>光達不見了。這就是我們剛剛那張圖講的盲區：車頂光達，車身周圍三點五公尺以內完全看不到。
+              <a:t>第三題，一公尺的時候，還有誰？
 </a:t>
             </a:r>
           </a:p>
@@ -1014,51 +1058,7 @@
                 <a:ea typeface="Arial Unicode MS"/>
                 <a:cs typeface="Arial Unicode MS"/>
               </a:rPr>
-              <a:t>請注意這裡有一段</a:t>
-            </a:r>
-            <a:r>
-              <a:rPr sz="1000" b="1" lang="zh-TW" dirty="0">
-                <a:solidFill>
-                  <a:srgbClr val="000000"/>
-                </a:solidFill>
-                <a:latin typeface="Arial Unicode MS"/>
-                <a:ea typeface="Arial Unicode MS"/>
-                <a:cs typeface="Arial Unicode MS"/>
-              </a:rPr>
-              <a:t>接力</a:t>
-            </a:r>
-            <a:r>
-              <a:rPr sz="1000" lang="zh-TW" dirty="0">
-                <a:solidFill>
-                  <a:srgbClr val="000000"/>
-                </a:solidFill>
-                <a:latin typeface="Arial Unicode MS"/>
-                <a:ea typeface="Arial Unicode MS"/>
-                <a:cs typeface="Arial Unicode MS"/>
-              </a:rPr>
-              <a:t>：超音波從四點五公尺開始有，光達到三點五公尺才沒有。中間那一公尺，兩個都在。這是設計出來的，不是巧合——如果超音波只到三公尺，那三到三點五公尺這一段就會是</a:t>
-            </a:r>
-            <a:r>
-              <a:rPr sz="1000" b="1" lang="zh-TW" dirty="0">
-                <a:solidFill>
-                  <a:srgbClr val="000000"/>
-                </a:solidFill>
-                <a:latin typeface="Arial Unicode MS"/>
-                <a:ea typeface="Arial Unicode MS"/>
-                <a:cs typeface="Arial Unicode MS"/>
-              </a:rPr>
-              <a:t>沒有任何感測器</a:t>
-            </a:r>
-            <a:r>
-              <a:rPr sz="1000" lang="zh-TW" dirty="0">
-                <a:solidFill>
-                  <a:srgbClr val="000000"/>
-                </a:solidFill>
-                <a:latin typeface="Arial Unicode MS"/>
-                <a:ea typeface="Arial Unicode MS"/>
-                <a:cs typeface="Arial Unicode MS"/>
-              </a:rPr>
-              <a:t>的空窗。
+              <a:t>超音波、雷達、相機、熱像，就是沒有光達。
 </a:t>
             </a:r>
           </a:p>
@@ -1080,7 +1080,7 @@
                 <a:ea typeface="Arial Unicode MS"/>
                 <a:cs typeface="Arial Unicode MS"/>
               </a:rPr>
-              <a:t>第三題。一公尺的時候，還有誰？
+              <a:t>所以答案是：那顆最貴、點最多、大家最信任的光達，在你腳邊那一圈完全看不到。補上那一圈的，是車上最便宜的超音波，一顆幾百塊。
 </a:t>
             </a:r>
           </a:p>
@@ -1102,7 +1102,7 @@
                 <a:ea typeface="Arial Unicode MS"/>
                 <a:cs typeface="Arial Unicode MS"/>
               </a:rPr>
-              <a:t>（預期答案：超音波、雷達、相機、熱像；就是沒有光達。）
+              <a:t>最後我問全班一句：東西愈靠近車子，是不是愈容易被偵測到？
 </a:t>
             </a:r>
           </a:p>
@@ -1124,51 +1124,7 @@
                 <a:ea typeface="Arial Unicode MS"/>
                 <a:cs typeface="Arial Unicode MS"/>
               </a:rPr>
-              <a:t>所以答案是：那顆最貴、點最多、大家最信任的光達，在你腳邊那一圈完全看不到。補上那一圈的，是車上最便宜的超音波——一顆幾百塊。
-</a:t>
-            </a:r>
-          </a:p>
-          <a:p>
-            <a:pPr algn="l">
-              <a:lnSpc>
-                <a:spcPct val="115000"/>
-              </a:lnSpc>
-              <a:spcAft>
-                <a:spcPts val="500"/>
-              </a:spcAft>
-            </a:pPr>
-            <a:r>
-              <a:rPr sz="1000" lang="zh-TW" dirty="0">
-                <a:solidFill>
-                  <a:srgbClr val="000000"/>
-                </a:solidFill>
-                <a:latin typeface="Arial Unicode MS"/>
-                <a:ea typeface="Arial Unicode MS"/>
-                <a:cs typeface="Arial Unicode MS"/>
-              </a:rPr>
-              <a:t>最後問全班一句：東西愈靠近車子，是不是愈容易被偵測到？
-</a:t>
-            </a:r>
-          </a:p>
-          <a:p>
-            <a:pPr algn="l">
-              <a:lnSpc>
-                <a:spcPct val="115000"/>
-              </a:lnSpc>
-              <a:spcAft>
-                <a:spcPts val="500"/>
-              </a:spcAft>
-            </a:pPr>
-            <a:r>
-              <a:rPr sz="1000" lang="zh-TW" dirty="0">
-                <a:solidFill>
-                  <a:srgbClr val="000000"/>
-                </a:solidFill>
-                <a:latin typeface="Arial Unicode MS"/>
-                <a:ea typeface="Arial Unicode MS"/>
-                <a:cs typeface="Arial Unicode MS"/>
-              </a:rPr>
-              <a:t>（多數人會說是。答案是不一定。遠有遠的問題——點太少；近有近的問題——根本不在視野裡。）
+              <a:t>大部分的人會說是。答案是不一定。遠有遠的問題，點太少；近有近的問題，根本不在視野裡面。
 </a:t>
             </a:r>
           </a:p>
@@ -1333,7 +1289,7 @@
                 <a:ea typeface="Arial Unicode MS"/>
                 <a:cs typeface="Arial Unicode MS"/>
               </a:rPr>
-              <a:t>相機的像素數是固定的，光達每一圈打的點數也是固定的。這叫</a:t>
+              <a:t>相機的像素數是固定的，光達每一圈打的點數也是固定的。這叫做</a:t>
             </a:r>
             <a:r>
               <a:rPr sz="1000" b="1" lang="zh-TW" dirty="0">
@@ -1377,7 +1333,7 @@
                 <a:ea typeface="Arial Unicode MS"/>
                 <a:cs typeface="Arial Unicode MS"/>
               </a:rPr>
-              <a:t>請看圖。兩張圖裡射線的條數</a:t>
+              <a:t>請看圖。兩張圖裡面射線的條數</a:t>
             </a:r>
             <a:r>
               <a:rPr sz="1000" b="1" lang="zh-TW" dirty="0">
@@ -1421,7 +1377,7 @@
                 <a:ea typeface="Arial Unicode MS"/>
                 <a:cs typeface="Arial Unicode MS"/>
               </a:rPr>
-              <a:t>左邊攤在一百二十度裡。三個目標——正前方的行人、左邊的車、右邊的車——全部都在視野裡，一個都沒漏。但你看那些射線之間的縫有多寬。
+              <a:t>左邊攤在一百二十度裡面。三個目標——正前方的行人、左邊的車、右邊的車——全部都在視野裡，一個都沒有漏掉。可是大家看那些射線之間的縫有多寬。
 </a:t>
             </a:r>
           </a:p>
@@ -1443,7 +1399,7 @@
                 <a:ea typeface="Arial Unicode MS"/>
                 <a:cs typeface="Arial Unicode MS"/>
               </a:rPr>
-              <a:t>右邊集中在三十度裡。同樣十五條，密了四倍。可是左右兩台車呢？
+              <a:t>右邊集中在三十度裡面。同樣十五條，密了四倍。可是左右兩台車呢？大家看那兩個灰掉、打了叉的圖示。
 </a:t>
             </a:r>
           </a:p>
@@ -1465,7 +1421,7 @@
                 <a:ea typeface="Arial Unicode MS"/>
                 <a:cs typeface="Arial Unicode MS"/>
               </a:rPr>
-              <a:t>（指給學生看那兩個灰掉的、打叉的圖示。）
+              <a:t>掉出去了，完全看不到。
 </a:t>
             </a:r>
           </a:p>
@@ -1487,7 +1443,7 @@
                 <a:ea typeface="Arial Unicode MS"/>
                 <a:cs typeface="Arial Unicode MS"/>
               </a:rPr>
-              <a:t>掉出去了。完全看不到。
+              <a:t>用數字講更清楚。一千九百二十個像素攤在一百二十度裡面，每一度只分到十六個像素，五十公尺外一個人只佔九個像素。九個像素能看出那是人還是柱子嗎？很勉強。同樣一台相機，把視野縮到三十度，每一度分到六十四個像素，同一個人變成三十六個像素，清清楚楚。
 </a:t>
             </a:r>
           </a:p>
@@ -1509,7 +1465,7 @@
                 <a:ea typeface="Arial Unicode MS"/>
                 <a:cs typeface="Arial Unicode MS"/>
               </a:rPr>
-              <a:t>用數字講更清楚。一千九百二十個像素攤在一百二十度裡，每一度只分到十六個像素，五十公尺外一個人只佔九個像素——九個像素能看出那是人還是柱子嗎？很勉強。同樣的相機把視野縮到三十度，每一度分到六十四個像素，同一個人變成三十六個像素，清清楚楚。
+              <a:t>代價就是圖上那兩台車。
 </a:t>
             </a:r>
           </a:p>
@@ -1531,7 +1487,51 @@
                 <a:ea typeface="Arial Unicode MS"/>
                 <a:cs typeface="Arial Unicode MS"/>
               </a:rPr>
-              <a:t>代價就是圖上那兩台車。
+              <a:t>所以同一份預算，</a:t>
+            </a:r>
+            <a:r>
+              <a:rPr sz="1000" b="1" lang="zh-TW" dirty="0">
+                <a:solidFill>
+                  <a:srgbClr val="000000"/>
+                </a:solidFill>
+                <a:latin typeface="Arial Unicode MS"/>
+                <a:ea typeface="Arial Unicode MS"/>
+                <a:cs typeface="Arial Unicode MS"/>
+              </a:rPr>
+              <a:t>看得廣</a:t>
+            </a:r>
+            <a:r>
+              <a:rPr sz="1000" lang="zh-TW" dirty="0">
+                <a:solidFill>
+                  <a:srgbClr val="000000"/>
+                </a:solidFill>
+                <a:latin typeface="Arial Unicode MS"/>
+                <a:ea typeface="Arial Unicode MS"/>
+                <a:cs typeface="Arial Unicode MS"/>
+              </a:rPr>
+              <a:t>和</a:t>
+            </a:r>
+            <a:r>
+              <a:rPr sz="1000" b="1" lang="zh-TW" dirty="0">
+                <a:solidFill>
+                  <a:srgbClr val="000000"/>
+                </a:solidFill>
+                <a:latin typeface="Arial Unicode MS"/>
+                <a:ea typeface="Arial Unicode MS"/>
+                <a:cs typeface="Arial Unicode MS"/>
+              </a:rPr>
+              <a:t>看得清</a:t>
+            </a:r>
+            <a:r>
+              <a:rPr sz="1000" lang="zh-TW" dirty="0">
+                <a:solidFill>
+                  <a:srgbClr val="000000"/>
+                </a:solidFill>
+                <a:latin typeface="Arial Unicode MS"/>
+                <a:ea typeface="Arial Unicode MS"/>
+                <a:cs typeface="Arial Unicode MS"/>
+              </a:rPr>
+              <a:t>，只能選一個。
 </a:t>
             </a:r>
           </a:p>
@@ -1553,7 +1553,7 @@
                 <a:ea typeface="Arial Unicode MS"/>
                 <a:cs typeface="Arial Unicode MS"/>
               </a:rPr>
-              <a:t>所以同一份預算，</a:t>
+              <a:t>那真車怎麼辦？答案很務實：</a:t>
             </a:r>
             <a:r>
               <a:rPr sz="1000" b="1" lang="zh-TW" dirty="0">
@@ -1564,7 +1564,7 @@
                 <a:ea typeface="Arial Unicode MS"/>
                 <a:cs typeface="Arial Unicode MS"/>
               </a:rPr>
-              <a:t>看得廣</a:t>
+              <a:t>裝好幾顆</a:t>
             </a:r>
             <a:r>
               <a:rPr sz="1000" lang="zh-TW" dirty="0">
@@ -1575,29 +1575,7 @@
                 <a:ea typeface="Arial Unicode MS"/>
                 <a:cs typeface="Arial Unicode MS"/>
               </a:rPr>
-              <a:t>和</a:t>
-            </a:r>
-            <a:r>
-              <a:rPr sz="1000" b="1" lang="zh-TW" dirty="0">
-                <a:solidFill>
-                  <a:srgbClr val="000000"/>
-                </a:solidFill>
-                <a:latin typeface="Arial Unicode MS"/>
-                <a:ea typeface="Arial Unicode MS"/>
-                <a:cs typeface="Arial Unicode MS"/>
-              </a:rPr>
-              <a:t>看得清</a:t>
-            </a:r>
-            <a:r>
-              <a:rPr sz="1000" lang="zh-TW" dirty="0">
-                <a:solidFill>
-                  <a:srgbClr val="000000"/>
-                </a:solidFill>
-                <a:latin typeface="Arial Unicode MS"/>
-                <a:ea typeface="Arial Unicode MS"/>
-                <a:cs typeface="Arial Unicode MS"/>
-              </a:rPr>
-              <a:t>，只能選一個。
+              <a:t>。一顆窄視野的看遠方，專門負責高速公路前方兩百公尺；幾顆廣視野的看近處，負責路口和兩側。各司其職。
 </a:t>
             </a:r>
           </a:p>
@@ -1619,29 +1597,7 @@
                 <a:ea typeface="Arial Unicode MS"/>
                 <a:cs typeface="Arial Unicode MS"/>
               </a:rPr>
-              <a:t>那真車怎麼辦？答案很務實：</a:t>
-            </a:r>
-            <a:r>
-              <a:rPr sz="1000" b="1" lang="zh-TW" dirty="0">
-                <a:solidFill>
-                  <a:srgbClr val="000000"/>
-                </a:solidFill>
-                <a:latin typeface="Arial Unicode MS"/>
-                <a:ea typeface="Arial Unicode MS"/>
-                <a:cs typeface="Arial Unicode MS"/>
-              </a:rPr>
-              <a:t>裝好幾顆</a:t>
-            </a:r>
-            <a:r>
-              <a:rPr sz="1000" lang="zh-TW" dirty="0">
-                <a:solidFill>
-                  <a:srgbClr val="000000"/>
-                </a:solidFill>
-                <a:latin typeface="Arial Unicode MS"/>
-                <a:ea typeface="Arial Unicode MS"/>
-                <a:cs typeface="Arial Unicode MS"/>
-              </a:rPr>
-              <a:t>。一顆窄視野的看遠方，專門負責高速公路前方兩百公尺；幾顆廣視野的看近處，負責路口和兩側。各司其職。
+              <a:t>大家下次看到自駕車的照片，可以數數看它身上有幾顆相機。Waymo 第六代是十三顆。不是他們愛花錢，是因為一顆做不到兩件事。
 </a:t>
             </a:r>
           </a:p>
@@ -1663,29 +1619,7 @@
                 <a:ea typeface="Arial Unicode MS"/>
                 <a:cs typeface="Arial Unicode MS"/>
               </a:rPr>
-              <a:t>大家下次看到自駕車的照片，可以數數看它身上有幾顆相機。Waymo 第六代是十三顆。不是他們愛花錢，是因為一顆做不到兩件事。
-</a:t>
-            </a:r>
-          </a:p>
-          <a:p>
-            <a:pPr algn="l">
-              <a:lnSpc>
-                <a:spcPct val="115000"/>
-              </a:lnSpc>
-              <a:spcAft>
-                <a:spcPts val="500"/>
-              </a:spcAft>
-            </a:pPr>
-            <a:r>
-              <a:rPr sz="1000" lang="zh-TW" dirty="0">
-                <a:solidFill>
-                  <a:srgbClr val="000000"/>
-                </a:solidFill>
-                <a:latin typeface="Arial Unicode MS"/>
-                <a:ea typeface="Arial Unicode MS"/>
-                <a:cs typeface="Arial Unicode MS"/>
-              </a:rPr>
-              <a:t>這也是為什麼感測器配置沒有標準答案——每一家對「要在什麼條件下營運」的答案不一樣，配置就不一樣。</a:t>
+              <a:t>這也是為什麼感測器配置沒有標準答案。每一家對「要在什麼條件下營運」的答案不一樣，配置就不一樣。</a:t>
             </a:r>
           </a:p>
         </p:txBody>
@@ -1806,7 +1740,7 @@
                 <a:ea typeface="Arial Unicode MS"/>
                 <a:cs typeface="Arial Unicode MS"/>
               </a:rPr>
-              <a:t>講到這裡，剛好可以看一支影片，因為這一節算的東西，正是這一行吵了十年的問題。
+              <a:t>講到這裡，剛好可以看一支影片，因為這一節算的東西，正是這一行吵了十年的問題。我們播兩三分鐘就好。
 </a:t>
             </a:r>
           </a:p>
@@ -1828,7 +1762,7 @@
                 <a:ea typeface="Arial Unicode MS"/>
                 <a:cs typeface="Arial Unicode MS"/>
               </a:rPr>
-              <a:t>（建議播 2–3 分鐘。需要網路；沒網路就跳過，直接接下一頁。）
+              <a:t>先看左邊這兩台車，它們代表兩條完全不同的路線。
 </a:t>
             </a:r>
           </a:p>
@@ -1842,6 +1776,17 @@
               </a:spcAft>
             </a:pPr>
             <a:r>
+              <a:rPr sz="1000" b="1" lang="zh-TW" dirty="0">
+                <a:solidFill>
+                  <a:srgbClr val="000000"/>
+                </a:solidFill>
+                <a:latin typeface="Arial Unicode MS"/>
+                <a:ea typeface="Arial Unicode MS"/>
+                <a:cs typeface="Arial Unicode MS"/>
+              </a:rPr>
+              <a:t>上面那台是特斯拉。</a:t>
+            </a:r>
+            <a:r>
               <a:rPr sz="1000" lang="zh-TW" dirty="0">
                 <a:solidFill>
                   <a:srgbClr val="000000"/>
@@ -1850,7 +1795,7 @@
                 <a:ea typeface="Arial Unicode MS"/>
                 <a:cs typeface="Arial Unicode MS"/>
               </a:rPr>
-              <a:t>先看左邊這兩台車，它們代表了兩條完全不同的路線。
+              <a:t>車上只有一種感測器，相機，八顆，車頂前緣、車側、車尾各幾顆，沒有光達。他們的主張是：人類也只用兩隻眼睛就會開車，那電腦為什麼不行？既然相機便宜，就多裝幾顆，把演算法做好。
 </a:t>
             </a:r>
           </a:p>
@@ -1872,7 +1817,7 @@
                 <a:ea typeface="Arial Unicode MS"/>
                 <a:cs typeface="Arial Unicode MS"/>
               </a:rPr>
-              <a:t>上面那台是特斯拉。</a:t>
+              <a:t>下面那台是 Waymo。</a:t>
             </a:r>
             <a:r>
               <a:rPr sz="1000" lang="zh-TW" dirty="0">
@@ -1883,7 +1828,7 @@
                 <a:ea typeface="Arial Unicode MS"/>
                 <a:cs typeface="Arial Unicode MS"/>
               </a:rPr>
-              <a:t>車上只有一種感測器：相機，八顆，車頂前緣、車側、車尾各幾顆。沒有光達。他們的主張是：人類也只用兩隻眼睛就會開車，那電腦為什麼不行？既然相機便宜，就多裝幾顆、把演算法做好。
+              <a:t>大家看車頂上有三種不同顏色的圖示，綠色是光達、藍色是相機、橘色是雷達。二十九顆相機、五顆光達、六顆雷達。他們的主張是：相機的距離是「推」出來的，光達是「量」出來的，安全的事情不要用推的。
 </a:t>
             </a:r>
           </a:p>
@@ -1897,17 +1842,6 @@
               </a:spcAft>
             </a:pPr>
             <a:r>
-              <a:rPr sz="1000" b="1" lang="zh-TW" dirty="0">
-                <a:solidFill>
-                  <a:srgbClr val="000000"/>
-                </a:solidFill>
-                <a:latin typeface="Arial Unicode MS"/>
-                <a:ea typeface="Arial Unicode MS"/>
-                <a:cs typeface="Arial Unicode MS"/>
-              </a:rPr>
-              <a:t>下面那台是 Waymo。</a:t>
-            </a:r>
-            <a:r>
               <a:rPr sz="1000" lang="zh-TW" dirty="0">
                 <a:solidFill>
                   <a:srgbClr val="000000"/>
@@ -1916,7 +1850,7 @@
                 <a:ea typeface="Arial Unicode MS"/>
                 <a:cs typeface="Arial Unicode MS"/>
               </a:rPr>
-              <a:t>你看車頂上有三種不同顏色的圖示——綠色是光達、藍色是相機、橘色是雷達。二十九顆相機、五顆光達、六顆雷達。他們的主張是：相機的距離是「推」出來的，光達是「量」出來的，安全的事情不要用推的。
+              <a:t>這兩組數字是各家公開的配置，資料時點寫在下面那一行，二〇二六年九月。特斯拉不同年份的硬體版本配置不太一樣，Waymo 每一代也在變，所以這是一個時間點的快照，不是永遠不變的事實。
 </a:t>
             </a:r>
           </a:p>
@@ -1938,7 +1872,29 @@
                 <a:ea typeface="Arial Unicode MS"/>
                 <a:cs typeface="Arial Unicode MS"/>
               </a:rPr>
-              <a:t>（這兩組數字是各廠公開的配置，資料時點寫在下面那行：二〇二六年九月。特斯拉不同年份的硬體版本配置不太一樣，Waymo 每一代也在變，所以這是一個時間點的快照，不是永遠不變的事實。）
+              <a:t>請大家注意一件事：</a:t>
+            </a:r>
+            <a:r>
+              <a:rPr sz="1000" b="1" lang="zh-TW" dirty="0">
+                <a:solidFill>
+                  <a:srgbClr val="000000"/>
+                </a:solidFill>
+                <a:latin typeface="Arial Unicode MS"/>
+                <a:ea typeface="Arial Unicode MS"/>
+                <a:cs typeface="Arial Unicode MS"/>
+              </a:rPr>
+              <a:t>這不是「有錢沒錢」的差別，是「要在什麼條件下營運」的差別。</a:t>
+            </a:r>
+            <a:r>
+              <a:rPr sz="1000" lang="zh-TW" dirty="0">
+                <a:solidFill>
+                  <a:srgbClr val="000000"/>
+                </a:solidFill>
+                <a:latin typeface="Arial Unicode MS"/>
+                <a:ea typeface="Arial Unicode MS"/>
+                <a:cs typeface="Arial Unicode MS"/>
+              </a:rPr>
+              <a:t>Waymo 只在畫好高精地圖的幾個城市跑無人計程車，可以把成本攤在營運上；特斯拉要把車賣給全世界的消費者，每多一千塊美金的感測器，乘上幾百萬台就是天文數字。
 </a:t>
             </a:r>
           </a:p>
@@ -1960,29 +1916,7 @@
                 <a:ea typeface="Arial Unicode MS"/>
                 <a:cs typeface="Arial Unicode MS"/>
               </a:rPr>
-              <a:t>請大家注意一件事：</a:t>
-            </a:r>
-            <a:r>
-              <a:rPr sz="1000" b="1" lang="zh-TW" dirty="0">
-                <a:solidFill>
-                  <a:srgbClr val="000000"/>
-                </a:solidFill>
-                <a:latin typeface="Arial Unicode MS"/>
-                <a:ea typeface="Arial Unicode MS"/>
-                <a:cs typeface="Arial Unicode MS"/>
-              </a:rPr>
-              <a:t>這不是「有錢沒錢」的差別，是「要在什麼條件下營運」的差別。</a:t>
-            </a:r>
-            <a:r>
-              <a:rPr sz="1000" lang="zh-TW" dirty="0">
-                <a:solidFill>
-                  <a:srgbClr val="000000"/>
-                </a:solidFill>
-                <a:latin typeface="Arial Unicode MS"/>
-                <a:ea typeface="Arial Unicode MS"/>
-                <a:cs typeface="Arial Unicode MS"/>
-              </a:rPr>
-              <a:t>Waymo 只在畫好高精地圖的幾個城市跑無人計程車，可以把成本攤在營運上；特斯拉要把車賣給全世界的消費者，每多一千塊美金的感測器，乘上幾百萬台就是天文數字。
+              <a:t>看的時候請帶著今天算過的數字。
 </a:t>
             </a:r>
           </a:p>
@@ -2004,7 +1938,7 @@
                 <a:ea typeface="Arial Unicode MS"/>
                 <a:cs typeface="Arial Unicode MS"/>
               </a:rPr>
-              <a:t>看的時候請帶著今天算過的數字。
+              <a:t>相機派的論點是：便宜、解析度高、跟人眼原理一樣，而且路上跑的車多，資料好收集，拿去訓練。
 </a:t>
             </a:r>
           </a:p>
@@ -2026,7 +1960,7 @@
                 <a:ea typeface="Arial Unicode MS"/>
                 <a:cs typeface="Arial Unicode MS"/>
               </a:rPr>
-              <a:t>相機派的論點：便宜、解析度高、跟人眼原理一樣、而且路上跑的車多，資料好收集拿去訓練。
+              <a:t>光達派的論點是：距離直接量出來，不用假設地面是平的，也不受光線影響。
 </a:t>
             </a:r>
           </a:p>
@@ -2048,7 +1982,29 @@
                 <a:ea typeface="Arial Unicode MS"/>
                 <a:cs typeface="Arial Unicode MS"/>
               </a:rPr>
-              <a:t>光達派的論點：距離直接量出來，不用假設地面是平的，也不受光線影響。
+              <a:t>我要大家想的是第三個問題：</a:t>
+            </a:r>
+            <a:r>
+              <a:rPr sz="1000" b="1" lang="zh-TW" dirty="0">
+                <a:solidFill>
+                  <a:srgbClr val="000000"/>
+                </a:solidFill>
+                <a:latin typeface="Arial Unicode MS"/>
+                <a:ea typeface="Arial Unicode MS"/>
+                <a:cs typeface="Arial Unicode MS"/>
+              </a:rPr>
+              <a:t>他們吵的到底是精度，還是錢？</a:t>
+            </a:r>
+            <a:r>
+              <a:rPr sz="1000" lang="zh-TW" dirty="0">
+                <a:solidFill>
+                  <a:srgbClr val="000000"/>
+                </a:solidFill>
+                <a:latin typeface="Arial Unicode MS"/>
+                <a:ea typeface="Arial Unicode MS"/>
+                <a:cs typeface="Arial Unicode MS"/>
+              </a:rPr>
+              <a:t>
 </a:t>
             </a:r>
           </a:p>
@@ -2070,29 +2026,7 @@
                 <a:ea typeface="Arial Unicode MS"/>
                 <a:cs typeface="Arial Unicode MS"/>
               </a:rPr>
-              <a:t>我要大家想的是第三個問題：</a:t>
-            </a:r>
-            <a:r>
-              <a:rPr sz="1000" b="1" lang="zh-TW" dirty="0">
-                <a:solidFill>
-                  <a:srgbClr val="000000"/>
-                </a:solidFill>
-                <a:latin typeface="Arial Unicode MS"/>
-                <a:ea typeface="Arial Unicode MS"/>
-                <a:cs typeface="Arial Unicode MS"/>
-              </a:rPr>
-              <a:t>他們吵的到底是精度，還是錢？</a:t>
-            </a:r>
-            <a:r>
-              <a:rPr sz="1000" lang="zh-TW" dirty="0">
-                <a:solidFill>
-                  <a:srgbClr val="000000"/>
-                </a:solidFill>
-                <a:latin typeface="Arial Unicode MS"/>
-                <a:ea typeface="Arial Unicode MS"/>
-                <a:cs typeface="Arial Unicode MS"/>
-              </a:rPr>
-              <a:t>
+              <a:t>答案是兩個都有。光達現在便宜很多了，但還是比相機貴；另一方面，相機的誤差可以靠演算法和多鏡頭改善，不是只能認命。
 </a:t>
             </a:r>
           </a:p>
@@ -2114,7 +2048,29 @@
                 <a:ea typeface="Arial Unicode MS"/>
                 <a:cs typeface="Arial Unicode MS"/>
               </a:rPr>
-              <a:t>（預期討論：兩者都有。光達現在便宜很多了，但還是比相機貴；另一方面，相機的誤差可以靠演算法和多鏡頭改善，不是只能認命。）
+              <a:t>看完以後回頭看我們剛剛那張表。解析度加倍要花錢，視野收窄要多裝一顆，裝高會多出盲區，沒有一條路是免費的。這一行到現在還沒有共識，不是因為誰笨，是因為</a:t>
+            </a:r>
+            <a:r>
+              <a:rPr sz="1000" b="1" lang="zh-TW" dirty="0">
+                <a:solidFill>
+                  <a:srgbClr val="000000"/>
+                </a:solidFill>
+                <a:latin typeface="Arial Unicode MS"/>
+                <a:ea typeface="Arial Unicode MS"/>
+                <a:cs typeface="Arial Unicode MS"/>
+              </a:rPr>
+              <a:t>每一條路的代價不一樣，而且他們對「要在什麼條件下營運」的答案不一樣</a:t>
+            </a:r>
+            <a:r>
+              <a:rPr sz="1000" lang="zh-TW" dirty="0">
+                <a:solidFill>
+                  <a:srgbClr val="000000"/>
+                </a:solidFill>
+                <a:latin typeface="Arial Unicode MS"/>
+                <a:ea typeface="Arial Unicode MS"/>
+                <a:cs typeface="Arial Unicode MS"/>
+              </a:rPr>
+              <a:t>。
 </a:t>
             </a:r>
           </a:p>
@@ -2136,51 +2092,7 @@
                 <a:ea typeface="Arial Unicode MS"/>
                 <a:cs typeface="Arial Unicode MS"/>
               </a:rPr>
-              <a:t>看完以後回頭看我們剛剛那張表。解析度加倍要花錢，視野收窄要多裝一顆，裝高會多出盲區——沒有一條路是免費的。這一行到現在還沒有共識，不是因為誰笨，是因為</a:t>
-            </a:r>
-            <a:r>
-              <a:rPr sz="1000" b="1" lang="zh-TW" dirty="0">
-                <a:solidFill>
-                  <a:srgbClr val="000000"/>
-                </a:solidFill>
-                <a:latin typeface="Arial Unicode MS"/>
-                <a:ea typeface="Arial Unicode MS"/>
-                <a:cs typeface="Arial Unicode MS"/>
-              </a:rPr>
-              <a:t>每一條路的代價不一樣，而且他們對「要在什麼條件下營運」的答案不一樣</a:t>
-            </a:r>
-            <a:r>
-              <a:rPr sz="1000" lang="zh-TW" dirty="0">
-                <a:solidFill>
-                  <a:srgbClr val="000000"/>
-                </a:solidFill>
-                <a:latin typeface="Arial Unicode MS"/>
-                <a:ea typeface="Arial Unicode MS"/>
-                <a:cs typeface="Arial Unicode MS"/>
-              </a:rPr>
-              <a:t>。
-</a:t>
-            </a:r>
-          </a:p>
-          <a:p>
-            <a:pPr algn="l">
-              <a:lnSpc>
-                <a:spcPct val="115000"/>
-              </a:lnSpc>
-              <a:spcAft>
-                <a:spcPts val="500"/>
-              </a:spcAft>
-            </a:pPr>
-            <a:r>
-              <a:rPr sz="1000" lang="zh-TW" dirty="0">
-                <a:solidFill>
-                  <a:srgbClr val="000000"/>
-                </a:solidFill>
-                <a:latin typeface="Arial Unicode MS"/>
-                <a:ea typeface="Arial Unicode MS"/>
-                <a:cs typeface="Arial Unicode MS"/>
-              </a:rPr>
-              <a:t>這個問題第三節講完 ODD 之後，你們會更有感覺。</a:t>
+              <a:t>這個問題第三節講完 ODD 之後，大家會更有感覺。</a:t>
             </a:r>
           </a:p>
         </p:txBody>
@@ -2301,7 +2213,7 @@
                 <a:ea typeface="Arial Unicode MS"/>
                 <a:cs typeface="Arial Unicode MS"/>
               </a:rPr>
-              <a:t>最後一個參數，跟前面都不一樣——它不是規格，是</a:t>
+              <a:t>最後一個參數，跟前面都不一樣。它不是規格，是</a:t>
             </a:r>
             <a:r>
               <a:rPr sz="1000" b="1" lang="zh-TW" dirty="0">
@@ -2367,7 +2279,7 @@
                 <a:ea typeface="Arial Unicode MS"/>
                 <a:cs typeface="Arial Unicode MS"/>
               </a:rPr>
-              <a:t>先看那條紅線。光達的垂直視野有一個下緣，最低的那一條射線會朝斜下方射出去，打到地面。從車頭到那個落地點之間——就是圖上紅色那一段——光達什麼都看不到。這就是盲區。
+              <a:t>先看那條紅線。光達的垂直視野有一個下緣，最低的那一條射線會朝斜下方射出去，打到地面。從車頭到那個落地點之間，就是圖上紅色那一段，光達什麼都看不到。這就是盲區。
 </a:t>
             </a:r>
           </a:p>
@@ -2400,7 +2312,7 @@
                 <a:ea typeface="Arial Unicode MS"/>
                 <a:cs typeface="Arial Unicode MS"/>
               </a:rPr>
-              <a:t>盲區不是地上那一條線，是紅線以下的那整個三角形</a:t>
+              <a:t>盲區不是地上那一條線，是紅線以下的那一整個三角形。</a:t>
             </a:r>
             <a:r>
               <a:rPr sz="1000" lang="zh-TW" dirty="0">
@@ -2411,7 +2323,7 @@
                 <a:ea typeface="Arial Unicode MS"/>
                 <a:cs typeface="Arial Unicode MS"/>
               </a:rPr>
-              <a:t>。紅線以下、地面以上、車身以外，這一整塊立體的空間，光達通通看不到。所以不管那個小孩是站著、蹲著還是趴著，只要他在這個三角形裡面，光達就是抓不到他。
+              <a:t>紅線以下、地面以上、車身以外，這一整塊立體的空間，光達通通看不到。所以不管那個小孩是站著、蹲著還是趴著，只要他在這個三角形裡面，光達就是抓不到他。
 </a:t>
             </a:r>
           </a:p>
@@ -2433,7 +2345,7 @@
                 <a:ea typeface="Arial Unicode MS"/>
                 <a:cs typeface="Arial Unicode MS"/>
               </a:rPr>
-              <a:t>（如果把車轉一圈來看，這個三角形其實是繞著車子一圈的，像一條看不見的裙子。工具的俯視畫面上，那個紅色虛線圓圈就是它的邊界。）
+              <a:t>如果把車轉一圈來看，這個三角形其實是繞著車子一圈的，像一條看不見的裙子。工具的俯視畫面上，那個紅色虛線圓圈就是它的邊界。
 </a:t>
             </a:r>
           </a:p>
@@ -2466,7 +2378,7 @@
                 <a:ea typeface="Arial Unicode MS"/>
                 <a:cs typeface="Arial Unicode MS"/>
               </a:rPr>
-              <a:t>裝得愈高，最低那條線要飛得愈遠才落地</a:t>
+              <a:t>裝得愈高，最低那一條線就要飛得愈遠才落地</a:t>
             </a:r>
             <a:r>
               <a:rPr sz="1000" lang="zh-TW" dirty="0">
@@ -2609,7 +2521,7 @@
                 <a:ea typeface="Arial Unicode MS"/>
                 <a:cs typeface="Arial Unicode MS"/>
               </a:rPr>
-              <a:t>請注意這裡要講精確一點：不是「兩公尺的小孩看不到」，而是</a:t>
+              <a:t>請注意這裡要講精確一點。不是「兩公尺的小孩看不到」，而是</a:t>
             </a:r>
             <a:r>
               <a:rPr sz="1000" b="1" lang="zh-TW" dirty="0">
@@ -2631,7 +2543,7 @@
                 <a:ea typeface="Arial Unicode MS"/>
                 <a:cs typeface="Arial Unicode MS"/>
               </a:rPr>
-              <a:t>。圖上放兩公尺，只是挑一個具體的位置讓大家看。你把他放在三公尺、一公尺、甚至貼著保險桿，結果都一樣——全部在三角形裡面。
+              <a:t>。圖上放兩公尺，只是挑一個具體的位置讓大家看。你把他放在三公尺、一公尺、甚至貼著保險桿，結果都一樣，全部在三角形裡面。
 </a:t>
             </a:r>
           </a:p>
@@ -2653,7 +2565,7 @@
                 <a:ea typeface="Arial Unicode MS"/>
                 <a:cs typeface="Arial Unicode MS"/>
               </a:rPr>
-              <a:t>（停一下，讓全班看清楚這兩個顏色的差別。）
+              <a:t>大家看清楚這兩個顏色的差別。同一顆光達、同一個小孩、同樣的距離，只因為光達裝高了一公尺，就從看得到變成完全看不到。這是真實世界發生過的事故型態——車子起步的時候撞到蹲在車頭前的小孩，駕駛和感測器都沒有看到他。
 </a:t>
             </a:r>
           </a:p>
@@ -2675,7 +2587,7 @@
                 <a:ea typeface="Arial Unicode MS"/>
                 <a:cs typeface="Arial Unicode MS"/>
               </a:rPr>
-              <a:t>同一顆光達、同一個小孩、同樣的距離，只因為光達裝高了一公尺，就從看得到變成完全看不到。這是真實世界發生過的事故型態——車子起步的時候撞到蹲在車頭前的小孩，駕駛和感測器都沒有看到他。
+              <a:t>那是不是裝車頭比較好？
 </a:t>
             </a:r>
           </a:p>
@@ -2697,7 +2609,29 @@
                 <a:ea typeface="Arial Unicode MS"/>
                 <a:cs typeface="Arial Unicode MS"/>
               </a:rPr>
-              <a:t>那是不是車頭比較好？
+              <a:t>不見得。裝車頭有兩個問題。第一，前面一台車擋著，你就什麼都看不到了；裝車頂可以</a:t>
+            </a:r>
+            <a:r>
+              <a:rPr sz="1000" b="1" lang="zh-TW" dirty="0">
+                <a:solidFill>
+                  <a:srgbClr val="000000"/>
+                </a:solidFill>
+                <a:latin typeface="Arial Unicode MS"/>
+                <a:ea typeface="Arial Unicode MS"/>
+                <a:cs typeface="Arial Unicode MS"/>
+              </a:rPr>
+              <a:t>越過</a:t>
+            </a:r>
+            <a:r>
+              <a:rPr sz="1000" lang="zh-TW" dirty="0">
+                <a:solidFill>
+                  <a:srgbClr val="000000"/>
+                </a:solidFill>
+                <a:latin typeface="Arial Unicode MS"/>
+                <a:ea typeface="Arial Unicode MS"/>
+                <a:cs typeface="Arial Unicode MS"/>
+              </a:rPr>
+              <a:t>前車看得更遠。第二，車頭離地面近，往前看的角度很平，遠處的地面糊成一片——就是我們剛剛講相機安裝高度的那個道理，光達也一樣。
 </a:t>
             </a:r>
           </a:p>
@@ -2719,7 +2653,7 @@
                 <a:ea typeface="Arial Unicode MS"/>
                 <a:cs typeface="Arial Unicode MS"/>
               </a:rPr>
-              <a:t>（等學生回答。預期會有人說對。）
+              <a:t>所以車頂和車頭各有各的問題，沒有絕對的對錯。
 </a:t>
             </a:r>
           </a:p>
@@ -2741,7 +2675,7 @@
                 <a:ea typeface="Arial Unicode MS"/>
                 <a:cs typeface="Arial Unicode MS"/>
               </a:rPr>
-              <a:t>不見得。裝車頭有兩個問題。第一，前面一台車擋著，你就什麼都看不到了；裝車頂可以</a:t>
+              <a:t>那近距離那一圈盲區怎麼辦？答案在圖的最下面：</a:t>
             </a:r>
             <a:r>
               <a:rPr sz="1000" b="1" lang="zh-TW" dirty="0">
@@ -2752,7 +2686,7 @@
                 <a:ea typeface="Arial Unicode MS"/>
                 <a:cs typeface="Arial Unicode MS"/>
               </a:rPr>
-              <a:t>越過</a:t>
+              <a:t>所以才需要超音波。</a:t>
             </a:r>
             <a:r>
               <a:rPr sz="1000" lang="zh-TW" dirty="0">
@@ -2763,7 +2697,7 @@
                 <a:ea typeface="Arial Unicode MS"/>
                 <a:cs typeface="Arial Unicode MS"/>
               </a:rPr>
-              <a:t>前車看更遠。第二，車頭離地面近，往前看的角度很平，遠處的地面糊成一片——就是我們剛剛講相機安裝高度那個道理，光達也一樣。
+              <a:t>超音波只有幾公尺，剛好補的就是這一圈。
 </a:t>
             </a:r>
           </a:p>
@@ -2785,7 +2719,7 @@
                 <a:ea typeface="Arial Unicode MS"/>
                 <a:cs typeface="Arial Unicode MS"/>
               </a:rPr>
-              <a:t>所以車頂和車頭各有各的問題，沒有絕對的對錯。
+              <a:t>我們現場做一次，兩分鐘。請把行人拖到一公尺以內。光達會出現紅字，寫「落在近距離盲區內，三點五公尺」，這時候唯一還讀得出距離的是超音波。接著把「安裝位置」那條滑桿從一改成零，光達就回來了，而且卡片上的盲區數字會從三點五變成零點八，畫面上那個紅色虛線圈也會跟著縮小。
 </a:t>
             </a:r>
           </a:p>
@@ -2807,29 +2741,7 @@
                 <a:ea typeface="Arial Unicode MS"/>
                 <a:cs typeface="Arial Unicode MS"/>
               </a:rPr>
-              <a:t>那近距離那圈盲區怎麼辦？答案在圖的最下面：</a:t>
-            </a:r>
-            <a:r>
-              <a:rPr sz="1000" b="1" lang="zh-TW" dirty="0">
-                <a:solidFill>
-                  <a:srgbClr val="000000"/>
-                </a:solidFill>
-                <a:latin typeface="Arial Unicode MS"/>
-                <a:ea typeface="Arial Unicode MS"/>
-                <a:cs typeface="Arial Unicode MS"/>
-              </a:rPr>
-              <a:t>所以才需要超音波</a:t>
-            </a:r>
-            <a:r>
-              <a:rPr sz="1000" lang="zh-TW" dirty="0">
-                <a:solidFill>
-                  <a:srgbClr val="000000"/>
-                </a:solidFill>
-                <a:latin typeface="Arial Unicode MS"/>
-                <a:ea typeface="Arial Unicode MS"/>
-                <a:cs typeface="Arial Unicode MS"/>
-              </a:rPr>
-              <a:t>。超音波只有幾公尺，剛好補的就是這一圈。
+              <a:t>拖之前先讓大家猜一下：東西離車子愈近，是不是愈容易被偵測到？大部分的人會說是。拖進去就知道不是。
 </a:t>
             </a:r>
           </a:p>
@@ -2851,7 +2763,7 @@
                 <a:ea typeface="Arial Unicode MS"/>
                 <a:cs typeface="Arial Unicode MS"/>
               </a:rPr>
-              <a:t>（現場示範，約兩分鐘：把行人拖到 1 公尺以內。光達會出現紅字「落在近距離盲區內（3.5 m）」，這時唯一還讀得出距離的是超音波。接著把「安裝位置」滑桿從 1 改成 0，光達就回來了，而且卡片上的盲區數字會從三點五變成零點八，畫面上那個紅色虛線圈也會縮小。）
+              <a:t>這就是為什麼感測器要一整套，而不是挑一個最好的。
 </a:t>
             </a:r>
           </a:p>
@@ -2873,51 +2785,7 @@
                 <a:ea typeface="Arial Unicode MS"/>
                 <a:cs typeface="Arial Unicode MS"/>
               </a:rPr>
-              <a:t>先讓全班猜：東西離車子愈近，是不是愈容易被偵測到？多數人會說是。拖進去就知道不是。
-</a:t>
-            </a:r>
-          </a:p>
-          <a:p>
-            <a:pPr algn="l">
-              <a:lnSpc>
-                <a:spcPct val="115000"/>
-              </a:lnSpc>
-              <a:spcAft>
-                <a:spcPts val="500"/>
-              </a:spcAft>
-            </a:pPr>
-            <a:r>
-              <a:rPr sz="1000" lang="zh-TW" dirty="0">
-                <a:solidFill>
-                  <a:srgbClr val="000000"/>
-                </a:solidFill>
-                <a:latin typeface="Arial Unicode MS"/>
-                <a:ea typeface="Arial Unicode MS"/>
-                <a:cs typeface="Arial Unicode MS"/>
-              </a:rPr>
-              <a:t>這就是為什麼感測器要一整套，而不是挑一個最好的。
-</a:t>
-            </a:r>
-          </a:p>
-          <a:p>
-            <a:pPr algn="l">
-              <a:lnSpc>
-                <a:spcPct val="115000"/>
-              </a:lnSpc>
-              <a:spcAft>
-                <a:spcPts val="500"/>
-              </a:spcAft>
-            </a:pPr>
-            <a:r>
-              <a:rPr sz="1000" lang="zh-TW" dirty="0">
-                <a:solidFill>
-                  <a:srgbClr val="000000"/>
-                </a:solidFill>
-                <a:latin typeface="Arial Unicode MS"/>
-                <a:ea typeface="Arial Unicode MS"/>
-                <a:cs typeface="Arial Unicode MS"/>
-              </a:rPr>
-              <a:t>下一節我們要加進最後一個變數——天氣。今天算的所有數字，全部是晴天。</a:t>
+              <a:t>下一節我們要加進最後一個變數，天氣。今天算的所有數字，全部是晴天。</a:t>
             </a:r>
           </a:p>
         </p:txBody>
@@ -3026,11 +2894,11 @@
                 <a:spcPct val="115000"/>
               </a:lnSpc>
               <a:spcAft>
-                <a:spcPts val="500"/>
+                <a:spcPts val="525"/>
               </a:spcAft>
             </a:pPr>
             <a:r>
-              <a:rPr sz="1000" lang="zh-TW" dirty="0">
+              <a:rPr sz="1050" lang="zh-TW" dirty="0">
                 <a:solidFill>
                   <a:srgbClr val="000000"/>
                 </a:solidFill>
@@ -3048,33 +2916,11 @@
                 <a:spcPct val="115000"/>
               </a:lnSpc>
               <a:spcAft>
-                <a:spcPts val="500"/>
+                <a:spcPts val="525"/>
               </a:spcAft>
             </a:pPr>
             <a:r>
-              <a:rPr sz="1000" lang="zh-TW" dirty="0">
-                <a:solidFill>
-                  <a:srgbClr val="000000"/>
-                </a:solidFill>
-                <a:latin typeface="Arial Unicode MS"/>
-                <a:ea typeface="Arial Unicode MS"/>
-                <a:cs typeface="Arial Unicode MS"/>
-              </a:rPr>
-              <a:t>（預期讀值：大人 28 點、小孩 12 點、機車 49 點、汽車 102 點、號誌 12 點。熱像的像素也一起唸：大人 20、小孩 13、汽車 18。）
-</a:t>
-            </a:r>
-          </a:p>
-          <a:p>
-            <a:pPr algn="l">
-              <a:lnSpc>
-                <a:spcPct val="115000"/>
-              </a:lnSpc>
-              <a:spcAft>
-                <a:spcPts val="500"/>
-              </a:spcAft>
-            </a:pPr>
-            <a:r>
-              <a:rPr sz="1000" lang="zh-TW" dirty="0">
+              <a:rPr sz="1050" lang="zh-TW" dirty="0">
                 <a:solidFill>
                   <a:srgbClr val="000000"/>
                 </a:solidFill>
@@ -3092,33 +2938,11 @@
                 <a:spcPct val="115000"/>
               </a:lnSpc>
               <a:spcAft>
-                <a:spcPts val="500"/>
+                <a:spcPts val="525"/>
               </a:spcAft>
             </a:pPr>
             <a:r>
-              <a:rPr sz="1000" lang="zh-TW" dirty="0">
-                <a:solidFill>
-                  <a:srgbClr val="000000"/>
-                </a:solidFill>
-                <a:latin typeface="Arial Unicode MS"/>
-                <a:ea typeface="Arial Unicode MS"/>
-                <a:cs typeface="Arial Unicode MS"/>
-              </a:rPr>
-              <a:t>（停一下。）
-</a:t>
-            </a:r>
-          </a:p>
-          <a:p>
-            <a:pPr algn="l">
-              <a:lnSpc>
-                <a:spcPct val="115000"/>
-              </a:lnSpc>
-              <a:spcAft>
-                <a:spcPts val="500"/>
-              </a:spcAft>
-            </a:pPr>
-            <a:r>
-              <a:rPr sz="1000" lang="zh-TW" dirty="0">
+              <a:rPr sz="1050" lang="zh-TW" dirty="0">
                 <a:solidFill>
                   <a:srgbClr val="000000"/>
                 </a:solidFill>
@@ -3129,7 +2953,7 @@
               <a:t>少了一半以上。為什麼？因為小孩在工具裡是零點三五公尺寬、一點一公尺高，大人是零點五乘一點七。寬度和高度都小，兩個方向一起縮——又是我們今天講了一整節的那件事，</a:t>
             </a:r>
             <a:r>
-              <a:rPr sz="1000" b="1" lang="zh-TW" dirty="0">
+              <a:rPr sz="1050" b="1" lang="zh-TW" dirty="0">
                 <a:solidFill>
                   <a:srgbClr val="000000"/>
                 </a:solidFill>
@@ -3140,7 +2964,7 @@
               <a:t>兩個方向同時縮，數量掉得特別快</a:t>
             </a:r>
             <a:r>
-              <a:rPr sz="1000" lang="zh-TW" dirty="0">
+              <a:rPr sz="1050" lang="zh-TW" dirty="0">
                 <a:solidFill>
                   <a:srgbClr val="000000"/>
                 </a:solidFill>
@@ -3158,22 +2982,22 @@
                 <a:spcPct val="115000"/>
               </a:lnSpc>
               <a:spcAft>
-                <a:spcPts val="500"/>
+                <a:spcPts val="525"/>
               </a:spcAft>
             </a:pPr>
             <a:r>
-              <a:rPr sz="1000" lang="zh-TW" dirty="0">
-                <a:solidFill>
-                  <a:srgbClr val="000000"/>
-                </a:solidFill>
-                <a:latin typeface="Arial Unicode MS"/>
-                <a:ea typeface="Arial Unicode MS"/>
-                <a:cs typeface="Arial Unicode MS"/>
-              </a:rPr>
-              <a:t>汽車是一百零二點，公車更多。所以在光達眼裡，車子是很明顯的東西，人是模糊的東西，</a:t>
-            </a:r>
-            <a:r>
-              <a:rPr sz="1000" b="1" lang="zh-TW" dirty="0">
+              <a:rPr sz="1050" lang="zh-TW" dirty="0">
+                <a:solidFill>
+                  <a:srgbClr val="000000"/>
+                </a:solidFill>
+                <a:latin typeface="Arial Unicode MS"/>
+                <a:ea typeface="Arial Unicode MS"/>
+                <a:cs typeface="Arial Unicode MS"/>
+              </a:rPr>
+              <a:t>機車四十九點，汽車一百零二點，公車更多。所以在光達眼裡，車子是很明顯的東西，人是模糊的東西，</a:t>
+            </a:r>
+            <a:r>
+              <a:rPr sz="1050" b="1" lang="zh-TW" dirty="0">
                 <a:solidFill>
                   <a:srgbClr val="000000"/>
                 </a:solidFill>
@@ -3184,7 +3008,7 @@
               <a:t>小孩是最模糊的東西</a:t>
             </a:r>
             <a:r>
-              <a:rPr sz="1000" lang="zh-TW" dirty="0">
+              <a:rPr sz="1050" lang="zh-TW" dirty="0">
                 <a:solidFill>
                   <a:srgbClr val="000000"/>
                 </a:solidFill>
@@ -3202,19 +3026,19 @@
                 <a:spcPct val="115000"/>
               </a:lnSpc>
               <a:spcAft>
-                <a:spcPts val="500"/>
+                <a:spcPts val="525"/>
               </a:spcAft>
             </a:pPr>
             <a:r>
-              <a:rPr sz="1000" lang="zh-TW" dirty="0">
-                <a:solidFill>
-                  <a:srgbClr val="000000"/>
-                </a:solidFill>
-                <a:latin typeface="Arial Unicode MS"/>
-                <a:ea typeface="Arial Unicode MS"/>
-                <a:cs typeface="Arial Unicode MS"/>
-              </a:rPr>
-              <a:t>第三題：誰最危險？
+              <a:rPr sz="1050" lang="zh-TW" dirty="0">
+                <a:solidFill>
+                  <a:srgbClr val="000000"/>
+                </a:solidFill>
+                <a:latin typeface="Arial Unicode MS"/>
+                <a:ea typeface="Arial Unicode MS"/>
+                <a:cs typeface="Arial Unicode MS"/>
+              </a:rPr>
+              <a:t>熱像也一起唸：大人二十像素、小孩十三像素、汽車十八像素。
 </a:t>
             </a:r>
           </a:p>
@@ -3224,19 +3048,19 @@
                 <a:spcPct val="115000"/>
               </a:lnSpc>
               <a:spcAft>
-                <a:spcPts val="500"/>
+                <a:spcPts val="525"/>
               </a:spcAft>
             </a:pPr>
             <a:r>
-              <a:rPr sz="1000" lang="zh-TW" dirty="0">
-                <a:solidFill>
-                  <a:srgbClr val="000000"/>
-                </a:solidFill>
-                <a:latin typeface="Arial Unicode MS"/>
-                <a:ea typeface="Arial Unicode MS"/>
-                <a:cs typeface="Arial Unicode MS"/>
-              </a:rPr>
-              <a:t>（預期答案：小孩。）
+              <a:rPr sz="1050" lang="zh-TW" dirty="0">
+                <a:solidFill>
+                  <a:srgbClr val="000000"/>
+                </a:solidFill>
+                <a:latin typeface="Arial Unicode MS"/>
+                <a:ea typeface="Arial Unicode MS"/>
+                <a:cs typeface="Arial Unicode MS"/>
+              </a:rPr>
+              <a:t>第三題，誰最危險？
 </a:t>
             </a:r>
           </a:p>
@@ -3246,22 +3070,22 @@
                 <a:spcPct val="115000"/>
               </a:lnSpc>
               <a:spcAft>
-                <a:spcPts val="500"/>
+                <a:spcPts val="525"/>
               </a:spcAft>
             </a:pPr>
             <a:r>
-              <a:rPr sz="1000" lang="zh-TW" dirty="0">
-                <a:solidFill>
-                  <a:srgbClr val="000000"/>
-                </a:solidFill>
-                <a:latin typeface="Arial Unicode MS"/>
-                <a:ea typeface="Arial Unicode MS"/>
-                <a:cs typeface="Arial Unicode MS"/>
-              </a:rPr>
-              <a:t>對，而且原因不只是點數少。請大家想一想：感測器的規格、測試的標準、工程師在辦公室裡驗收用的那個假人，大部分是照著</a:t>
-            </a:r>
-            <a:r>
-              <a:rPr sz="1000" b="1" lang="zh-TW" dirty="0">
+              <a:rPr sz="1050" lang="zh-TW" dirty="0">
+                <a:solidFill>
+                  <a:srgbClr val="000000"/>
+                </a:solidFill>
+                <a:latin typeface="Arial Unicode MS"/>
+                <a:ea typeface="Arial Unicode MS"/>
+                <a:cs typeface="Arial Unicode MS"/>
+              </a:rPr>
+              <a:t>小孩。而且原因不只是點數少。請大家想一想：感測器的規格、測試的標準、工程師在辦公室裡驗收用的那個假人，大部分是照著</a:t>
+            </a:r>
+            <a:r>
+              <a:rPr sz="1050" b="1" lang="zh-TW" dirty="0">
                 <a:solidFill>
                   <a:srgbClr val="000000"/>
                 </a:solidFill>
@@ -3272,15 +3096,15 @@
               <a:t>成年人</a:t>
             </a:r>
             <a:r>
-              <a:rPr sz="1000" lang="zh-TW" dirty="0">
-                <a:solidFill>
-                  <a:srgbClr val="000000"/>
-                </a:solidFill>
-                <a:latin typeface="Arial Unicode MS"/>
-                <a:ea typeface="Arial Unicode MS"/>
-                <a:cs typeface="Arial Unicode MS"/>
-              </a:rPr>
-              <a:t>的尺寸訂的。小孩比較矮、比較窄、移動路線比較難預測，而且常常從停放的車子中間突然衝出來——那個位置剛好是遮蔽最嚴重的地方。
+              <a:rPr sz="1050" lang="zh-TW" dirty="0">
+                <a:solidFill>
+                  <a:srgbClr val="000000"/>
+                </a:solidFill>
+                <a:latin typeface="Arial Unicode MS"/>
+                <a:ea typeface="Arial Unicode MS"/>
+                <a:cs typeface="Arial Unicode MS"/>
+              </a:rPr>
+              <a:t>的尺寸訂的。小孩比較矮、比較窄、移動路線比較難預測，而且常常從停放的車子中間突然衝出來，那個位置剛好是遮蔽最嚴重的地方。
 </a:t>
             </a:r>
           </a:p>
@@ -3290,19 +3114,19 @@
                 <a:spcPct val="115000"/>
               </a:lnSpc>
               <a:spcAft>
-                <a:spcPts val="500"/>
+                <a:spcPts val="525"/>
               </a:spcAft>
             </a:pPr>
             <a:r>
-              <a:rPr sz="1000" lang="zh-TW" dirty="0">
-                <a:solidFill>
-                  <a:srgbClr val="000000"/>
-                </a:solidFill>
-                <a:latin typeface="Arial Unicode MS"/>
-                <a:ea typeface="Arial Unicode MS"/>
-                <a:cs typeface="Arial Unicode MS"/>
-              </a:rPr>
-              <a:t>這不是工具裡的數字遊戲，這是真實的行人偵測難題。歐盟的新車安全評鑑這幾年就特別加考「兒童從車陣中衝出」這個情境，就是因為原本的測試抓不到這種狀況。
+              <a:rPr sz="1050" lang="zh-TW" dirty="0">
+                <a:solidFill>
+                  <a:srgbClr val="000000"/>
+                </a:solidFill>
+                <a:latin typeface="Arial Unicode MS"/>
+                <a:ea typeface="Arial Unicode MS"/>
+                <a:cs typeface="Arial Unicode MS"/>
+              </a:rPr>
+              <a:t>這不是工具裡面的數字遊戲，這是真實的行人偵測難題。歐盟的新車安全評鑑這幾年就特別加考「兒童從車陣中衝出」這個情境，就是因為原本的測試抓不到這種狀況。
 </a:t>
             </a:r>
           </a:p>
@@ -3312,19 +3136,19 @@
                 <a:spcPct val="115000"/>
               </a:lnSpc>
               <a:spcAft>
-                <a:spcPts val="500"/>
+                <a:spcPts val="525"/>
               </a:spcAft>
             </a:pPr>
             <a:r>
-              <a:rPr sz="1000" lang="zh-TW" dirty="0">
-                <a:solidFill>
-                  <a:srgbClr val="000000"/>
-                </a:solidFill>
-                <a:latin typeface="Arial Unicode MS"/>
-                <a:ea typeface="Arial Unicode MS"/>
-                <a:cs typeface="Arial Unicode MS"/>
-              </a:rPr>
-              <a:t>（如果時間還有，讓同學把號誌也拉出來看：十二點，而且雷達那張卡寫「未分類障礙物」。號誌桿又細又不反光，對光達來說跟小孩一樣難。所以紅綠燈只能靠相機讀——這件事第一節講過，今天用數字印證了一次。）</a:t>
+              <a:rPr sz="1050" lang="zh-TW" dirty="0">
+                <a:solidFill>
+                  <a:srgbClr val="000000"/>
+                </a:solidFill>
+                <a:latin typeface="Arial Unicode MS"/>
+                <a:ea typeface="Arial Unicode MS"/>
+                <a:cs typeface="Arial Unicode MS"/>
+              </a:rPr>
+              <a:t>如果時間還有，大家把號誌也拉出來看一下：十二點，而且雷達那張卡寫「未分類障礙物」。號誌桿又細又不反光，對光達來說跟小孩一樣難。所以紅綠燈只能靠相機讀——這件事第一節講過，今天用數字印證了一次。</a:t>
             </a:r>
           </a:p>
         </p:txBody>
@@ -3742,7 +3566,7 @@
                 <a:ea typeface="Arial Unicode MS"/>
                 <a:cs typeface="Arial Unicode MS"/>
               </a:rPr>
-              <a:t>先講問題在哪。一張照片是平面的，本身沒有距離的資訊——照片裡的人，可能是近處的小孩，也可能是遠處的大人，光看大小分不出來。所以相機不能「量」距離，它只能用幾何去「算」。
+              <a:t>先講問題在哪裡。一張照片是平面的，本身沒有距離這個資訊。照片裡的人，可能是近處的小孩，也可能是遠處的大人，光看大小分不出來。所以相機不能「量」距離，它只能用幾何去「算」。
 </a:t>
             </a:r>
           </a:p>
@@ -3786,7 +3610,7 @@
                 <a:ea typeface="Arial Unicode MS"/>
                 <a:cs typeface="Arial Unicode MS"/>
               </a:rPr>
-              <a:t>相機裝在車上，離地面的高度是 h，我們的設定是一點五公尺，這個數字是已知的，出廠就量好了。
+              <a:t>相機裝在車上，離地面的高度是 h，我們的設定是一點五公尺。這個數字是已知的，出廠就量好了。
 </a:t>
             </a:r>
           </a:p>
@@ -3852,7 +3676,7 @@
                 <a:ea typeface="Arial Unicode MS"/>
                 <a:cs typeface="Arial Unicode MS"/>
               </a:rPr>
-              <a:t>行人站在地上，他的腳踩在地面的那一點——紅點——一定落在地平線的</a:t>
+              <a:t>行人站在地上，他的腳踩在地面的那一點，就是那個紅點，一定落在地平線的</a:t>
             </a:r>
             <a:r>
               <a:rPr sz="1000" b="1" lang="zh-TW" dirty="0">
@@ -3874,7 +3698,7 @@
                 <a:ea typeface="Arial Unicode MS"/>
                 <a:cs typeface="Arial Unicode MS"/>
               </a:rPr>
-              <a:t>。從相機看向紅點的那條紅線，跟水平虛線之間夾了一個角度，叫俯角 α。
+              <a:t>。從相機看向紅點的那條紅線，跟水平虛線之間夾了一個角度，叫做俯角 α。
 </a:t>
             </a:r>
           </a:p>
@@ -3896,7 +3720,7 @@
                 <a:ea typeface="Arial Unicode MS"/>
                 <a:cs typeface="Arial Unicode MS"/>
               </a:rPr>
-              <a:t>現在三角形出來了：直的那一邊是高度 h，橫的那一邊是我們要的距離 d，夾角是 α。
+              <a:t>現在三角形出來了。直的那一邊是高度 h，橫的那一邊是我們要的距離 d，夾角是 α。
 </a:t>
             </a:r>
           </a:p>
@@ -3918,7 +3742,7 @@
                 <a:ea typeface="Arial Unicode MS"/>
                 <a:cs typeface="Arial Unicode MS"/>
               </a:rPr>
-              <a:t>這裡會用到 </a:t>
+              <a:t>這裡會用到 tan。有些同學可能忘記了，我用一句話說明：</a:t>
             </a:r>
             <a:r>
               <a:rPr sz="1000" b="1" lang="zh-TW" dirty="0">
@@ -3929,7 +3753,7 @@
                 <a:ea typeface="Arial Unicode MS"/>
                 <a:cs typeface="Arial Unicode MS"/>
               </a:rPr>
-              <a:t>tan</a:t>
+              <a:t>tan 就是一張「角度對應到邊長比例」的對照表</a:t>
             </a:r>
             <a:r>
               <a:rPr sz="1000" lang="zh-TW" dirty="0">
@@ -3940,29 +3764,7 @@
                 <a:ea typeface="Arial Unicode MS"/>
                 <a:cs typeface="Arial Unicode MS"/>
               </a:rPr>
-              <a:t>。有些同學可能忘記了，我用一句話說明：</a:t>
-            </a:r>
-            <a:r>
-              <a:rPr sz="1000" b="1" lang="zh-TW" dirty="0">
-                <a:solidFill>
-                  <a:srgbClr val="000000"/>
-                </a:solidFill>
-                <a:latin typeface="Arial Unicode MS"/>
-                <a:ea typeface="Arial Unicode MS"/>
-                <a:cs typeface="Arial Unicode MS"/>
-              </a:rPr>
-              <a:t>tan 就是一張「角度對應到邊長比例」的對照表</a:t>
-            </a:r>
-            <a:r>
-              <a:rPr sz="1000" lang="zh-TW" dirty="0">
-                <a:solidFill>
-                  <a:srgbClr val="000000"/>
-                </a:solidFill>
-                <a:latin typeface="Arial Unicode MS"/>
-                <a:ea typeface="Arial Unicode MS"/>
-                <a:cs typeface="Arial Unicode MS"/>
-              </a:rPr>
-              <a:t>。給它一個角度，它回給你「直的邊」除以「橫的邊」是多少。所以 tan α ＝ h ÷ d。
+              <a:t>。給它一個角度，它回給你「直的邊」除以「橫的邊」是多少。所以 tan α 等於 h 除以 d。
 </a:t>
             </a:r>
           </a:p>
@@ -3984,29 +3786,7 @@
                 <a:ea typeface="Arial Unicode MS"/>
                 <a:cs typeface="Arial Unicode MS"/>
               </a:rPr>
-              <a:t>反過來要把 d 算出來。</a:t>
-            </a:r>
-            <a:r>
-              <a:rPr sz="1000" b="1" lang="zh-TW" dirty="0">
-                <a:solidFill>
-                  <a:srgbClr val="000000"/>
-                </a:solidFill>
-                <a:latin typeface="Arial Unicode MS"/>
-                <a:ea typeface="Arial Unicode MS"/>
-                <a:cs typeface="Arial Unicode MS"/>
-              </a:rPr>
-              <a:t>d 現在在分母</a:t>
-            </a:r>
-            <a:r>
-              <a:rPr sz="1000" lang="zh-TW" dirty="0">
-                <a:solidFill>
-                  <a:srgbClr val="000000"/>
-                </a:solidFill>
-                <a:latin typeface="Arial Unicode MS"/>
-                <a:ea typeface="Arial Unicode MS"/>
-                <a:cs typeface="Arial Unicode MS"/>
-              </a:rPr>
-              <a:t>，所以先把它乘過去，再把 tan α 除過去：
+              <a:t>反過來要把 d 算出來。d 現在在分母，所以先把它乘過去，再把 tan α 除過去。
 </a:t>
             </a:r>
           </a:p>
@@ -4028,7 +3808,7 @@
                 <a:ea typeface="Arial Unicode MS"/>
                 <a:cs typeface="Arial Unicode MS"/>
               </a:rPr>
-              <a:t>兩邊同乘 d：d × tan α ＝ h
+              <a:t>兩邊同乘 d，變成 d 乘以 tan α 等於 h。
 </a:t>
             </a:r>
           </a:p>
@@ -4050,7 +3830,7 @@
                 <a:ea typeface="Arial Unicode MS"/>
                 <a:cs typeface="Arial Unicode MS"/>
               </a:rPr>
-              <a:t>兩邊同除以 tan α：</a:t>
+              <a:t>兩邊同除以 tan α，就得到 </a:t>
             </a:r>
             <a:r>
               <a:rPr sz="1000" b="1" lang="zh-TW" dirty="0">
@@ -4061,7 +3841,7 @@
                 <a:ea typeface="Arial Unicode MS"/>
                 <a:cs typeface="Arial Unicode MS"/>
               </a:rPr>
-              <a:t>d ＝ h ÷ tan α</a:t>
+              <a:t>d 等於 h 除以 tan α</a:t>
             </a:r>
             <a:r>
               <a:rPr sz="1000" lang="zh-TW" dirty="0">
@@ -4072,7 +3852,7 @@
                 <a:ea typeface="Arial Unicode MS"/>
                 <a:cs typeface="Arial Unicode MS"/>
               </a:rPr>
-              <a:t>
+              <a:t>。這就是右邊第一條式子。
 </a:t>
             </a:r>
           </a:p>
@@ -4094,7 +3874,7 @@
                 <a:ea typeface="Arial Unicode MS"/>
                 <a:cs typeface="Arial Unicode MS"/>
               </a:rPr>
-              <a:t>這就是右邊第一條式子。
+              <a:t>這裡很容易寫反成 tan α 除以 h。我教大家一個檢查的方法：把數字代進去，如果算出來是零點零三這種數字，那不可能是距離，一定是寫反了。
 </a:t>
             </a:r>
           </a:p>
@@ -4108,6 +3888,17 @@
               </a:spcAft>
             </a:pPr>
             <a:r>
+              <a:rPr sz="1000" b="1" lang="zh-TW" dirty="0">
+                <a:solidFill>
+                  <a:srgbClr val="000000"/>
+                </a:solidFill>
+                <a:latin typeface="Arial Unicode MS"/>
+                <a:ea typeface="Arial Unicode MS"/>
+                <a:cs typeface="Arial Unicode MS"/>
+              </a:rPr>
+              <a:t>大家不需要自己會按 tan。</a:t>
+            </a:r>
+            <a:r>
               <a:rPr sz="1000" lang="zh-TW" dirty="0">
                 <a:solidFill>
                   <a:srgbClr val="000000"/>
@@ -4116,7 +3907,7 @@
                 <a:ea typeface="Arial Unicode MS"/>
                 <a:cs typeface="Arial Unicode MS"/>
               </a:rPr>
-              <a:t>（很容易寫反成 tan α ÷ h。教一個檢查的方法：代數字進去，如果算出來是零點零三這種數字，那不可能是距離，一定是寫反了。）
+              <a:t>今天的學習單和考試都不會要你們算三角函數。我要你們懂的是「角度愈小、距離愈遠」這個關係，不是計算技巧。
 </a:t>
             </a:r>
           </a:p>
@@ -4138,29 +3929,7 @@
                 <a:ea typeface="Arial Unicode MS"/>
                 <a:cs typeface="Arial Unicode MS"/>
               </a:rPr>
-              <a:t>（計算機操作，請在台上示範一次：手機的計算機把螢幕轉成橫的就會出現 tan。</a:t>
-            </a:r>
-            <a:r>
-              <a:rPr sz="1000" b="1" lang="zh-TW" dirty="0">
-                <a:solidFill>
-                  <a:srgbClr val="000000"/>
-                </a:solidFill>
-                <a:latin typeface="Arial Unicode MS"/>
-                <a:ea typeface="Arial Unicode MS"/>
-                <a:cs typeface="Arial Unicode MS"/>
-              </a:rPr>
-              <a:t>按之前務必確認是「DEG」（度）模式，不是 RAD</a:t>
-            </a:r>
-            <a:r>
-              <a:rPr sz="1000" lang="zh-TW" dirty="0">
-                <a:solidFill>
-                  <a:srgbClr val="000000"/>
-                </a:solidFill>
-                <a:latin typeface="Arial Unicode MS"/>
-                <a:ea typeface="Arial Unicode MS"/>
-                <a:cs typeface="Arial Unicode MS"/>
-              </a:rPr>
-              <a:t>——這是最常出錯的地方，同一個數字按錯模式，答案會差很多。按法是先輸入角度再按 tan。）
+              <a:t>那 α 怎麼知道？看照片。紅點在畫面上比地平線低了幾列像素，數得出來；每一列像素代表幾度，是相機的規格。兩個相乘就是 α，這是第二條式子。
 </a:t>
             </a:r>
           </a:p>
@@ -4174,17 +3943,6 @@
               </a:spcAft>
             </a:pPr>
             <a:r>
-              <a:rPr sz="1000" b="1" lang="zh-TW" dirty="0">
-                <a:solidFill>
-                  <a:srgbClr val="000000"/>
-                </a:solidFill>
-                <a:latin typeface="Arial Unicode MS"/>
-                <a:ea typeface="Arial Unicode MS"/>
-                <a:cs typeface="Arial Unicode MS"/>
-              </a:rPr>
-              <a:t>同學不需要自己會按 tan。</a:t>
-            </a:r>
-            <a:r>
               <a:rPr sz="1000" lang="zh-TW" dirty="0">
                 <a:solidFill>
                   <a:srgbClr val="000000"/>
@@ -4193,7 +3951,7 @@
                 <a:ea typeface="Arial Unicode MS"/>
                 <a:cs typeface="Arial Unicode MS"/>
               </a:rPr>
-              <a:t>今天的學習單和考試都不會要你們算三角函數——我要你們懂的是這個「角度愈小、距離愈遠」的關係，不是計算技巧。
+              <a:t>我們代數字算一次。這台相機水平一千九百二十個像素、水平視野六十度，六十除以一千九百二十，每個像素零點零三一二五度。
 </a:t>
             </a:r>
           </a:p>
@@ -4215,7 +3973,51 @@
                 <a:ea typeface="Arial Unicode MS"/>
                 <a:cs typeface="Arial Unicode MS"/>
               </a:rPr>
-              <a:t>那 α 怎麼知道？看照片。紅點在畫面上比地平線低了幾列像素，數得出來；每一列像素代表幾度，是相機的規格。兩個相乘就是 α。這是第二條式子。
+              <a:t>這裡我要補一句，不然有人會被繞進去。</a:t>
+            </a:r>
+            <a:r>
+              <a:rPr sz="1000" b="1" lang="zh-TW" dirty="0">
+                <a:solidFill>
+                  <a:srgbClr val="000000"/>
+                </a:solidFill>
+                <a:latin typeface="Arial Unicode MS"/>
+                <a:ea typeface="Arial Unicode MS"/>
+                <a:cs typeface="Arial Unicode MS"/>
+              </a:rPr>
+              <a:t>俯角是上下的角度，我們數的是往下第幾列，所以真正要用的是垂直方向的每一列幾度。</a:t>
+            </a:r>
+            <a:r>
+              <a:rPr sz="1000" lang="zh-TW" dirty="0">
+                <a:solidFill>
+                  <a:srgbClr val="000000"/>
+                </a:solidFill>
+                <a:latin typeface="Arial Unicode MS"/>
+                <a:ea typeface="Arial Unicode MS"/>
+                <a:cs typeface="Arial Unicode MS"/>
+              </a:rPr>
+              <a:t>那為什麼可以拿水平的數字來算？因為感光元件上的像素是</a:t>
+            </a:r>
+            <a:r>
+              <a:rPr sz="1000" b="1" lang="zh-TW" dirty="0">
+                <a:solidFill>
+                  <a:srgbClr val="000000"/>
+                </a:solidFill>
+                <a:latin typeface="Arial Unicode MS"/>
+                <a:ea typeface="Arial Unicode MS"/>
+                <a:cs typeface="Arial Unicode MS"/>
+              </a:rPr>
+              <a:t>正方形</a:t>
+            </a:r>
+            <a:r>
+              <a:rPr sz="1000" lang="zh-TW" dirty="0">
+                <a:solidFill>
+                  <a:srgbClr val="000000"/>
+                </a:solidFill>
+                <a:latin typeface="Arial Unicode MS"/>
+                <a:ea typeface="Arial Unicode MS"/>
+                <a:cs typeface="Arial Unicode MS"/>
+              </a:rPr>
+              <a:t>的，水平一格和垂直一格張開的角度一樣大，所以垂直方向每一列同樣是零點零三一二五度。規格表習慣只寫水平，是因為水平視野才是大家拿來比較的那個數字。
 </a:t>
             </a:r>
           </a:p>
@@ -4237,7 +4039,7 @@
                 <a:ea typeface="Arial Unicode MS"/>
                 <a:cs typeface="Arial Unicode MS"/>
               </a:rPr>
-              <a:t>我們代數字算一次。這台相機水平一千九百二十個像素、水平視野六十度，六十除以一千九百二十，每個像素零點零三一二五度。
+              <a:t>假設紅點在地平線下方第九十二列。九十二乘零點零三一二五，等於二點八七五度。一點五除以 tan 二點八七五度，大約二十九點九公尺。所以這個人在三十公尺外。
 </a:t>
             </a:r>
           </a:p>
@@ -4259,51 +4061,7 @@
                 <a:ea typeface="Arial Unicode MS"/>
                 <a:cs typeface="Arial Unicode MS"/>
               </a:rPr>
-              <a:t>（這裡要補一句，不然會有同學被繞進去：</a:t>
-            </a:r>
-            <a:r>
-              <a:rPr sz="1000" b="1" lang="zh-TW" dirty="0">
-                <a:solidFill>
-                  <a:srgbClr val="000000"/>
-                </a:solidFill>
-                <a:latin typeface="Arial Unicode MS"/>
-                <a:ea typeface="Arial Unicode MS"/>
-                <a:cs typeface="Arial Unicode MS"/>
-              </a:rPr>
-              <a:t>俯角是上下的角度，我們數的是「往下第幾列」，所以真正要用的是垂直方向的每一度幾個像素。</a:t>
-            </a:r>
-            <a:r>
-              <a:rPr sz="1000" lang="zh-TW" dirty="0">
-                <a:solidFill>
-                  <a:srgbClr val="000000"/>
-                </a:solidFill>
-                <a:latin typeface="Arial Unicode MS"/>
-                <a:ea typeface="Arial Unicode MS"/>
-                <a:cs typeface="Arial Unicode MS"/>
-              </a:rPr>
-              <a:t>那為什麼可以拿水平的數字來算？因為感光元件上的像素是</a:t>
-            </a:r>
-            <a:r>
-              <a:rPr sz="1000" b="1" lang="zh-TW" dirty="0">
-                <a:solidFill>
-                  <a:srgbClr val="000000"/>
-                </a:solidFill>
-                <a:latin typeface="Arial Unicode MS"/>
-                <a:ea typeface="Arial Unicode MS"/>
-                <a:cs typeface="Arial Unicode MS"/>
-              </a:rPr>
-              <a:t>正方形</a:t>
-            </a:r>
-            <a:r>
-              <a:rPr sz="1000" lang="zh-TW" dirty="0">
-                <a:solidFill>
-                  <a:srgbClr val="000000"/>
-                </a:solidFill>
-                <a:latin typeface="Arial Unicode MS"/>
-                <a:ea typeface="Arial Unicode MS"/>
-                <a:cs typeface="Arial Unicode MS"/>
-              </a:rPr>
-              <a:t>的，水平一格和垂直一格張開的角度一樣大，所以垂直方向每一列同樣是零點零三一二五度。規格表習慣只寫水平，是因為水平視野才是大家拿來比較的那個數字。）
+              <a:t>我把這三行寫在白板上，大家用計算機跟著按一次。手機的計算機把螢幕轉成橫的就會出現 tan。按之前請確認它是「DEG」，也就是度的模式，不是 RAD。這是最常出錯的地方，同一個數字按錯模式，答案會差很多。按法是先輸入角度，再按 tan。
 </a:t>
             </a:r>
           </a:p>
@@ -4317,6 +4075,17 @@
               </a:spcAft>
             </a:pPr>
             <a:r>
+              <a:rPr sz="1000" b="1" lang="zh-TW" dirty="0">
+                <a:solidFill>
+                  <a:srgbClr val="000000"/>
+                </a:solidFill>
+                <a:latin typeface="Arial Unicode MS"/>
+                <a:ea typeface="Arial Unicode MS"/>
+                <a:cs typeface="Arial Unicode MS"/>
+              </a:rPr>
+              <a:t>接下來是重點。</a:t>
+            </a:r>
+            <a:r>
               <a:rPr sz="1000" lang="zh-TW" dirty="0">
                 <a:solidFill>
                   <a:srgbClr val="000000"/>
@@ -4325,7 +4094,7 @@
                 <a:ea typeface="Arial Unicode MS"/>
                 <a:cs typeface="Arial Unicode MS"/>
               </a:rPr>
-              <a:t>假設紅點在地平線下方第九十二列。九十二乘零點零三一二五，等於二點八七五度。一點五除以 tan 二點八七五度，大約二十九點九公尺。所以這個人在三十公尺外。
+              <a:t>如果影像有一點點模糊，電腦把紅點判成第九十一列，少了一列。我們重算：九十一乘零點零三一二五是二點八四四度，一點五除以 tan，得到三十點二公尺。
 </a:t>
             </a:r>
           </a:p>
@@ -4347,7 +4116,7 @@
                 <a:ea typeface="Arial Unicode MS"/>
                 <a:cs typeface="Arial Unicode MS"/>
               </a:rPr>
-              <a:t>（請在白板上把這三行寫出來，讓同學用計算機跟著按一次。）
+              <a:t>差一個像素，距離就差了零點三三公尺。請大家記住這個數字。等一下打開工具，把行人拖到三十公尺，相機那張卡上寫的誤差就是正負零點三三。不是巧合，工具就是這樣算的。
 </a:t>
             </a:r>
           </a:p>
@@ -4361,6 +4130,17 @@
               </a:spcAft>
             </a:pPr>
             <a:r>
+              <a:rPr sz="1000" lang="zh-TW" dirty="0">
+                <a:solidFill>
+                  <a:srgbClr val="000000"/>
+                </a:solidFill>
+                <a:latin typeface="Arial Unicode MS"/>
+                <a:ea typeface="Arial Unicode MS"/>
+                <a:cs typeface="Arial Unicode MS"/>
+              </a:rPr>
+              <a:t>那如果這個人站在六十公尺呢？紅點會更靠近地平線，大約在第四十六列。同樣少算一列，距離會從五十九點八變成六十一點一，差了一點三三公尺，是剛剛的</a:t>
+            </a:r>
+            <a:r>
               <a:rPr sz="1000" b="1" lang="zh-TW" dirty="0">
                 <a:solidFill>
                   <a:srgbClr val="000000"/>
@@ -4369,7 +4149,7 @@
                 <a:ea typeface="Arial Unicode MS"/>
                 <a:cs typeface="Arial Unicode MS"/>
               </a:rPr>
-              <a:t>接下來是重點。</a:t>
+              <a:t>四倍</a:t>
             </a:r>
             <a:r>
               <a:rPr sz="1000" lang="zh-TW" dirty="0">
@@ -4380,7 +4160,7 @@
                 <a:ea typeface="Arial Unicode MS"/>
                 <a:cs typeface="Arial Unicode MS"/>
               </a:rPr>
-              <a:t> 如果影像有一點點模糊，電腦把紅點判成第九十一列，少了一列。重算：九十一乘零點零三一二五是二點八四四度，一點五除以 tan，得到三十點二公尺。
+              <a:t>。
 </a:t>
             </a:r>
           </a:p>
@@ -4402,7 +4182,7 @@
                 <a:ea typeface="Arial Unicode MS"/>
                 <a:cs typeface="Arial Unicode MS"/>
               </a:rPr>
-              <a:t>差一個像素，距離就差了零點三三公尺。請大家記住這個數字——等一下打開工具，行人拖到三十公尺，相機那張卡上寫的誤差就是正負零點三三。不是巧合，工具就是這樣算的。
+              <a:t>為什麼遠的地方差這麼多？因為愈遠的東西，在畫面上愈擠向地平線，每一列像素要負責的距離就愈長。這件事下一頁會寫成公式。
 </a:t>
             </a:r>
           </a:p>
@@ -4424,73 +4204,7 @@
                 <a:ea typeface="Arial Unicode MS"/>
                 <a:cs typeface="Arial Unicode MS"/>
               </a:rPr>
-              <a:t>那如果這個人站在六十公尺呢？紅點會更靠近地平線，大約在第四十六列。同樣少算一列，距離會從五十九點八變成六十一點一，差了一點三三公尺——是剛剛的</a:t>
-            </a:r>
-            <a:r>
-              <a:rPr sz="1000" b="1" lang="zh-TW" dirty="0">
-                <a:solidFill>
-                  <a:srgbClr val="000000"/>
-                </a:solidFill>
-                <a:latin typeface="Arial Unicode MS"/>
-                <a:ea typeface="Arial Unicode MS"/>
-                <a:cs typeface="Arial Unicode MS"/>
-              </a:rPr>
-              <a:t>四倍</a:t>
-            </a:r>
-            <a:r>
-              <a:rPr sz="1000" lang="zh-TW" dirty="0">
-                <a:solidFill>
-                  <a:srgbClr val="000000"/>
-                </a:solidFill>
-                <a:latin typeface="Arial Unicode MS"/>
-                <a:ea typeface="Arial Unicode MS"/>
-                <a:cs typeface="Arial Unicode MS"/>
-              </a:rPr>
-              <a:t>。
-</a:t>
-            </a:r>
-          </a:p>
-          <a:p>
-            <a:pPr algn="l">
-              <a:lnSpc>
-                <a:spcPct val="115000"/>
-              </a:lnSpc>
-              <a:spcAft>
-                <a:spcPts val="500"/>
-              </a:spcAft>
-            </a:pPr>
-            <a:r>
-              <a:rPr sz="1000" lang="zh-TW" dirty="0">
-                <a:solidFill>
-                  <a:srgbClr val="000000"/>
-                </a:solidFill>
-                <a:latin typeface="Arial Unicode MS"/>
-                <a:ea typeface="Arial Unicode MS"/>
-                <a:cs typeface="Arial Unicode MS"/>
-              </a:rPr>
-              <a:t>為什麼遠的地方差這麼多？因為愈遠的東西，在畫面上愈擠向地平線，每一列像素要負責的距離就愈長。這件事下一頁會寫成公式。
-</a:t>
-            </a:r>
-          </a:p>
-          <a:p>
-            <a:pPr algn="l">
-              <a:lnSpc>
-                <a:spcPct val="115000"/>
-              </a:lnSpc>
-              <a:spcAft>
-                <a:spcPts val="500"/>
-              </a:spcAft>
-            </a:pPr>
-            <a:r>
-              <a:rPr sz="1000" lang="zh-TW" dirty="0">
-                <a:solidFill>
-                  <a:srgbClr val="000000"/>
-                </a:solidFill>
-                <a:latin typeface="Arial Unicode MS"/>
-                <a:ea typeface="Arial Unicode MS"/>
-                <a:cs typeface="Arial Unicode MS"/>
-              </a:rPr>
-              <a:t>最後看最下面那句話：這整套算法有一個前提，</a:t>
+              <a:t>最後看最下面那句話。這整套算法有一個前提，</a:t>
             </a:r>
             <a:r>
               <a:rPr sz="1000" b="1" lang="zh-TW" dirty="0">
@@ -4886,7 +4600,7 @@
                 <a:ea typeface="Arial Unicode MS"/>
                 <a:cs typeface="Arial Unicode MS"/>
               </a:rPr>
-              <a:t>（開始操作前先確認一件事：左欄的環境要停在</a:t>
+              <a:t>開始操作之前，請大家先確認一件事：左邊那一欄的環境要停在</a:t>
             </a:r>
             <a:r>
               <a:rPr sz="1000" b="1" lang="zh-TW" dirty="0">
@@ -4919,7 +4633,7 @@
                 <a:ea typeface="Arial Unicode MS"/>
                 <a:cs typeface="Arial Unicode MS"/>
               </a:rPr>
-              <a:t>整個第二節都不要動它</a:t>
+              <a:t>整個第二節都不要去動它</a:t>
             </a:r>
             <a:r>
               <a:rPr sz="1000" lang="zh-TW" dirty="0">
@@ -4930,7 +4644,7 @@
                 <a:ea typeface="Arial Unicode MS"/>
                 <a:cs typeface="Arial Unicode MS"/>
               </a:rPr>
-              <a:t>。今天我們只改距離和規格，天氣這個變數要先固定住——不然等一下數字掉下來，同學會分不清是因為變遠了，還是因為天氣。天氣下一節才開放。本節所有的預期讀值，都是晴天白天算出來的。）
+              <a:t>。
 </a:t>
             </a:r>
           </a:p>
@@ -4952,7 +4666,7 @@
                 <a:ea typeface="Arial Unicode MS"/>
                 <a:cs typeface="Arial Unicode MS"/>
               </a:rPr>
-              <a:t>第一位同學上台。這一輪只做一件事：把行人拖遠，每停一次唸一個數字。
+              <a:t>今天我們只改距離和規格，天氣這個變數要先固定住。不然等一下數字掉下來，大家會分不清楚是因為變遠了，還是因為天氣。天氣下一節才開放。這一節所有的數字，都是晴天白天算出來的。
 </a:t>
             </a:r>
           </a:p>
@@ -4974,7 +4688,7 @@
                 <a:ea typeface="Arial Unicode MS"/>
                 <a:cs typeface="Arial Unicode MS"/>
               </a:rPr>
-              <a:t>（預期讀值：20 m → ±0.15、40 m → ±0.58、60 m → ±1.31、80 m → ±2.33。請寫在白板上。）
+              <a:t>第一位同學上台。這一輪只做一件事：把行人拖遠，每停一次唸一個數字。
 </a:t>
             </a:r>
           </a:p>
@@ -4996,7 +4710,7 @@
                 <a:ea typeface="Arial Unicode MS"/>
                 <a:cs typeface="Arial Unicode MS"/>
               </a:rPr>
-              <a:t>四個數字都在白板上了。現在全班一起算。
+              <a:t>二十公尺，正負零點一五。四十公尺，正負零點五八。六十公尺，正負一點三一。八十公尺，正負二點三三。我把這四個數字寫在白板上。
 </a:t>
             </a:r>
           </a:p>
@@ -5018,7 +4732,7 @@
                 <a:ea typeface="Arial Unicode MS"/>
                 <a:cs typeface="Arial Unicode MS"/>
               </a:rPr>
-              <a:t>二十公尺到四十公尺，距離變兩倍。誤差從零點一五變成零點五八——幾倍？
+              <a:t>現在全班一起算。
 </a:t>
             </a:r>
           </a:p>
@@ -5040,7 +4754,7 @@
                 <a:ea typeface="Arial Unicode MS"/>
                 <a:cs typeface="Arial Unicode MS"/>
               </a:rPr>
-              <a:t>（預期答案：四倍。）
+              <a:t>二十公尺到四十公尺，距離變兩倍，誤差從零點一五變成零點五八，是幾倍？
 </a:t>
             </a:r>
           </a:p>
@@ -5084,7 +4798,7 @@
                 <a:ea typeface="Arial Unicode MS"/>
                 <a:cs typeface="Arial Unicode MS"/>
               </a:rPr>
-              <a:t>二十公尺到八十公尺，距離變四倍。零點一五變成二點三三——
+              <a:t>二十公尺到八十公尺，距離變四倍，零點一五變成二點三三，是幾倍？
 </a:t>
             </a:r>
           </a:p>
@@ -5106,7 +4820,7 @@
                 <a:ea typeface="Arial Unicode MS"/>
                 <a:cs typeface="Arial Unicode MS"/>
               </a:rPr>
-              <a:t>（預期答案：約十六倍。4 的平方。）
+              <a:t>大約十六倍，也就是四的平方。
 </a:t>
             </a:r>
           </a:p>
@@ -5128,7 +4842,29 @@
                 <a:ea typeface="Arial Unicode MS"/>
                 <a:cs typeface="Arial Unicode MS"/>
               </a:rPr>
-              <a:t>十六倍。
+              <a:t>這就是平方的意思。它不是慢慢變差，是</a:t>
+            </a:r>
+            <a:r>
+              <a:rPr sz="1000" b="1" lang="zh-TW" dirty="0">
+                <a:solidFill>
+                  <a:srgbClr val="000000"/>
+                </a:solidFill>
+                <a:latin typeface="Arial Unicode MS"/>
+                <a:ea typeface="Arial Unicode MS"/>
+                <a:cs typeface="Arial Unicode MS"/>
+              </a:rPr>
+              <a:t>愈遠愈快地變差</a:t>
+            </a:r>
+            <a:r>
+              <a:rPr sz="1000" lang="zh-TW" dirty="0">
+                <a:solidFill>
+                  <a:srgbClr val="000000"/>
+                </a:solidFill>
+                <a:latin typeface="Arial Unicode MS"/>
+                <a:ea typeface="Arial Unicode MS"/>
+                <a:cs typeface="Arial Unicode MS"/>
+              </a:rPr>
+              <a:t>。
 </a:t>
             </a:r>
           </a:p>
@@ -5150,29 +4886,7 @@
                 <a:ea typeface="Arial Unicode MS"/>
                 <a:cs typeface="Arial Unicode MS"/>
               </a:rPr>
-              <a:t>這就是平方的意思。它不是慢慢變差，是</a:t>
-            </a:r>
-            <a:r>
-              <a:rPr sz="1000" b="1" lang="zh-TW" dirty="0">
-                <a:solidFill>
-                  <a:srgbClr val="000000"/>
-                </a:solidFill>
-                <a:latin typeface="Arial Unicode MS"/>
-                <a:ea typeface="Arial Unicode MS"/>
-                <a:cs typeface="Arial Unicode MS"/>
-              </a:rPr>
-              <a:t>愈遠愈快地變差</a:t>
-            </a:r>
-            <a:r>
-              <a:rPr sz="1000" lang="zh-TW" dirty="0">
-                <a:solidFill>
-                  <a:srgbClr val="000000"/>
-                </a:solidFill>
-                <a:latin typeface="Arial Unicode MS"/>
-                <a:ea typeface="Arial Unicode MS"/>
-                <a:cs typeface="Arial Unicode MS"/>
-              </a:rPr>
-              <a:t>。八十公尺的時候，這台相機告訴你「那個人在七十七點七到八十二點三公尺之間的某處」。要靠這個數字決定要不要煞車，已經很勉強了。
+              <a:t>八十公尺的時候，這台相機告訴你的是「那個人在七十七點七到八十二點三公尺之間的某個地方」。要靠這個數字決定要不要煞車，已經很勉強了。
 </a:t>
             </a:r>
           </a:p>
@@ -5194,7 +4908,7 @@
                 <a:ea typeface="Arial Unicode MS"/>
                 <a:cs typeface="Arial Unicode MS"/>
               </a:rPr>
-              <a:t>順帶一提，這是用目前主流的兩百萬畫素相機算的。如果換成十年前那種六十四萬畫素的，八十公尺的誤差會是七公尺——那就完全不能用了。
+              <a:t>順帶一提，這是用目前主流的兩百萬畫素相機算的。如果換成十年前那種六十四萬畫素的，八十公尺的誤差會是七公尺，那就完全不能用了。
 </a:t>
             </a:r>
           </a:p>
@@ -5216,7 +4930,7 @@
                 <a:ea typeface="Arial Unicode MS"/>
                 <a:cs typeface="Arial Unicode MS"/>
               </a:rPr>
-              <a:t>所以自駕車為什麼要裝光達？下一頁我們就去看光達在同樣距離的表現。</a:t>
+              <a:t>所以自駕車為什麼要裝光達？下一頁我們就去看光達在同樣的距離表現怎麼樣。</a:t>
             </a:r>
           </a:p>
         </p:txBody>
@@ -5612,7 +5326,7 @@
                 <a:ea typeface="Arial Unicode MS"/>
                 <a:cs typeface="Arial Unicode MS"/>
               </a:rPr>
-              <a:t>（預期讀值，請依序寫在白板上：基準 ±0.33、3840 px ±0.16、30° 視野 ±0.16、高度 2.2 m ±0.22、1280 px ±0.49。）
+              <a:t>先講一件事：像素那條滑桿只停在真的買得到的規格上，六百四十、一千二百八十、一千九百二十、兩千八百九十六、三千八百四十，拉不到中間的數字。這是故意的，因為市面上沒有三千六百八十像素的相機。光達的線束數也一樣，只有八、十六、三十二、六十四、一百二十八。
 </a:t>
             </a:r>
           </a:p>
@@ -5634,7 +5348,7 @@
                 <a:ea typeface="Arial Unicode MS"/>
                 <a:cs typeface="Arial Unicode MS"/>
               </a:rPr>
-              <a:t>（像素那條滑桿只停在真的買得到的規格上：640、1280、1920、2896、3840，拉不到中間的數字。這是故意的——市面上沒有三千六百八十像素的相機。光達的線束數也一樣，只有 8、16、32、64、128。）
+              <a:t>第一個數字是基準，正負零點三三。大家記住這個數字，接下來四個都跟它比。我把每一個都寫在白板上。
 </a:t>
             </a:r>
           </a:p>
@@ -5648,6 +5362,17 @@
               </a:spcAft>
             </a:pPr>
             <a:r>
+              <a:rPr sz="1000" b="1" lang="zh-TW" dirty="0">
+                <a:solidFill>
+                  <a:srgbClr val="000000"/>
+                </a:solidFill>
+                <a:latin typeface="Arial Unicode MS"/>
+                <a:ea typeface="Arial Unicode MS"/>
+                <a:cs typeface="Arial Unicode MS"/>
+              </a:rPr>
+              <a:t>第一次改，像素從一千九百二十加倍到三千八百四十。</a:t>
+            </a:r>
+            <a:r>
               <a:rPr sz="1000" lang="zh-TW" dirty="0">
                 <a:solidFill>
                   <a:srgbClr val="000000"/>
@@ -5656,7 +5381,7 @@
                 <a:ea typeface="Arial Unicode MS"/>
                 <a:cs typeface="Arial Unicode MS"/>
               </a:rPr>
-              <a:t>第一個數字是基準：正負零點三三。大家記住這個數字，接下來四個都跟它比。
+              <a:t>誤差從零點三三掉到零點一六，剛好少了一半。這很合理，像素加倍，每一格代表的角度就減半，數得更細。
 </a:t>
             </a:r>
           </a:p>
@@ -5678,7 +5403,7 @@
                 <a:ea typeface="Arial Unicode MS"/>
                 <a:cs typeface="Arial Unicode MS"/>
               </a:rPr>
-              <a:t>第一次改：像素從一千九百二十加倍到三千八百四十。</a:t>
+              <a:t>第二次改，把像素還原，改成把視野從六十度縮到三十度。</a:t>
             </a:r>
             <a:r>
               <a:rPr sz="1000" lang="zh-TW" dirty="0">
@@ -5689,7 +5414,7 @@
                 <a:ea typeface="Arial Unicode MS"/>
                 <a:cs typeface="Arial Unicode MS"/>
               </a:rPr>
-              <a:t> 誤差從零點三三掉到零點一六，剛好少了一半。合理——像素加倍，每一格代表的角度就減半，數得更細。
+              <a:t>唸出來也是零點一六。
 </a:t>
             </a:r>
           </a:p>
@@ -5703,17 +5428,6 @@
               </a:spcAft>
             </a:pPr>
             <a:r>
-              <a:rPr sz="1000" b="1" lang="zh-TW" dirty="0">
-                <a:solidFill>
-                  <a:srgbClr val="000000"/>
-                </a:solidFill>
-                <a:latin typeface="Arial Unicode MS"/>
-                <a:ea typeface="Arial Unicode MS"/>
-                <a:cs typeface="Arial Unicode MS"/>
-              </a:rPr>
-              <a:t>第二次改：把像素還原，改成把視野從六十度縮到三十度。</a:t>
-            </a:r>
-            <a:r>
               <a:rPr sz="1000" lang="zh-TW" dirty="0">
                 <a:solidFill>
                   <a:srgbClr val="000000"/>
@@ -5722,7 +5436,7 @@
                 <a:ea typeface="Arial Unicode MS"/>
                 <a:cs typeface="Arial Unicode MS"/>
               </a:rPr>
-              <a:t> 唸出來也是零點一六。
+              <a:t>大家看白板上這兩個一模一樣的數字。同樣是零點一六，可是這兩件事完全不一樣。我問大家：哪一個要付出代價？
 </a:t>
             </a:r>
           </a:p>
@@ -5744,7 +5458,7 @@
                 <a:ea typeface="Arial Unicode MS"/>
                 <a:cs typeface="Arial Unicode MS"/>
               </a:rPr>
-              <a:t>（停在這裡，讓全班看白板上這兩個一模一樣的數字。）
+              <a:t>可能會有人說，縮視野會看不到旁邊。對，就是這樣。
 </a:t>
             </a:r>
           </a:p>
@@ -5766,7 +5480,51 @@
                 <a:ea typeface="Arial Unicode MS"/>
                 <a:cs typeface="Arial Unicode MS"/>
               </a:rPr>
-              <a:t>同樣是零點一六，但這兩件事完全不一樣。請問哪一個要付出代價？
+              <a:t>加倍像素付的是</a:t>
+            </a:r>
+            <a:r>
+              <a:rPr sz="1000" b="1" lang="zh-TW" dirty="0">
+                <a:solidFill>
+                  <a:srgbClr val="000000"/>
+                </a:solidFill>
+                <a:latin typeface="Arial Unicode MS"/>
+                <a:ea typeface="Arial Unicode MS"/>
+                <a:cs typeface="Arial Unicode MS"/>
+              </a:rPr>
+              <a:t>錢</a:t>
+            </a:r>
+            <a:r>
+              <a:rPr sz="1000" lang="zh-TW" dirty="0">
+                <a:solidFill>
+                  <a:srgbClr val="000000"/>
+                </a:solidFill>
+                <a:latin typeface="Arial Unicode MS"/>
+                <a:ea typeface="Arial Unicode MS"/>
+                <a:cs typeface="Arial Unicode MS"/>
+              </a:rPr>
+              <a:t>——感測器更貴、資料量加倍、電腦要算得更快。縮小視野付的是</a:t>
+            </a:r>
+            <a:r>
+              <a:rPr sz="1000" b="1" lang="zh-TW" dirty="0">
+                <a:solidFill>
+                  <a:srgbClr val="000000"/>
+                </a:solidFill>
+                <a:latin typeface="Arial Unicode MS"/>
+                <a:ea typeface="Arial Unicode MS"/>
+                <a:cs typeface="Arial Unicode MS"/>
+              </a:rPr>
+              <a:t>範圍</a:t>
+            </a:r>
+            <a:r>
+              <a:rPr sz="1000" lang="zh-TW" dirty="0">
+                <a:solidFill>
+                  <a:srgbClr val="000000"/>
+                </a:solidFill>
+                <a:latin typeface="Arial Unicode MS"/>
+                <a:ea typeface="Arial Unicode MS"/>
+                <a:cs typeface="Arial Unicode MS"/>
+              </a:rPr>
+              <a:t>——你把左右兩邊各切掉了一半。三十公尺外正前方的行人看得更準，可是路口斜斜衝出來的機車，你根本沒有把他放進畫面裡。
 </a:t>
             </a:r>
           </a:p>
@@ -5788,7 +5546,7 @@
                 <a:ea typeface="Arial Unicode MS"/>
                 <a:cs typeface="Arial Unicode MS"/>
               </a:rPr>
-              <a:t>（等學生回答。預期會有人說「縮視野看不到旁邊」。）
+              <a:t>真車的前視鏡頭大多是五十到六十度，就是因為視野不能再縮了。要更準，只能往像素和算力砸錢。
 </a:t>
             </a:r>
           </a:p>
@@ -5802,6 +5560,17 @@
               </a:spcAft>
             </a:pPr>
             <a:r>
+              <a:rPr sz="1000" b="1" lang="zh-TW" dirty="0">
+                <a:solidFill>
+                  <a:srgbClr val="000000"/>
+                </a:solidFill>
+                <a:latin typeface="Arial Unicode MS"/>
+                <a:ea typeface="Arial Unicode MS"/>
+                <a:cs typeface="Arial Unicode MS"/>
+              </a:rPr>
+              <a:t>第三次改，高度從一點五加到二點二公尺。</a:t>
+            </a:r>
+            <a:r>
               <a:rPr sz="1000" lang="zh-TW" dirty="0">
                 <a:solidFill>
                   <a:srgbClr val="000000"/>
@@ -5810,51 +5579,7 @@
                 <a:ea typeface="Arial Unicode MS"/>
                 <a:cs typeface="Arial Unicode MS"/>
               </a:rPr>
-              <a:t>對。加倍像素是</a:t>
-            </a:r>
-            <a:r>
-              <a:rPr sz="1000" b="1" lang="zh-TW" dirty="0">
-                <a:solidFill>
-                  <a:srgbClr val="000000"/>
-                </a:solidFill>
-                <a:latin typeface="Arial Unicode MS"/>
-                <a:ea typeface="Arial Unicode MS"/>
-                <a:cs typeface="Arial Unicode MS"/>
-              </a:rPr>
-              <a:t>花錢</a:t>
-            </a:r>
-            <a:r>
-              <a:rPr sz="1000" lang="zh-TW" dirty="0">
-                <a:solidFill>
-                  <a:srgbClr val="000000"/>
-                </a:solidFill>
-                <a:latin typeface="Arial Unicode MS"/>
-                <a:ea typeface="Arial Unicode MS"/>
-                <a:cs typeface="Arial Unicode MS"/>
-              </a:rPr>
-              <a:t>——感測器更貴、資料量加倍、電腦要算得更快。縮小視野是</a:t>
-            </a:r>
-            <a:r>
-              <a:rPr sz="1000" b="1" lang="zh-TW" dirty="0">
-                <a:solidFill>
-                  <a:srgbClr val="000000"/>
-                </a:solidFill>
-                <a:latin typeface="Arial Unicode MS"/>
-                <a:ea typeface="Arial Unicode MS"/>
-                <a:cs typeface="Arial Unicode MS"/>
-              </a:rPr>
-              <a:t>花範圍</a:t>
-            </a:r>
-            <a:r>
-              <a:rPr sz="1000" lang="zh-TW" dirty="0">
-                <a:solidFill>
-                  <a:srgbClr val="000000"/>
-                </a:solidFill>
-                <a:latin typeface="Arial Unicode MS"/>
-                <a:ea typeface="Arial Unicode MS"/>
-                <a:cs typeface="Arial Unicode MS"/>
-              </a:rPr>
-              <a:t>——你把左右兩邊切掉了一半。三十公尺外正前方的行人看得更準，但路口斜側方衝出來的機車，你根本沒把他放進畫面裡。
+              <a:t>零點二二。有改善，但是沒有前面兩個多。而且這是把相機架到車頂行李架的高度，一般轎車做不到。所以安裝高度是一張很有限的牌。
 </a:t>
             </a:r>
           </a:p>
@@ -5868,6 +5593,17 @@
               </a:spcAft>
             </a:pPr>
             <a:r>
+              <a:rPr sz="1000" b="1" lang="zh-TW" dirty="0">
+                <a:solidFill>
+                  <a:srgbClr val="000000"/>
+                </a:solidFill>
+                <a:latin typeface="Arial Unicode MS"/>
+                <a:ea typeface="Arial Unicode MS"/>
+                <a:cs typeface="Arial Unicode MS"/>
+              </a:rPr>
+              <a:t>第四次改，像素降到一千二百八十。</a:t>
+            </a:r>
+            <a:r>
               <a:rPr sz="1000" lang="zh-TW" dirty="0">
                 <a:solidFill>
                   <a:srgbClr val="000000"/>
@@ -5876,7 +5612,7 @@
                 <a:ea typeface="Arial Unicode MS"/>
                 <a:cs typeface="Arial Unicode MS"/>
               </a:rPr>
-              <a:t>真車的前視鏡頭大多是五十到六十度，就是因為視野不能再縮了。要更準，只能往像素和算力砸錢。
+              <a:t>零點四九。
 </a:t>
             </a:r>
           </a:p>
@@ -5890,17 +5626,6 @@
               </a:spcAft>
             </a:pPr>
             <a:r>
-              <a:rPr sz="1000" b="1" lang="zh-TW" dirty="0">
-                <a:solidFill>
-                  <a:srgbClr val="000000"/>
-                </a:solidFill>
-                <a:latin typeface="Arial Unicode MS"/>
-                <a:ea typeface="Arial Unicode MS"/>
-                <a:cs typeface="Arial Unicode MS"/>
-              </a:rPr>
-              <a:t>第三次改：高度從一點五加到二點二公尺。</a:t>
-            </a:r>
-            <a:r>
               <a:rPr sz="1000" lang="zh-TW" dirty="0">
                 <a:solidFill>
                   <a:srgbClr val="000000"/>
@@ -5909,7 +5634,7 @@
                 <a:ea typeface="Arial Unicode MS"/>
                 <a:cs typeface="Arial Unicode MS"/>
               </a:rPr>
-              <a:t> 零點二二。有改善，但沒有前兩個多——而且這是把相機架到車頂行李架的高度，一般轎車做不到。所以安裝高度是有限的工具。
+              <a:t>這是反過來看的。如果為了省錢用便宜的鏡頭，三十公尺外的誤差就從三十三公分變成四十九公分。那十六公分，就是你省下來的那一筆錢。
 </a:t>
             </a:r>
           </a:p>
@@ -5923,17 +5648,6 @@
               </a:spcAft>
             </a:pPr>
             <a:r>
-              <a:rPr sz="1000" b="1" lang="zh-TW" dirty="0">
-                <a:solidFill>
-                  <a:srgbClr val="000000"/>
-                </a:solidFill>
-                <a:latin typeface="Arial Unicode MS"/>
-                <a:ea typeface="Arial Unicode MS"/>
-                <a:cs typeface="Arial Unicode MS"/>
-              </a:rPr>
-              <a:t>第四次改：像素降到一千二百八十。</a:t>
-            </a:r>
-            <a:r>
               <a:rPr sz="1000" lang="zh-TW" dirty="0">
                 <a:solidFill>
                   <a:srgbClr val="000000"/>
@@ -5942,51 +5656,7 @@
                 <a:ea typeface="Arial Unicode MS"/>
                 <a:cs typeface="Arial Unicode MS"/>
               </a:rPr>
-              <a:t> 零點四九。
-</a:t>
-            </a:r>
-          </a:p>
-          <a:p>
-            <a:pPr algn="l">
-              <a:lnSpc>
-                <a:spcPct val="115000"/>
-              </a:lnSpc>
-              <a:spcAft>
-                <a:spcPts val="500"/>
-              </a:spcAft>
-            </a:pPr>
-            <a:r>
-              <a:rPr sz="1000" lang="zh-TW" dirty="0">
-                <a:solidFill>
-                  <a:srgbClr val="000000"/>
-                </a:solidFill>
-                <a:latin typeface="Arial Unicode MS"/>
-                <a:ea typeface="Arial Unicode MS"/>
-                <a:cs typeface="Arial Unicode MS"/>
-              </a:rPr>
-              <a:t>這是反過來看的：如果為了省錢用便宜的鏡頭，三十公尺外的誤差就從三十三公分變成四十九公分。那十六公分，就是你省下來的那筆錢。
-</a:t>
-            </a:r>
-          </a:p>
-          <a:p>
-            <a:pPr algn="l">
-              <a:lnSpc>
-                <a:spcPct val="115000"/>
-              </a:lnSpc>
-              <a:spcAft>
-                <a:spcPts val="500"/>
-              </a:spcAft>
-            </a:pPr>
-            <a:r>
-              <a:rPr sz="1000" lang="zh-TW" dirty="0">
-                <a:solidFill>
-                  <a:srgbClr val="000000"/>
-                </a:solidFill>
-                <a:latin typeface="Arial Unicode MS"/>
-                <a:ea typeface="Arial Unicode MS"/>
-                <a:cs typeface="Arial Unicode MS"/>
-              </a:rPr>
-              <a:t>（收尾一句：規格表上每一個數字，背後都是一個要付錢或要犧牲別的東西的決定。）</a:t>
+              <a:t>規格表上每一個數字，背後都是一個要付錢、或者要犧牲別的東西的決定。</a:t>
             </a:r>
           </a:p>
         </p:txBody>
@@ -6107,7 +5777,7 @@
                 <a:ea typeface="Arial Unicode MS"/>
                 <a:cs typeface="Arial Unicode MS"/>
               </a:rPr>
-              <a:t>這一頁回答一個同學看到點雲圖一定會問的問題：點雲看起來密密麻麻，為什麼一個人身上只有十幾點？
+              <a:t>這一頁回答一個問題，就是同學看到點雲圖一定會問的：點雲看起來密密麻麻，為什麼一個人身上只有十幾點？
 </a:t>
             </a:r>
           </a:p>
@@ -6217,7 +5887,7 @@
                 <a:ea typeface="Arial Unicode MS"/>
                 <a:cs typeface="Arial Unicode MS"/>
               </a:rPr>
-              <a:t>近的那個人在十公尺，你數一數，有八條線穿過他，我在交點上點了紅點。遠的那個人在四十公尺，只剩兩條。距離四倍，穿過的線剩四分之一。
+              <a:t>近的那個人在十公尺，大家數一數，有八條線穿過他，我在交點上點了紅點。遠的那個人在四十公尺，只剩兩條。距離四倍，穿過的線剩四分之一。
 </a:t>
             </a:r>
           </a:p>
@@ -6261,7 +5931,7 @@
                 <a:ea typeface="Arial Unicode MS"/>
                 <a:cs typeface="Arial Unicode MS"/>
               </a:rPr>
-              <a:t>，不是長度。六十四條線平均分佈在垂直二十七度裡，相鄰兩條永遠差零點四三度。這個角度不會變，但射得愈遠，兩條線之間張開的實際距離愈大——像手電筒的光錐，愈遠愈散。零點四三度在十公尺處張開七點五公分，在四十公尺處張開三十公分。
+              <a:t>，不是長度。六十四條線平均分佈在垂直二十七度裡面，相鄰兩條永遠差零點四三度。這個角度不會變，可是射得愈遠，兩條線之間張開的實際距離愈大，就像手電筒的光錐，愈遠愈散。零點四三度在十公尺處張開七點五公分，在四十公尺處張開三十公分。
 </a:t>
             </a:r>
           </a:p>
@@ -6283,7 +5953,7 @@
                 <a:ea typeface="Arial Unicode MS"/>
                 <a:cs typeface="Arial Unicode MS"/>
               </a:rPr>
-              <a:t>再看地面。朝下的那幾條線，大多在車子附近就打到地面了，我在落點畫了灰點。這也是為什麼點雲圖裡車子周圍那一圈圈同心圓特別密——大部分的點其實都花在近處的地面上。
+              <a:t>再看地面。朝下的那幾條線，大多在車子附近就打到地面了，我在落點畫了灰點。這也是為什麼點雲圖裡面，車子周圍那一圈一圈的同心圓特別密——大部分的點其實都花在近處的地面上。
 </a:t>
             </a:r>
           </a:p>
@@ -6305,7 +5975,7 @@
                 <a:ea typeface="Arial Unicode MS"/>
                 <a:cs typeface="Arial Unicode MS"/>
               </a:rPr>
-              <a:t>現在看右邊。這兩個框代表同一個人，框一樣大，但左邊塞滿了點，右邊只有幾顆。
+              <a:t>現在看右邊。這兩個框代表同一個人，框一樣大，但是左邊塞滿了點，右邊只有幾顆。
 </a:t>
             </a:r>
           </a:p>
@@ -6437,7 +6107,7 @@
                 <a:ea typeface="Arial Unicode MS"/>
                 <a:cs typeface="Arial Unicode MS"/>
               </a:rPr>
-              <a:t>（如果有同學問：那為什麼規格書寫每秒一百萬點？因為那是整個三百六十度加起來的。一圈是一千八百個方位乘六十四線，十一萬五千點，一秒十圈就是一百多萬。但這一百多萬點是灑給整個世界的，四十公尺外那個人只分到十五點——大約是一圈的萬分之一。）
+              <a:t>這裡可能會有人問：那為什麼規格書上寫每秒一百萬點？因為那是整個三百六十度加起來的。一圈是一千八百個方位乘上六十四線，十一萬五千點，一秒轉十圈就是一百多萬。可是這一百多萬點是灑給整個世界的，四十公尺外那個人只分到十五點，大約是一圈的萬分之一。
 </a:t>
             </a:r>
           </a:p>
@@ -6459,7 +6129,7 @@
                 <a:ea typeface="Arial Unicode MS"/>
                 <a:cs typeface="Arial Unicode MS"/>
               </a:rPr>
-              <a:t>所以下次看到漂亮的點雲圖，要記得問一句：這是單一瞬間掃出來的，還是很多幀疊起來的？測繪車停在原地掃幾分鐘，當然可以密到像照片。</a:t>
+              <a:t>所以下次看到漂亮的點雲圖，要記得問一句：這是單一瞬間掃出來的，還是很多張疊起來的？測繪車停在原地掃幾分鐘，當然可以密到像照片一樣。</a:t>
             </a:r>
           </a:p>
         </p:txBody>
@@ -6580,7 +6250,7 @@
                 <a:ea typeface="Arial Unicode MS"/>
                 <a:cs typeface="Arial Unicode MS"/>
               </a:rPr>
-              <a:t>先解釋表頭那個詞：</a:t>
+              <a:t>先解釋表頭那個詞，</a:t>
             </a:r>
             <a:r>
               <a:rPr sz="1000" b="1" lang="zh-TW" dirty="0">
@@ -6602,7 +6272,7 @@
                 <a:ea typeface="Arial Unicode MS"/>
                 <a:cs typeface="Arial Unicode MS"/>
               </a:rPr>
-              <a:t>，規格表上寫 channel，中文叫線或線束。
+              <a:t>。規格表上寫 channel，中文叫線，或者叫線束。
 </a:t>
             </a:r>
           </a:p>
@@ -6624,7 +6294,7 @@
                 <a:ea typeface="Arial Unicode MS"/>
                 <a:cs typeface="Arial Unicode MS"/>
               </a:rPr>
-              <a:t>光達裡面不是只有一支雷射，是垂直方向疊了好幾支。十六線就是疊了十六支，六十四線就是六十四支。這一疊雷射一邊轉一邊發射，轉一圈下來，就在車子周圍的空間裡畫出十六圈或六十四圈——像樓房的樓層一樣，一層一層疊上去。
+              <a:t>光達裡面不是只有一支雷射，是垂直方向疊了好幾支。十六線就是疊了十六支，六十四線就是六十四支。這一疊雷射一邊轉一邊發射，轉一圈下來，就在車子周圍的空間裡畫出十六圈或者六十四圈，像樓房的樓層一樣，一層一層疊上去。
 </a:t>
             </a:r>
           </a:p>
@@ -6646,7 +6316,7 @@
                 <a:ea typeface="Arial Unicode MS"/>
                 <a:cs typeface="Arial Unicode MS"/>
               </a:rPr>
-              <a:t>（可以用手比：手掌打平當成一條掃描線，往上疊幾層。線束愈多，層跟層之間愈密。）
+              <a:t>大家可以用手比比看：手掌打平當成一條掃描線，往上疊幾層。線束愈多，層跟層之間就愈密。
 </a:t>
             </a:r>
           </a:p>
@@ -6712,7 +6382,7 @@
                 <a:ea typeface="Arial Unicode MS"/>
                 <a:cs typeface="Arial Unicode MS"/>
               </a:rPr>
-              <a:t>這裡有一個同學一定會問的問題：線束數從頭到尾都是六十四，為什麼十公尺有三百零八點、四十公尺只剩十五點？
+              <a:t>這裡有一個問題大家一定會想到：線束數從頭到尾都是六十四，為什麼十公尺有三百零八點，四十公尺只剩十五點？
 </a:t>
             </a:r>
           </a:p>
@@ -6734,7 +6404,7 @@
                 <a:ea typeface="Arial Unicode MS"/>
                 <a:cs typeface="Arial Unicode MS"/>
               </a:rPr>
-              <a:t>關鍵在於：</a:t>
+              <a:t>關鍵在於，</a:t>
             </a:r>
             <a:r>
               <a:rPr sz="1000" b="1" lang="zh-TW" dirty="0">
@@ -6756,7 +6426,7 @@
                 <a:ea typeface="Arial Unicode MS"/>
                 <a:cs typeface="Arial Unicode MS"/>
               </a:rPr>
-              <a:t>。六十四條線平均分佈在垂直二十七度裡面，所以相鄰兩條線永遠差零點四三度。這個角度不會變，但同樣一個角度射出去，愈遠張開的實際距離愈大——像手電筒的光錐，愈遠愈散。
+              <a:t>。六十四條線平均分佈在垂直二十七度裡面，所以相鄰兩條線永遠差零點四三度。這個角度不會變，可是同樣一個角度射出去，愈遠張開的實際距離愈大，就像手電筒的光錐，愈遠愈散。
 </a:t>
             </a:r>
           </a:p>
@@ -6866,7 +6536,7 @@
                 <a:ea typeface="Arial Unicode MS"/>
                 <a:cs typeface="Arial Unicode MS"/>
               </a:rPr>
-              <a:t>（請在白板上把這兩組乘法並排寫出來，這一頁就靠這兩行。）
+              <a:t>我把這兩組乘法並排寫在白板上，這一頁就靠這兩行。
 </a:t>
             </a:r>
           </a:p>
@@ -6932,7 +6602,7 @@
                 <a:ea typeface="Arial Unicode MS"/>
                 <a:cs typeface="Arial Unicode MS"/>
               </a:rPr>
-              <a:t>八十公尺的時候縫已經有六十公分寬，比人還寬，整個人只夾得到兩個點。十六線的縫是六十四線的四倍，所以八十公尺那一格是零——人整個掉進縫裡，一條線都沒打到。
+              <a:t>八十公尺的時候，縫已經有六十公分寬，比人還寬，整個人只夾得到兩個點。十六線的縫是六十四線的四倍，所以八十公尺那一格是零——人整個掉進縫裡，一條線都沒有打到。
 </a:t>
             </a:r>
           </a:p>
@@ -6976,7 +6646,7 @@
                 <a:ea typeface="Arial Unicode MS"/>
                 <a:cs typeface="Arial Unicode MS"/>
               </a:rPr>
-              <a:t>先看十公尺那一欄。十六線七十點，一百二十八線六百三十點。差九倍，但老實說七十點已經夠用了——在十公尺，便宜的光達也看得清清楚楚。
+              <a:t>先看十公尺那一欄。十六線七十點，一百二十八線六百三十點，差九倍。可是老實說七十點已經夠用了，在十公尺，便宜的光達也看得清清楚楚。
 </a:t>
             </a:r>
           </a:p>
@@ -6998,7 +6668,7 @@
                 <a:ea typeface="Arial Unicode MS"/>
                 <a:cs typeface="Arial Unicode MS"/>
               </a:rPr>
-              <a:t>現在看八十公尺那一欄。十六線：零點。完全看不到。一百二十八線：五點。
+              <a:t>現在看八十公尺那一欄。十六線，零點，完全看不到。一百二十八線，五點。
 </a:t>
             </a:r>
           </a:p>
@@ -7064,7 +6734,7 @@
                 <a:ea typeface="Arial Unicode MS"/>
                 <a:cs typeface="Arial Unicode MS"/>
               </a:rPr>
-              <a:t>。而遠處那幾個點，決定了這台車能開多快——你要在八十公尺外發現行人，才有餘裕在高速公路上安全減速。
+              <a:t>。而遠處那幾個點，決定了這台車能開多快——你要在八十公尺外發現行人，才有餘裕在高速公路上安全地減速。
 </a:t>
             </a:r>
           </a:p>
@@ -7086,7 +6756,7 @@
                 <a:ea typeface="Arial Unicode MS"/>
                 <a:cs typeface="Arial Unicode MS"/>
               </a:rPr>
-              <a:t>反過來說，如果這台車只在園區裡用，時速二十，那十六線就夠了，花錢買一百二十八線是浪費。
+              <a:t>反過來說，如果這台車只在園區裡面用，時速二十，那十六線就夠了，花錢買一百二十八線是浪費。
 </a:t>
             </a:r>
           </a:p>
@@ -7108,7 +6778,7 @@
                 <a:ea typeface="Arial Unicode MS"/>
                 <a:cs typeface="Arial Unicode MS"/>
               </a:rPr>
-              <a:t>這就回到第二週講的 ODD：感測器的規格和運行條件是綁在一起的。我們第三節會再回到這件事。</a:t>
+              <a:t>這就回到第二週講的 ODD：感測器的規格和運行條件是綁在一起的。第三節我們會再回到這件事。</a:t>
             </a:r>
           </a:p>
         </p:txBody>
@@ -7229,7 +6899,7 @@
                 <a:ea typeface="Arial Unicode MS"/>
                 <a:cs typeface="Arial Unicode MS"/>
               </a:rPr>
-              <a:t>第二位同學。這一輪要動參數，所以先點左邊的「光達」那顆按鈕把參數展開。
+              <a:t>第二位同學。這一輪要動參數，所以先點左邊的「光達」那顆按鈕，把參數展開。
 </a:t>
             </a:r>
           </a:p>
@@ -7251,7 +6921,7 @@
                 <a:ea typeface="Arial Unicode MS"/>
                 <a:cs typeface="Arial Unicode MS"/>
               </a:rPr>
-              <a:t>（預期讀值：40 公尺處，64 線 15 點、16 線 3 點、128 線 33 點。滑桿下方提示會顯示相鄰線束間隔，例如 64 線是 0.43°、16 線是 1.80°。）
+              <a:t>四十公尺的地方，六十四線是十五點，十六線是三點，一百二十八線是三十三點。滑桿下面的提示也會跟著變，六十四線的時候相鄰線束間隔是零點四三度，十六線的時候是一點八度。
 </a:t>
             </a:r>
           </a:p>
@@ -7295,7 +6965,7 @@
                 <a:ea typeface="Arial Unicode MS"/>
                 <a:cs typeface="Arial Unicode MS"/>
               </a:rPr>
-              <a:t>（預期答案：沒有，一直都是 40.0 m。）
+              <a:t>沒有。不管十六線還是一百二十八線，距離都是四十點零公尺。
 </a:t>
             </a:r>
           </a:p>
@@ -7317,7 +6987,29 @@
                 <a:ea typeface="Arial Unicode MS"/>
                 <a:cs typeface="Arial Unicode MS"/>
               </a:rPr>
-              <a:t>沒有。不管十六線還是一百二十八線，距離都是四十點零公尺。
+              <a:t>這是陷阱的地方，也是很重要的觀念：</a:t>
+            </a:r>
+            <a:r>
+              <a:rPr sz="1000" b="1" lang="zh-TW" dirty="0">
+                <a:solidFill>
+                  <a:srgbClr val="000000"/>
+                </a:solidFill>
+                <a:latin typeface="Arial Unicode MS"/>
+                <a:ea typeface="Arial Unicode MS"/>
+                <a:cs typeface="Arial Unicode MS"/>
+              </a:rPr>
+              <a:t>線束數不影響「一個點」量到的距離準不準，它影響的是有沒有打到、打到幾點。</a:t>
+            </a:r>
+            <a:r>
+              <a:rPr sz="1000" lang="zh-TW" dirty="0">
+                <a:solidFill>
+                  <a:srgbClr val="000000"/>
+                </a:solidFill>
+                <a:latin typeface="Arial Unicode MS"/>
+                <a:ea typeface="Arial Unicode MS"/>
+                <a:cs typeface="Arial Unicode MS"/>
+              </a:rPr>
+              <a:t>
 </a:t>
             </a:r>
           </a:p>
@@ -7339,29 +7031,7 @@
                 <a:ea typeface="Arial Unicode MS"/>
                 <a:cs typeface="Arial Unicode MS"/>
               </a:rPr>
-              <a:t>這是陷阱的地方，也是很重要的觀念：</a:t>
-            </a:r>
-            <a:r>
-              <a:rPr sz="1000" b="1" lang="zh-TW" dirty="0">
-                <a:solidFill>
-                  <a:srgbClr val="000000"/>
-                </a:solidFill>
-                <a:latin typeface="Arial Unicode MS"/>
-                <a:ea typeface="Arial Unicode MS"/>
-                <a:cs typeface="Arial Unicode MS"/>
-              </a:rPr>
-              <a:t>線束數不影響「一個點」量到的距離準不準，它影響的是有沒有打到、打到幾點</a:t>
-            </a:r>
-            <a:r>
-              <a:rPr sz="1000" lang="zh-TW" dirty="0">
-                <a:solidFill>
-                  <a:srgbClr val="000000"/>
-                </a:solidFill>
-                <a:latin typeface="Arial Unicode MS"/>
-                <a:ea typeface="Arial Unicode MS"/>
-                <a:cs typeface="Arial Unicode MS"/>
-              </a:rPr>
-              <a:t>。
+              <a:t>光達量距離的方式是算雷射飛出去再回來的時間，那是計時電路的事，單點精度大概正負兩公分，跟你有幾條線完全沒有關係。十六線和一百二十八線打在同一個位置，那一個點回報的距離一樣準。
 </a:t>
             </a:r>
           </a:p>
@@ -7383,7 +7053,29 @@
                 <a:ea typeface="Arial Unicode MS"/>
                 <a:cs typeface="Arial Unicode MS"/>
               </a:rPr>
-              <a:t>光達量距離的方式是算雷射飛出去再回來的時間。那是計時電路的事，單點精度大概正負兩公分，跟你有幾條線完全沒關係。十六線和一百二十八線打在同一個位置，那一個點回報的距離一樣準。
+              <a:t>不過這裡一定會有人舉手問：</a:t>
+            </a:r>
+            <a:r>
+              <a:rPr sz="1000" b="1" lang="zh-TW" dirty="0">
+                <a:solidFill>
+                  <a:srgbClr val="000000"/>
+                </a:solidFill>
+                <a:latin typeface="Arial Unicode MS"/>
+                <a:ea typeface="Arial Unicode MS"/>
+                <a:cs typeface="Arial Unicode MS"/>
+              </a:rPr>
+              <a:t>點比較多，不是應該比較準嗎？</a:t>
+            </a:r>
+            <a:r>
+              <a:rPr sz="1000" lang="zh-TW" dirty="0">
+                <a:solidFill>
+                  <a:srgbClr val="000000"/>
+                </a:solidFill>
+                <a:latin typeface="Arial Unicode MS"/>
+                <a:ea typeface="Arial Unicode MS"/>
+                <a:cs typeface="Arial Unicode MS"/>
+              </a:rPr>
+              <a:t>
 </a:t>
             </a:r>
           </a:p>
@@ -7397,17 +7089,6 @@
               </a:spcAft>
             </a:pPr>
             <a:r>
-              <a:rPr sz="1000" b="1" lang="zh-TW" dirty="0">
-                <a:solidFill>
-                  <a:srgbClr val="000000"/>
-                </a:solidFill>
-                <a:latin typeface="Arial Unicode MS"/>
-                <a:ea typeface="Arial Unicode MS"/>
-                <a:cs typeface="Arial Unicode MS"/>
-              </a:rPr>
-              <a:t>不過這裡一定會有同學舉手問：點比較多，不是應該比較準嗎？</a:t>
-            </a:r>
-            <a:r>
               <a:rPr sz="1000" lang="zh-TW" dirty="0">
                 <a:solidFill>
                   <a:srgbClr val="000000"/>
@@ -7416,7 +7097,7 @@
                 <a:ea typeface="Arial Unicode MS"/>
                 <a:cs typeface="Arial Unicode MS"/>
               </a:rPr>
-              <a:t>
+              <a:t>問得很好，方向也是對的，只是「準」這個字要分成兩件事來講。
 </a:t>
             </a:r>
           </a:p>
@@ -7438,7 +7119,29 @@
                 <a:ea typeface="Arial Unicode MS"/>
                 <a:cs typeface="Arial Unicode MS"/>
               </a:rPr>
-              <a:t>問得很好，而且方向是對的——只是「準」這個字要分成兩件事講。
+              <a:t>第一件事是「</a:t>
+            </a:r>
+            <a:r>
+              <a:rPr sz="1000" b="1" lang="zh-TW" dirty="0">
+                <a:solidFill>
+                  <a:srgbClr val="000000"/>
+                </a:solidFill>
+                <a:latin typeface="Arial Unicode MS"/>
+                <a:ea typeface="Arial Unicode MS"/>
+                <a:cs typeface="Arial Unicode MS"/>
+              </a:rPr>
+              <a:t>這個點離我多遠</a:t>
+            </a:r>
+            <a:r>
+              <a:rPr sz="1000" lang="zh-TW" dirty="0">
+                <a:solidFill>
+                  <a:srgbClr val="000000"/>
+                </a:solidFill>
+                <a:latin typeface="Arial Unicode MS"/>
+                <a:ea typeface="Arial Unicode MS"/>
+                <a:cs typeface="Arial Unicode MS"/>
+              </a:rPr>
+              <a:t>」。這件事點多不會比較準，理由剛剛講過了。
 </a:t>
             </a:r>
           </a:p>
@@ -7460,7 +7163,7 @@
                 <a:ea typeface="Arial Unicode MS"/>
                 <a:cs typeface="Arial Unicode MS"/>
               </a:rPr>
-              <a:t>第一件事是「</a:t>
+              <a:t>第二件事是「</a:t>
             </a:r>
             <a:r>
               <a:rPr sz="1000" b="1" lang="zh-TW" dirty="0">
@@ -7471,7 +7174,7 @@
                 <a:ea typeface="Arial Unicode MS"/>
                 <a:cs typeface="Arial Unicode MS"/>
               </a:rPr>
-              <a:t>這個點離我多遠</a:t>
+              <a:t>那個東西在哪裡、有多大、輪廓長什麼樣</a:t>
             </a:r>
             <a:r>
               <a:rPr sz="1000" lang="zh-TW" dirty="0">
@@ -7482,7 +7185,7 @@
                 <a:ea typeface="Arial Unicode MS"/>
                 <a:cs typeface="Arial Unicode MS"/>
               </a:rPr>
-              <a:t>」。這件事點多不會比較準，理由剛剛講過了。
+              <a:t>」。這件事點多就差很多。
 </a:t>
             </a:r>
           </a:p>
@@ -7504,7 +7207,7 @@
                 <a:ea typeface="Arial Unicode MS"/>
                 <a:cs typeface="Arial Unicode MS"/>
               </a:rPr>
-              <a:t>第二件事是「</a:t>
+              <a:t>我舉個例子。四十公尺外，十六線只打到三個點。這三個點告訴你那邊有東西，可是那個東西的</a:t>
             </a:r>
             <a:r>
               <a:rPr sz="1000" b="1" lang="zh-TW" dirty="0">
@@ -7515,7 +7218,7 @@
                 <a:ea typeface="Arial Unicode MS"/>
                 <a:cs typeface="Arial Unicode MS"/>
               </a:rPr>
-              <a:t>那個東西在哪裡、有多大、輪廓長什麼樣</a:t>
+              <a:t>左右邊界</a:t>
             </a:r>
             <a:r>
               <a:rPr sz="1000" lang="zh-TW" dirty="0">
@@ -7526,7 +7229,7 @@
                 <a:ea typeface="Arial Unicode MS"/>
                 <a:cs typeface="Arial Unicode MS"/>
               </a:rPr>
-              <a:t>」。這件事點多就差很多。
+              <a:t>在哪裡？你算不出來。六十四線有十五個點，你就量得出他大概多寬、中心在哪裡。我在白板上畫兩排點，一排三顆、一排十五顆，大家看哪一排圈得出中心和寬度。
 </a:t>
             </a:r>
           </a:p>
@@ -7540,6 +7243,17 @@
               </a:spcAft>
             </a:pPr>
             <a:r>
+              <a:rPr sz="1000" b="1" lang="zh-TW" dirty="0">
+                <a:solidFill>
+                  <a:srgbClr val="000000"/>
+                </a:solidFill>
+                <a:latin typeface="Arial Unicode MS"/>
+                <a:ea typeface="Arial Unicode MS"/>
+                <a:cs typeface="Arial Unicode MS"/>
+              </a:rPr>
+              <a:t>而這件事才是真正要命的。</a:t>
+            </a:r>
+            <a:r>
               <a:rPr sz="1000" lang="zh-TW" dirty="0">
                 <a:solidFill>
                   <a:srgbClr val="000000"/>
@@ -7548,29 +7262,7 @@
                 <a:ea typeface="Arial Unicode MS"/>
                 <a:cs typeface="Arial Unicode MS"/>
               </a:rPr>
-              <a:t>我舉個例子。四十公尺外，十六線只打到三個點。這三個點告訴你那邊有東西，但那個東西的</a:t>
-            </a:r>
-            <a:r>
-              <a:rPr sz="1000" b="1" lang="zh-TW" dirty="0">
-                <a:solidFill>
-                  <a:srgbClr val="000000"/>
-                </a:solidFill>
-                <a:latin typeface="Arial Unicode MS"/>
-                <a:ea typeface="Arial Unicode MS"/>
-                <a:cs typeface="Arial Unicode MS"/>
-              </a:rPr>
-              <a:t>左右邊界</a:t>
-            </a:r>
-            <a:r>
-              <a:rPr sz="1000" lang="zh-TW" dirty="0">
-                <a:solidFill>
-                  <a:srgbClr val="000000"/>
-                </a:solidFill>
-                <a:latin typeface="Arial Unicode MS"/>
-                <a:ea typeface="Arial Unicode MS"/>
-                <a:cs typeface="Arial Unicode MS"/>
-              </a:rPr>
-              <a:t>在哪裡？你算不出來。六十四線有十五個點，你就量得出他大概多寬、中心在哪裡。
+              <a:t>自駕車要決定的不是「他離我四十公尺」，是「他站在我的車道裡面還是外面」。那是左右的判斷，靠的是點的分布，不是單點的距離。三個點你判斷不出來，十五個點才行。
 </a:t>
             </a:r>
           </a:p>
@@ -7592,7 +7284,51 @@
                 <a:ea typeface="Arial Unicode MS"/>
                 <a:cs typeface="Arial Unicode MS"/>
               </a:rPr>
-              <a:t>（在白板上畫兩排點：一排三顆、一排十五顆，圈出中心和寬度。）
+              <a:t>還有一點講給程度比較好的同學聽。很多個點確實可以互相平均，把隨機誤差平掉一些，可是這個好處是</a:t>
+            </a:r>
+            <a:r>
+              <a:rPr sz="1000" b="1" lang="zh-TW" dirty="0">
+                <a:solidFill>
+                  <a:srgbClr val="000000"/>
+                </a:solidFill>
+                <a:latin typeface="Arial Unicode MS"/>
+                <a:ea typeface="Arial Unicode MS"/>
+                <a:cs typeface="Arial Unicode MS"/>
+              </a:rPr>
+              <a:t>開根號</a:t>
+            </a:r>
+            <a:r>
+              <a:rPr sz="1000" lang="zh-TW" dirty="0">
+                <a:solidFill>
+                  <a:srgbClr val="000000"/>
+                </a:solidFill>
+                <a:latin typeface="Arial Unicode MS"/>
+                <a:ea typeface="Arial Unicode MS"/>
+                <a:cs typeface="Arial Unicode MS"/>
+              </a:rPr>
+              <a:t>的。點數從三個變十五個，是五倍，誤差只降到大約零點四五倍，不是降到五分之一。你花四倍的錢從六十四線升到一百二十八線，換到的距離精度改善很有限，換到的</a:t>
+            </a:r>
+            <a:r>
+              <a:rPr sz="1000" b="1" lang="zh-TW" dirty="0">
+                <a:solidFill>
+                  <a:srgbClr val="000000"/>
+                </a:solidFill>
+                <a:latin typeface="Arial Unicode MS"/>
+                <a:ea typeface="Arial Unicode MS"/>
+                <a:cs typeface="Arial Unicode MS"/>
+              </a:rPr>
+              <a:t>形狀</a:t>
+            </a:r>
+            <a:r>
+              <a:rPr sz="1000" lang="zh-TW" dirty="0">
+                <a:solidFill>
+                  <a:srgbClr val="000000"/>
+                </a:solidFill>
+                <a:latin typeface="Arial Unicode MS"/>
+                <a:ea typeface="Arial Unicode MS"/>
+                <a:cs typeface="Arial Unicode MS"/>
+              </a:rPr>
+              <a:t>改善才是重點。
 </a:t>
             </a:r>
           </a:p>
@@ -7606,6 +7342,17 @@
               </a:spcAft>
             </a:pPr>
             <a:r>
+              <a:rPr sz="1000" lang="zh-TW" dirty="0">
+                <a:solidFill>
+                  <a:srgbClr val="000000"/>
+                </a:solidFill>
+                <a:latin typeface="Arial Unicode MS"/>
+                <a:ea typeface="Arial Unicode MS"/>
+                <a:cs typeface="Arial Unicode MS"/>
+              </a:rPr>
+              <a:t>所以整句話應該這樣講：</a:t>
+            </a:r>
+            <a:r>
               <a:rPr sz="1000" b="1" lang="zh-TW" dirty="0">
                 <a:solidFill>
                   <a:srgbClr val="000000"/>
@@ -7614,7 +7361,7 @@
                 <a:ea typeface="Arial Unicode MS"/>
                 <a:cs typeface="Arial Unicode MS"/>
               </a:rPr>
-              <a:t>而這件事才是真正要命的。</a:t>
+              <a:t>線束數買的不是「這個點多遠」，是「那個東西有多大、邊界在哪、往哪動」。</a:t>
             </a:r>
             <a:r>
               <a:rPr sz="1000" lang="zh-TW" dirty="0">
@@ -7625,7 +7372,7 @@
                 <a:ea typeface="Arial Unicode MS"/>
                 <a:cs typeface="Arial Unicode MS"/>
               </a:rPr>
-              <a:t> 自駕車要決定的不是「他離我四十公尺」，是「他站在我的車道裡面還是外面」。那是左右的判斷，靠的是點的分布，不是單點的距離。三個點你判斷不出來，十五個點才行。
+              <a:t>
 </a:t>
             </a:r>
           </a:p>
@@ -7647,7 +7394,7 @@
                 <a:ea typeface="Arial Unicode MS"/>
                 <a:cs typeface="Arial Unicode MS"/>
               </a:rPr>
-              <a:t>還有一點給程度比較好的同學：很多個點確實可以互相平均，把隨機誤差平掉一些。但這個好處是</a:t>
+              <a:t>這裡一定會有人想到第一節那句「光達不知道那是什麼」，然後覺得矛盾。這兩句不衝突。點數多給你的是</a:t>
             </a:r>
             <a:r>
               <a:rPr sz="1000" b="1" lang="zh-TW" dirty="0">
@@ -7658,7 +7405,7 @@
                 <a:ea typeface="Arial Unicode MS"/>
                 <a:cs typeface="Arial Unicode MS"/>
               </a:rPr>
-              <a:t>根號</a:t>
+              <a:t>形狀</a:t>
             </a:r>
             <a:r>
               <a:rPr sz="1000" lang="zh-TW" dirty="0">
@@ -7669,7 +7416,7 @@
                 <a:ea typeface="Arial Unicode MS"/>
                 <a:cs typeface="Arial Unicode MS"/>
               </a:rPr>
-              <a:t>的——點數從三個變十五個，是五倍，誤差只降到大約零點四五倍，不是降到五分之一。你花四倍的錢從六十四線升到一百二十八線，換到的距離精度改善很有限，換到的</a:t>
+              <a:t>，多寬、多高、輪廓大概什麼樣、中心在哪。至於「那是一個人」這個</a:t>
             </a:r>
             <a:r>
               <a:rPr sz="1000" b="1" lang="zh-TW" dirty="0">
@@ -7680,7 +7427,7 @@
                 <a:ea typeface="Arial Unicode MS"/>
                 <a:cs typeface="Arial Unicode MS"/>
               </a:rPr>
-              <a:t>形狀</a:t>
+              <a:t>名字</a:t>
             </a:r>
             <a:r>
               <a:rPr sz="1000" lang="zh-TW" dirty="0">
@@ -7691,7 +7438,7 @@
                 <a:ea typeface="Arial Unicode MS"/>
                 <a:cs typeface="Arial Unicode MS"/>
               </a:rPr>
-              <a:t>改善才是重點。
+              <a:t>，還是要靠相機給，那就是第一節那張補洞表的分工。真車的做法，是把光達的形狀跟相機的類別配在一起用。至於點雲本身能不能認出類別，那是第四章感知要講的事，今天先不進去。
 </a:t>
             </a:r>
           </a:p>
@@ -7713,29 +7460,7 @@
                 <a:ea typeface="Arial Unicode MS"/>
                 <a:cs typeface="Arial Unicode MS"/>
               </a:rPr>
-              <a:t>所以整句話應該這樣講：</a:t>
-            </a:r>
-            <a:r>
-              <a:rPr sz="1000" b="1" lang="zh-TW" dirty="0">
-                <a:solidFill>
-                  <a:srgbClr val="000000"/>
-                </a:solidFill>
-                <a:latin typeface="Arial Unicode MS"/>
-                <a:ea typeface="Arial Unicode MS"/>
-                <a:cs typeface="Arial Unicode MS"/>
-              </a:rPr>
-              <a:t>線束數買的不是「這個點多遠」，是「那個東西有多大、邊界在哪、往哪動」。</a:t>
-            </a:r>
-            <a:r>
-              <a:rPr sz="1000" lang="zh-TW" dirty="0">
-                <a:solidFill>
-                  <a:srgbClr val="000000"/>
-                </a:solidFill>
-                <a:latin typeface="Arial Unicode MS"/>
-                <a:ea typeface="Arial Unicode MS"/>
-                <a:cs typeface="Arial Unicode MS"/>
-              </a:rPr>
-              <a:t>
+              <a:t>以後如果有人跟你說「這顆光達比較準」，你要追問一句：你說的準，是單點測距的精度，還是遠處看得出形狀？這是兩個完全不同的規格，價錢也差很多。
 </a:t>
             </a:r>
           </a:p>
@@ -7757,51 +7482,7 @@
                 <a:ea typeface="Arial Unicode MS"/>
                 <a:cs typeface="Arial Unicode MS"/>
               </a:rPr>
-              <a:t>（這裡一定會有同學想到第一節那句「光達不知道那是什麼」，然後覺得矛盾。先謝謝他問，這兩句不衝突：點數多給你的是</a:t>
-            </a:r>
-            <a:r>
-              <a:rPr sz="1000" b="1" lang="zh-TW" dirty="0">
-                <a:solidFill>
-                  <a:srgbClr val="000000"/>
-                </a:solidFill>
-                <a:latin typeface="Arial Unicode MS"/>
-                <a:ea typeface="Arial Unicode MS"/>
-                <a:cs typeface="Arial Unicode MS"/>
-              </a:rPr>
-              <a:t>形狀</a:t>
-            </a:r>
-            <a:r>
-              <a:rPr sz="1000" lang="zh-TW" dirty="0">
-                <a:solidFill>
-                  <a:srgbClr val="000000"/>
-                </a:solidFill>
-                <a:latin typeface="Arial Unicode MS"/>
-                <a:ea typeface="Arial Unicode MS"/>
-                <a:cs typeface="Arial Unicode MS"/>
-              </a:rPr>
-              <a:t>——多寬、多高、輪廓大概什麼樣、中心在哪。至於「那是一個人」這個</a:t>
-            </a:r>
-            <a:r>
-              <a:rPr sz="1000" b="1" lang="zh-TW" dirty="0">
-                <a:solidFill>
-                  <a:srgbClr val="000000"/>
-                </a:solidFill>
-                <a:latin typeface="Arial Unicode MS"/>
-                <a:ea typeface="Arial Unicode MS"/>
-                <a:cs typeface="Arial Unicode MS"/>
-              </a:rPr>
-              <a:t>名字</a:t>
-            </a:r>
-            <a:r>
-              <a:rPr sz="1000" lang="zh-TW" dirty="0">
-                <a:solidFill>
-                  <a:srgbClr val="000000"/>
-                </a:solidFill>
-                <a:latin typeface="Arial Unicode MS"/>
-                <a:ea typeface="Arial Unicode MS"/>
-                <a:cs typeface="Arial Unicode MS"/>
-              </a:rPr>
-              <a:t>，還是要靠相機給，那就是第一節那張補洞表的分工。真車的做法是把光達的形狀跟相機的類別配在一起用。點雲本身能不能認出類別，是第四章感知要講的事，今天先不進去。）
+              <a:t>這件事現在在工具上看得到。光達那張卡寫的是四十點零，正負零點零二；相機那張是正負零點五八；熱像更差。拉線束數的時候，光達那個正負零點零二從頭到尾不會變，因為它是計時電路決定的，跟幾條線無關。
 </a:t>
             </a:r>
           </a:p>
@@ -7823,7 +7504,7 @@
                 <a:ea typeface="Arial Unicode MS"/>
                 <a:cs typeface="Arial Unicode MS"/>
               </a:rPr>
-              <a:t>如果有人跟你說「這顆光達比較準」，你要追問一句：你說的準，是單點測距的精度，還是遠處看得出形狀？這是兩個完全不同的規格，價錢也差很多。
+              <a:t>另外補一個工具的限制：這裡的距離是直接算出來的，沒有加雜訊，所以中間那個數字永遠是四十點零。真的機器每一個點都會在正負兩公分裡面跳動。
 </a:t>
             </a:r>
           </a:p>
@@ -7845,73 +7526,7 @@
                 <a:ea typeface="Arial Unicode MS"/>
                 <a:cs typeface="Arial Unicode MS"/>
               </a:rPr>
-              <a:t>（工具上這件事現在看得到：光達那張卡寫的是 </a:t>
-            </a:r>
-            <a:r>
-              <a:rPr sz="1000" b="1" lang="zh-TW" dirty="0">
-                <a:solidFill>
-                  <a:srgbClr val="000000"/>
-                </a:solidFill>
-                <a:latin typeface="Arial Unicode MS"/>
-                <a:ea typeface="Arial Unicode MS"/>
-                <a:cs typeface="Arial Unicode MS"/>
-              </a:rPr>
-              <a:t>40.0 ± 0.02 m</a:t>
-            </a:r>
-            <a:r>
-              <a:rPr sz="1000" lang="zh-TW" dirty="0">
-                <a:solidFill>
-                  <a:srgbClr val="000000"/>
-                </a:solidFill>
-                <a:latin typeface="Arial Unicode MS"/>
-                <a:ea typeface="Arial Unicode MS"/>
-                <a:cs typeface="Arial Unicode MS"/>
-              </a:rPr>
-              <a:t>，相機那張是 </a:t>
-            </a:r>
-            <a:r>
-              <a:rPr sz="1000" b="1" lang="zh-TW" dirty="0">
-                <a:solidFill>
-                  <a:srgbClr val="000000"/>
-                </a:solidFill>
-                <a:latin typeface="Arial Unicode MS"/>
-                <a:ea typeface="Arial Unicode MS"/>
-                <a:cs typeface="Arial Unicode MS"/>
-              </a:rPr>
-              <a:t>± 0.58</a:t>
-            </a:r>
-            <a:r>
-              <a:rPr sz="1000" lang="zh-TW" dirty="0">
-                <a:solidFill>
-                  <a:srgbClr val="000000"/>
-                </a:solidFill>
-                <a:latin typeface="Arial Unicode MS"/>
-                <a:ea typeface="Arial Unicode MS"/>
-                <a:cs typeface="Arial Unicode MS"/>
-              </a:rPr>
-              <a:t>，熱像更差。拉線束數的時候，光達那個 ±0.02 從頭到尾不會變——因為它由計時電路決定，跟幾條線無關。另外補一句限制：工具的距離是直接算出來的，沒有加雜訊，所以中間那個數字永遠是 40.0；真機每一個點都會在 ±2 公分內跳動。）
-</a:t>
-            </a:r>
-          </a:p>
-          <a:p>
-            <a:pPr algn="l">
-              <a:lnSpc>
-                <a:spcPct val="115000"/>
-              </a:lnSpc>
-              <a:spcAft>
-                <a:spcPts val="500"/>
-              </a:spcAft>
-            </a:pPr>
-            <a:r>
-              <a:rPr sz="1000" lang="zh-TW" dirty="0">
-                <a:solidFill>
-                  <a:srgbClr val="000000"/>
-                </a:solidFill>
-                <a:latin typeface="Arial Unicode MS"/>
-                <a:ea typeface="Arial Unicode MS"/>
-                <a:cs typeface="Arial Unicode MS"/>
-              </a:rPr>
-              <a:t>大家記住這句話，期末專題寫規格的時候會用到。</a:t>
+              <a:t>大家把這句話記起來，期末專題寫規格的時候會用到。</a:t>
             </a:r>
           </a:p>
         </p:txBody>

--- a/第三週(09-24)/第三週_第2節_簡報.pptx
+++ b/第三週(09-24)/第三週_第2節_簡報.pptx
@@ -706,7 +706,7 @@
                 <a:ea typeface="Arial Unicode MS"/>
                 <a:cs typeface="Arial Unicode MS"/>
               </a:rPr>
-              <a:t>三十公尺：相機正負零點三三、光達二十八點、雷達三十點零、超音波沒有數字、熱像二十像素。
+              <a:t>三十公尺：相機正負零點三三、光達二十八個點、雷達三十點零、超音波沒有數字、熱像二十像素。
 </a:t>
             </a:r>
           </a:p>
@@ -728,7 +728,7 @@
                 <a:ea typeface="Arial Unicode MS"/>
                 <a:cs typeface="Arial Unicode MS"/>
               </a:rPr>
-              <a:t>十公尺：相機正負零點零四、光達三百零八點、雷達十點零、超音波還是沒有、熱像六十二像素。
+              <a:t>十公尺：相機正負零點零四、光達三百零八個點、雷達十點零、超音波還是沒有、熱像六十二像素。
 </a:t>
             </a:r>
           </a:p>
@@ -750,7 +750,7 @@
                 <a:ea typeface="Arial Unicode MS"/>
                 <a:cs typeface="Arial Unicode MS"/>
               </a:rPr>
-              <a:t>四公尺：相機正負零點零一、光達一千九百二十五點、雷達四點零、</a:t>
+              <a:t>四公尺：相機正負零點零一、光達一千九百二十五個點、雷達四點零、</a:t>
             </a:r>
             <a:r>
               <a:rPr sz="1000" b="1" lang="zh-TW" dirty="0">
@@ -2928,7 +2928,7 @@
                 <a:ea typeface="Arial Unicode MS"/>
                 <a:cs typeface="Arial Unicode MS"/>
               </a:rPr>
-              <a:t>大人二十八點，小孩十二點。
+              <a:t>大人二十八個點，小孩十二個點。
 </a:t>
             </a:r>
           </a:p>
@@ -2994,7 +2994,7 @@
                 <a:ea typeface="Arial Unicode MS"/>
                 <a:cs typeface="Arial Unicode MS"/>
               </a:rPr>
-              <a:t>機車四十九點，汽車一百零二點，公車更多。所以在光達眼裡，車子是很明顯的東西，人是模糊的東西，</a:t>
+              <a:t>機車四十九個點，汽車一百零二個點，公車更多。所以在光達眼裡，車子是很明顯的東西，人是模糊的東西，</a:t>
             </a:r>
             <a:r>
               <a:rPr sz="1050" b="1" lang="zh-TW" dirty="0">
@@ -6382,7 +6382,7 @@
                 <a:ea typeface="Arial Unicode MS"/>
                 <a:cs typeface="Arial Unicode MS"/>
               </a:rPr>
-              <a:t>這裡有一個問題大家一定會想到：線束數從頭到尾都是六十四，為什麼十公尺有三百零八點，四十公尺只剩十五點？
+              <a:t>這裡有一個問題大家一定會想到：線束數從頭到尾都是六十四，為什麼十公尺有三百零八個點，四十公尺只剩十五個點？
 </a:t>
             </a:r>
           </a:p>
@@ -6921,7 +6921,7 @@
                 <a:ea typeface="Arial Unicode MS"/>
                 <a:cs typeface="Arial Unicode MS"/>
               </a:rPr>
-              <a:t>四十公尺的地方，六十四線是十五點，十六線是三點，一百二十八線是三十三點。滑桿下面的提示也會跟著變，六十四線的時候相鄰線束間隔是零點四三度，十六線的時候是一點八度。
+              <a:t>四十公尺的地方，六十四線是十五個點，十六線是三個點，一百二十八線是三十三個點。滑桿下面的提示也會跟著變，六十四線的時候相鄰線束間隔是零點四三度，十六線的時候是一點八度。
 </a:t>
             </a:r>
           </a:p>

--- a/第三週(09-24)/第三週_第2節_簡報.pptx
+++ b/第三週(09-24)/第三週_第2節_簡報.pptx
@@ -706,7 +706,7 @@
                 <a:ea typeface="Arial Unicode MS"/>
                 <a:cs typeface="Arial Unicode MS"/>
               </a:rPr>
-              <a:t>三十公尺：相機正負零點三三、光達二十八個點、雷達三十點零、超音波沒有數字、熱像二十像素。
+              <a:t>停在三十公尺的時候，相機是正負零點三三、光達二十八個點、雷達三十點零、超音波沒有數字、熱像二十像素。
 </a:t>
             </a:r>
           </a:p>
@@ -728,7 +728,7 @@
                 <a:ea typeface="Arial Unicode MS"/>
                 <a:cs typeface="Arial Unicode MS"/>
               </a:rPr>
-              <a:t>十公尺：相機正負零點零四、光達三百零八個點、雷達十點零、超音波還是沒有、熱像六十二像素。
+              <a:t>拖到十公尺，相機變成正負零點零四、光達三百零八個點、雷達十點零、超音波還是沒有、熱像六十二像素。
 </a:t>
             </a:r>
           </a:p>
@@ -750,7 +750,7 @@
                 <a:ea typeface="Arial Unicode MS"/>
                 <a:cs typeface="Arial Unicode MS"/>
               </a:rPr>
-              <a:t>四公尺：相機正負零點零一、光達一千九百二十五個點、雷達四點零、</a:t>
+              <a:t>拖到四公尺，相機正負零點零一、光達一千九百二十五個點、雷達四點零，然後</a:t>
             </a:r>
             <a:r>
               <a:rPr sz="1000" b="1" lang="zh-TW" dirty="0">
@@ -761,7 +761,7 @@
                 <a:ea typeface="Arial Unicode MS"/>
                 <a:cs typeface="Arial Unicode MS"/>
               </a:rPr>
-              <a:t>超音波四點零零，第一次出現</a:t>
+              <a:t>超音波第一次出現，四點零零</a:t>
             </a:r>
             <a:r>
               <a:rPr sz="1000" lang="zh-TW" dirty="0">
@@ -772,7 +772,7 @@
                 <a:ea typeface="Arial Unicode MS"/>
                 <a:cs typeface="Arial Unicode MS"/>
               </a:rPr>
-              <a:t>、熱像一百五十三像素。
+              <a:t>，熱像一百五十三像素。
 </a:t>
             </a:r>
           </a:p>
@@ -794,7 +794,7 @@
                 <a:ea typeface="Arial Unicode MS"/>
                 <a:cs typeface="Arial Unicode MS"/>
               </a:rPr>
-              <a:t>三點四公尺：</a:t>
+              <a:t>再往內拖到三點四公尺，</a:t>
             </a:r>
             <a:r>
               <a:rPr sz="1000" b="1" lang="zh-TW" dirty="0">
@@ -816,7 +816,7 @@
                 <a:ea typeface="Arial Unicode MS"/>
                 <a:cs typeface="Arial Unicode MS"/>
               </a:rPr>
-              <a:t>，那張卡變成「落在近距離盲區內」；超音波三點四零。
+              <a:t>，那張卡變成「落在近距離盲區內」，超音波是三點四零。
 </a:t>
             </a:r>
           </a:p>
@@ -838,7 +838,7 @@
                 <a:ea typeface="Arial Unicode MS"/>
                 <a:cs typeface="Arial Unicode MS"/>
               </a:rPr>
-              <a:t>一公尺：光達還是沒有；超音波一點零零、雷達一點零、熱像五百一十六像素。
+              <a:t>最後拖到一公尺，光達還是沒有，超音波一點零零、雷達一點零、熱像五百一十六像素。
 </a:t>
             </a:r>
           </a:p>
@@ -5997,7 +5997,7 @@
                 <a:ea typeface="Arial Unicode MS"/>
                 <a:cs typeface="Arial Unicode MS"/>
               </a:rPr>
-              <a:t>十公尺：身高一點七除以零點零七五，二十二條線；身寬零點五除以零點零三五，十四個點。二十二乘十四，</a:t>
+              <a:t>先算十公尺。身高一點七除以零點零七五，得到二十二條線；身寬零點五除以零點零三五，得到十四個點。二十二乘十四，</a:t>
             </a:r>
             <a:r>
               <a:rPr sz="1000" b="1" lang="zh-TW" dirty="0">
@@ -6041,7 +6041,7 @@
                 <a:ea typeface="Arial Unicode MS"/>
                 <a:cs typeface="Arial Unicode MS"/>
               </a:rPr>
-              <a:t>四十公尺：一點七除以零點三，五條線；零點五除以零點一四，三個點。五乘三，</a:t>
+              <a:t>再算四十公尺。一點七除以零點三，只剩五條線；零點五除以零點一四，只剩三個點。五乘三，</a:t>
             </a:r>
             <a:r>
               <a:rPr sz="1000" b="1" lang="zh-TW" dirty="0">
@@ -6492,7 +6492,7 @@
                 <a:ea typeface="Arial Unicode MS"/>
                 <a:cs typeface="Arial Unicode MS"/>
               </a:rPr>
-              <a:t>十公尺：一點七除以零點零七五，大約二十二條線掃到他；零點五除以零點零三五，大約十四個點。二十二乘十四，三百零八。
+              <a:t>先看十公尺。一點七除以零點零七五，大約二十二條線掃到他；零點五除以零點零三五，大約十四個點。二十二乘十四，三百零八。
 </a:t>
             </a:r>
           </a:p>
@@ -6514,7 +6514,7 @@
                 <a:ea typeface="Arial Unicode MS"/>
                 <a:cs typeface="Arial Unicode MS"/>
               </a:rPr>
-              <a:t>四十公尺：一點七除以零點三，只剩五條線；零點五除以零點一四，只剩三個點。五乘三，十五。
+              <a:t>再看四十公尺。一點七除以零點三，只剩五條線；零點五除以零點一四，只剩三個點。五乘三，十五。
 </a:t>
             </a:r>
           </a:p>
